--- a/slides/aula4-alura.pptx
+++ b/slides/aula4-alura.pptx
@@ -23,9 +23,11 @@
     <p:sldId id="271" r:id="rId17"/>
     <p:sldId id="272" r:id="rId18"/>
     <p:sldId id="273" r:id="rId19"/>
+    <p:sldId id="274" r:id="rId20"/>
+    <p:sldId id="275" r:id="rId21"/>
   </p:sldIdLst>
   <p:notesMasterIdLst>
-    <p:notesMasterId r:id="rId20"/>
+    <p:notesMasterId r:id="rId22"/>
   </p:notesMasterIdLst>
   <p:sldSz cx="24387048" cy="13716000"/>
   <p:notesSz cx="13716000" cy="24387048"/>
@@ -695,7 +697,7 @@
           <a:p>
             <a:r>
               <a:rPr lang="en-US" dirty="0"/>
-              <a:t>CLAQUETE — inicio do video 4.3. Segure 2 segundos em silencio antes de comecar a falar: e por esta tela que a edicao corta.</a:t>
+              <a:t/>
             </a:r>
             <a:endParaRPr lang="en-US" dirty="0"/>
           </a:p>
@@ -871,7 +873,7 @@
           <a:p>
             <a:r>
               <a:rPr lang="en-US" dirty="0"/>
-              <a:t/>
+              <a:t>CLAQUETE — inicio do video 4.3. Segure 2 segundos em silencio antes de comecar a falar: e por esta tela que a edicao corta.</a:t>
             </a:r>
             <a:endParaRPr lang="en-US" dirty="0"/>
           </a:p>
@@ -959,7 +961,7 @@
           <a:p>
             <a:r>
               <a:rPr lang="en-US" dirty="0"/>
-              <a:t>CLAQUETE — inicio do video 4.4. Segure 2 segundos em silencio antes de comecar a falar: e por esta tela que a edicao corta.</a:t>
+              <a:t/>
             </a:r>
             <a:endParaRPr lang="en-US" dirty="0"/>
           </a:p>
@@ -1135,7 +1137,7 @@
           <a:p>
             <a:r>
               <a:rPr lang="en-US" dirty="0"/>
-              <a:t>CLAQUETE — inicio do video 4.5. Segure 2 segundos em silencio antes de comecar a falar: e por esta tela que a edicao corta.</a:t>
+              <a:t>CLAQUETE — inicio do video 4.4. Segure 2 segundos em silencio antes de comecar a falar: e por esta tela que a edicao corta.</a:t>
             </a:r>
             <a:endParaRPr lang="en-US" dirty="0"/>
           </a:p>
@@ -1311,7 +1313,7 @@
           <a:p>
             <a:r>
               <a:rPr lang="en-US" dirty="0"/>
-              <a:t/>
+              <a:t>CLAQUETE — inicio do video 4.5. Segure 2 segundos em silencio antes de comecar a falar: e por esta tela que a edicao corta.</a:t>
             </a:r>
             <a:endParaRPr lang="en-US" dirty="0"/>
           </a:p>
@@ -1335,6 +1337,94 @@
             <a:fld id="{F7021451-1387-4CA6-816F-3879F97B5CBC}" type="slidenum">
               <a:rPr lang="en-US"/>
               <a:t>18</a:t>
+            </a:fld>
+            <a:endParaRPr lang="en-US"/>
+          </a:p>
+        </p:txBody>
+      </p:sp>
+    </p:spTree>
+    <p:extLst>
+      <p:ext uri="{BB962C8B-B14F-4D97-AF65-F5344CB8AC3E}">
+        <p14:creationId xmlns:p14="http://schemas.microsoft.com/office/powerpoint/2010/main" val="1024086991"/>
+      </p:ext>
+    </p:extLst>
+  </p:cSld>
+  <p:clrMapOvr>
+    <a:masterClrMapping/>
+  </p:clrMapOvr>
+</p:notes>
+</file>
+
+<file path=ppt/notesSlides/notesSlide19.xml><?xml version="1.0" encoding="utf-8"?>
+<p:notes xmlns:a="http://schemas.openxmlformats.org/drawingml/2006/main" xmlns:r="http://schemas.openxmlformats.org/officeDocument/2006/relationships" xmlns:p="http://schemas.openxmlformats.org/presentationml/2006/main">
+  <p:cSld>
+    <p:spTree>
+      <p:nvGrpSpPr>
+        <p:cNvPr id="1" name=""/>
+        <p:cNvGrpSpPr/>
+        <p:nvPr/>
+      </p:nvGrpSpPr>
+      <p:grpSpPr>
+        <a:xfrm>
+          <a:off x="0" y="0"/>
+          <a:ext cx="0" cy="0"/>
+          <a:chOff x="0" y="0"/>
+          <a:chExt cx="0" cy="0"/>
+        </a:xfrm>
+      </p:grpSpPr>
+      <p:sp>
+        <p:nvSpPr>
+          <p:cNvPr id="2" name="Slide Image Placeholder 1"/>
+          <p:cNvSpPr>
+            <a:spLocks noGrp="1" noRot="1" noChangeAspect="1"/>
+          </p:cNvSpPr>
+          <p:nvPr>
+            <p:ph type="sldImg"/>
+          </p:nvPr>
+        </p:nvSpPr>
+        <p:spPr/>
+      </p:sp>
+      <p:sp>
+        <p:nvSpPr>
+          <p:cNvPr id="3" name="Notes Placeholder 2"/>
+          <p:cNvSpPr>
+            <a:spLocks noGrp="1"/>
+          </p:cNvSpPr>
+          <p:nvPr>
+            <p:ph type="body" idx="1"/>
+          </p:nvPr>
+        </p:nvSpPr>
+        <p:spPr/>
+        <p:txBody>
+          <a:bodyPr/>
+          <a:lstStyle/>
+          <a:p>
+            <a:r>
+              <a:rPr lang="en-US" dirty="0"/>
+              <a:t/>
+            </a:r>
+            <a:endParaRPr lang="en-US" dirty="0"/>
+          </a:p>
+        </p:txBody>
+      </p:sp>
+      <p:sp>
+        <p:nvSpPr>
+          <p:cNvPr id="4" name="Slide Number Placeholder 3"/>
+          <p:cNvSpPr>
+            <a:spLocks noGrp="1"/>
+          </p:cNvSpPr>
+          <p:nvPr>
+            <p:ph type="sldNum" sz="quarter" idx="10"/>
+          </p:nvPr>
+        </p:nvSpPr>
+        <p:spPr/>
+        <p:txBody>
+          <a:bodyPr/>
+          <a:lstStyle/>
+          <a:p>
+            <a:fld id="{F7021451-1387-4CA6-816F-3879F97B5CBC}" type="slidenum">
+              <a:rPr lang="en-US"/>
+              <a:t>19</a:t>
             </a:fld>
             <a:endParaRPr lang="en-US"/>
           </a:p>
@@ -1441,6 +1531,94 @@
 </p:notes>
 </file>
 
+<file path=ppt/notesSlides/notesSlide20.xml><?xml version="1.0" encoding="utf-8"?>
+<p:notes xmlns:a="http://schemas.openxmlformats.org/drawingml/2006/main" xmlns:r="http://schemas.openxmlformats.org/officeDocument/2006/relationships" xmlns:p="http://schemas.openxmlformats.org/presentationml/2006/main">
+  <p:cSld>
+    <p:spTree>
+      <p:nvGrpSpPr>
+        <p:cNvPr id="1" name=""/>
+        <p:cNvGrpSpPr/>
+        <p:nvPr/>
+      </p:nvGrpSpPr>
+      <p:grpSpPr>
+        <a:xfrm>
+          <a:off x="0" y="0"/>
+          <a:ext cx="0" cy="0"/>
+          <a:chOff x="0" y="0"/>
+          <a:chExt cx="0" cy="0"/>
+        </a:xfrm>
+      </p:grpSpPr>
+      <p:sp>
+        <p:nvSpPr>
+          <p:cNvPr id="2" name="Slide Image Placeholder 1"/>
+          <p:cNvSpPr>
+            <a:spLocks noGrp="1" noRot="1" noChangeAspect="1"/>
+          </p:cNvSpPr>
+          <p:nvPr>
+            <p:ph type="sldImg"/>
+          </p:nvPr>
+        </p:nvSpPr>
+        <p:spPr/>
+      </p:sp>
+      <p:sp>
+        <p:nvSpPr>
+          <p:cNvPr id="3" name="Notes Placeholder 2"/>
+          <p:cNvSpPr>
+            <a:spLocks noGrp="1"/>
+          </p:cNvSpPr>
+          <p:nvPr>
+            <p:ph type="body" idx="1"/>
+          </p:nvPr>
+        </p:nvSpPr>
+        <p:spPr/>
+        <p:txBody>
+          <a:bodyPr/>
+          <a:lstStyle/>
+          <a:p>
+            <a:r>
+              <a:rPr lang="en-US" dirty="0"/>
+              <a:t/>
+            </a:r>
+            <a:endParaRPr lang="en-US" dirty="0"/>
+          </a:p>
+        </p:txBody>
+      </p:sp>
+      <p:sp>
+        <p:nvSpPr>
+          <p:cNvPr id="4" name="Slide Number Placeholder 3"/>
+          <p:cNvSpPr>
+            <a:spLocks noGrp="1"/>
+          </p:cNvSpPr>
+          <p:nvPr>
+            <p:ph type="sldNum" sz="quarter" idx="10"/>
+          </p:nvPr>
+        </p:nvSpPr>
+        <p:spPr/>
+        <p:txBody>
+          <a:bodyPr/>
+          <a:lstStyle/>
+          <a:p>
+            <a:fld id="{F7021451-1387-4CA6-816F-3879F97B5CBC}" type="slidenum">
+              <a:rPr lang="en-US"/>
+              <a:t>20</a:t>
+            </a:fld>
+            <a:endParaRPr lang="en-US"/>
+          </a:p>
+        </p:txBody>
+      </p:sp>
+    </p:spTree>
+    <p:extLst>
+      <p:ext uri="{BB962C8B-B14F-4D97-AF65-F5344CB8AC3E}">
+        <p14:creationId xmlns:p14="http://schemas.microsoft.com/office/powerpoint/2010/main" val="1024086991"/>
+      </p:ext>
+    </p:extLst>
+  </p:cSld>
+  <p:clrMapOvr>
+    <a:masterClrMapping/>
+  </p:clrMapOvr>
+</p:notes>
+</file>
+
 <file path=ppt/notesSlides/notesSlide3.xml><?xml version="1.0" encoding="utf-8"?>
 <p:notes xmlns:a="http://schemas.openxmlformats.org/drawingml/2006/main" xmlns:r="http://schemas.openxmlformats.org/officeDocument/2006/relationships" xmlns:p="http://schemas.openxmlformats.org/presentationml/2006/main">
   <p:cSld>
@@ -1751,7 +1929,7 @@
           <a:p>
             <a:r>
               <a:rPr lang="en-US" dirty="0"/>
-              <a:t>CLAQUETE — inicio do video 4.2. Segure 2 segundos em silencio antes de comecar a falar: e por esta tela que a edicao corta.</a:t>
+              <a:t/>
             </a:r>
             <a:endParaRPr lang="en-US" dirty="0"/>
           </a:p>
@@ -1839,7 +2017,7 @@
           <a:p>
             <a:r>
               <a:rPr lang="en-US" dirty="0"/>
-              <a:t/>
+              <a:t>CLAQUETE — inicio do video 4.2. Segure 2 segundos em silencio antes de comecar a falar: e por esta tela que a edicao corta.</a:t>
             </a:r>
             <a:endParaRPr lang="en-US" dirty="0"/>
           </a:p>
@@ -2390,7 +2568,7 @@
       </p:grpSpPr>
       <p:pic>
         <p:nvPicPr>
-          <p:cNvPr id="2" name="Image 0" descr="C:\Users\PCSTUD~1\AppData\Local\Temp\claude\C--Users-PC-Studio-2-Desktop-6498-Evals\7ce78c02-4c99-40d4-bc57-5394098065c6\scratchpad\art\malha.png">    </p:cNvPr>
+          <p:cNvPr id="2" name="Image 0" descr="art\malha.png">    </p:cNvPr>
           <p:cNvPicPr>
             <a:picLocks noChangeAspect="1"/>
           </p:cNvPicPr>
@@ -2414,7 +2592,7 @@
       </p:pic>
       <p:pic>
         <p:nvPicPr>
-          <p:cNvPr id="3" name="Image 1" descr="C:\Users\PCSTUD~1\AppData\Local\Temp\claude\C--Users-PC-Studio-2-Desktop-6498-Evals\7ce78c02-4c99-40d4-bc57-5394098065c6\scratchpad\art\capa.png">    </p:cNvPr>
+          <p:cNvPr id="3" name="Image 1" descr="art\capa.png">    </p:cNvPr>
           <p:cNvPicPr>
             <a:picLocks noChangeAspect="1"/>
           </p:cNvPicPr>
@@ -2438,7 +2616,7 @@
       </p:pic>
       <p:pic>
         <p:nvPicPr>
-          <p:cNvPr id="4" name="Image 2" descr="C:\Users\PCSTUD~1\AppData\Local\Temp\claude\C--Users-PC-Studio-2-Desktop-6498-Evals\7ce78c02-4c99-40d4-bc57-5394098065c6\scratchpad\art\logo.png">    </p:cNvPr>
+          <p:cNvPr id="4" name="Image 2" descr="art\logo.png">    </p:cNvPr>
           <p:cNvPicPr>
             <a:picLocks noChangeAspect="1"/>
           </p:cNvPicPr>
@@ -2656,7 +2834,7 @@
                 <a:ea typeface="Roboto" pitchFamily="34" charset="-122"/>
                 <a:cs typeface="Roboto" pitchFamily="34" charset="-120"/>
               </a:rPr>
-              <a:t>Diagnóstico e correção ao vivo, em produção — chef.workshopee.com.br</a:t>
+              <a:t>Quatro falhas reais, achadas em produção — evidência real, sem simulação</a:t>
             </a:r>
             <a:endParaRPr lang="en-US" sz="2800" dirty="0"/>
           </a:p>
@@ -2696,7 +2874,7 @@
       </p:grpSpPr>
       <p:pic>
         <p:nvPicPr>
-          <p:cNvPr id="2" name="Image 0" descr="C:\Users\PCSTUD~1\AppData\Local\Temp\claude\C--Users-PC-Studio-2-Desktop-6498-Evals\7ce78c02-4c99-40d4-bc57-5394098065c6\scratchpad\art\malha.png">    </p:cNvPr>
+          <p:cNvPr id="2" name="Image 0" descr="art\malha.png">    </p:cNvPr>
           <p:cNvPicPr>
             <a:picLocks noChangeAspect="1"/>
           </p:cNvPicPr>
@@ -2720,7 +2898,7 @@
       </p:pic>
       <p:pic>
         <p:nvPicPr>
-          <p:cNvPr id="3" name="Image 1" descr="C:\Users\PCSTUD~1\AppData\Local\Temp\claude\C--Users-PC-Studio-2-Desktop-6498-Evals\7ce78c02-4c99-40d4-bc57-5394098065c6\scratchpad\art\logo.png">    </p:cNvPr>
+          <p:cNvPr id="3" name="Image 1" descr="art\logo.png">    </p:cNvPr>
           <p:cNvPicPr>
             <a:picLocks noChangeAspect="1"/>
           </p:cNvPicPr>
@@ -2750,7 +2928,7 @@
         </p:nvSpPr>
         <p:spPr>
           <a:xfrm>
-            <a:off x="2423160" y="2148840"/>
+            <a:off x="2423160" y="1051560"/>
             <a:ext cx="19540728" cy="594360"/>
           </a:xfrm>
           <a:prstGeom prst="rect">
@@ -2775,7 +2953,7 @@
                 <a:ea typeface="Encode Sans" pitchFamily="34" charset="-122"/>
                 <a:cs typeface="Encode Sans" pitchFamily="34" charset="-120"/>
               </a:rPr>
-              <a:t>VÍDEO 4.2</a:t>
+              <a:t>VÍDEO 4.2 — EPISÓDIO C</a:t>
             </a:r>
             <a:endParaRPr lang="en-US" sz="2100" dirty="0"/>
           </a:p>
@@ -2789,8 +2967,8 @@
         </p:nvSpPr>
         <p:spPr>
           <a:xfrm>
-            <a:off x="2423160" y="2880360"/>
-            <a:ext cx="18745200" cy="2377440"/>
+            <a:off x="2423160" y="1783080"/>
+            <a:ext cx="19568160" cy="2377440"/>
           </a:xfrm>
           <a:prstGeom prst="rect">
             <a:avLst/>
@@ -2817,7 +2995,7 @@
                 <a:ea typeface="Encode Sans" pitchFamily="34" charset="-122"/>
                 <a:cs typeface="Encode Sans" pitchFamily="34" charset="-120"/>
               </a:rPr>
-              <a:t>O que os três casos têm em comum</a:t>
+              <a:t>A conta bateu. O estoque não.</a:t>
             </a:r>
             <a:endParaRPr lang="en-US" sz="6600" dirty="0"/>
           </a:p>
@@ -2825,52 +3003,57 @@
       </p:sp>
       <p:sp>
         <p:nvSpPr>
-          <p:cNvPr id="6" name="Text 2"/>
+          <p:cNvPr id="6" name="Shape 2"/>
+          <p:cNvSpPr/>
+          <p:nvPr/>
+        </p:nvSpPr>
+        <p:spPr>
+          <a:xfrm>
+            <a:off x="2423160" y="4526280"/>
+            <a:ext cx="2011680" cy="68580"/>
+          </a:xfrm>
+          <a:prstGeom prst="rect">
+            <a:avLst/>
+          </a:prstGeom>
+          <a:solidFill>
+            <a:srgbClr val="1F53E5"/>
+          </a:solidFill>
+          <a:ln/>
+        </p:spPr>
+      </p:sp>
+      <p:pic>
+        <p:nvPicPr>
+          <p:cNvPr id="7" name="Image 2" descr="art\seta.png">    </p:cNvPr>
+          <p:cNvPicPr>
+            <a:picLocks noChangeAspect="1"/>
+          </p:cNvPicPr>
+          <p:nvPr/>
+        </p:nvPicPr>
+        <p:blipFill>
+          <a:blip r:embed="rId3"/>
+          <a:stretch>
+            <a:fillRect/>
+          </a:stretch>
+        </p:blipFill>
+        <p:spPr>
+          <a:xfrm>
+            <a:off x="2423160" y="6094476"/>
+            <a:ext cx="475488" cy="411480"/>
+          </a:xfrm>
+          <a:prstGeom prst="rect">
+            <a:avLst/>
+          </a:prstGeom>
+        </p:spPr>
+      </p:pic>
+      <p:sp>
+        <p:nvSpPr>
+          <p:cNvPr id="8" name="Text 3"/>
           <p:cNvSpPr txBox="1"/>
           <p:nvPr/>
         </p:nvSpPr>
         <p:spPr>
           <a:xfrm>
-            <a:off x="2423160" y="5367528"/>
-            <a:ext cx="777240" cy="548640"/>
-          </a:xfrm>
-          <a:prstGeom prst="rect">
-            <a:avLst/>
-          </a:prstGeom>
-          <a:noFill/>
-          <a:ln/>
-        </p:spPr>
-        <p:txBody>
-          <a:bodyPr wrap="square" lIns="0" tIns="0" rIns="0" bIns="0" rtlCol="0" anchor="t"/>
-          <a:lstStyle/>
-          <a:p>
-            <a:pPr indent="0" marL="0">
-              <a:buNone/>
-            </a:pPr>
-            <a:r>
-              <a:rPr lang="en-US" sz="3000" b="1" dirty="0">
-                <a:solidFill>
-                  <a:srgbClr val="1F53E5"/>
-                </a:solidFill>
-                <a:latin typeface="Roboto" pitchFamily="34" charset="0"/>
-                <a:ea typeface="Roboto" pitchFamily="34" charset="-122"/>
-                <a:cs typeface="Roboto" pitchFamily="34" charset="-120"/>
-              </a:rPr>
-              <a:t>→</a:t>
-            </a:r>
-            <a:endParaRPr lang="en-US" sz="3000" dirty="0"/>
-          </a:p>
-        </p:txBody>
-      </p:sp>
-      <p:sp>
-        <p:nvSpPr>
-          <p:cNvPr id="7" name="Text 3"/>
-          <p:cNvSpPr txBox="1"/>
-          <p:nvPr/>
-        </p:nvSpPr>
-        <p:spPr>
-          <a:xfrm>
-            <a:off x="3337560" y="5349240"/>
+            <a:off x="3337560" y="5966460"/>
             <a:ext cx="17922240" cy="548640"/>
           </a:xfrm>
           <a:prstGeom prst="rect">
@@ -2898,60 +3081,45 @@
                 <a:ea typeface="Roboto" pitchFamily="34" charset="-122"/>
                 <a:cs typeface="Roboto" pitchFamily="34" charset="-120"/>
               </a:rPr>
-              <a:t>Em nenhum deles eu li código para descobrir o problema. Eu observei, juntei evidência e perguntei.</a:t>
+              <a:t>O sintoma: avisei que comemos 3 porções de lasagna. O bot reagiu com joinha. O estoque continuou com 5.</a:t>
             </a:r>
             <a:endParaRPr lang="en-US" sz="2800" dirty="0"/>
           </a:p>
         </p:txBody>
       </p:sp>
-      <p:sp>
-        <p:nvSpPr>
-          <p:cNvPr id="8" name="Text 4"/>
+      <p:pic>
+        <p:nvPicPr>
+          <p:cNvPr id="9" name="Image 3" descr="art\seta.png">    </p:cNvPr>
+          <p:cNvPicPr>
+            <a:picLocks noChangeAspect="1"/>
+          </p:cNvPicPr>
+          <p:nvPr/>
+        </p:nvPicPr>
+        <p:blipFill>
+          <a:blip r:embed="rId4"/>
+          <a:stretch>
+            <a:fillRect/>
+          </a:stretch>
+        </p:blipFill>
+        <p:spPr>
+          <a:xfrm>
+            <a:off x="2423160" y="7648956"/>
+            <a:ext cx="475488" cy="411480"/>
+          </a:xfrm>
+          <a:prstGeom prst="rect">
+            <a:avLst/>
+          </a:prstGeom>
+        </p:spPr>
+      </p:pic>
+      <p:sp>
+        <p:nvSpPr>
+          <p:cNvPr id="10" name="Text 4"/>
           <p:cNvSpPr txBox="1"/>
           <p:nvPr/>
         </p:nvSpPr>
         <p:spPr>
           <a:xfrm>
-            <a:off x="2423160" y="6419088"/>
-            <a:ext cx="777240" cy="548640"/>
-          </a:xfrm>
-          <a:prstGeom prst="rect">
-            <a:avLst/>
-          </a:prstGeom>
-          <a:noFill/>
-          <a:ln/>
-        </p:spPr>
-        <p:txBody>
-          <a:bodyPr wrap="square" lIns="0" tIns="0" rIns="0" bIns="0" rtlCol="0" anchor="t"/>
-          <a:lstStyle/>
-          <a:p>
-            <a:pPr indent="0" marL="0">
-              <a:buNone/>
-            </a:pPr>
-            <a:r>
-              <a:rPr lang="en-US" sz="3000" b="1" dirty="0">
-                <a:solidFill>
-                  <a:srgbClr val="1F53E5"/>
-                </a:solidFill>
-                <a:latin typeface="Roboto" pitchFamily="34" charset="0"/>
-                <a:ea typeface="Roboto" pitchFamily="34" charset="-122"/>
-                <a:cs typeface="Roboto" pitchFamily="34" charset="-120"/>
-              </a:rPr>
-              <a:t>→</a:t>
-            </a:r>
-            <a:endParaRPr lang="en-US" sz="3000" dirty="0"/>
-          </a:p>
-        </p:txBody>
-      </p:sp>
-      <p:sp>
-        <p:nvSpPr>
-          <p:cNvPr id="9" name="Text 5"/>
-          <p:cNvSpPr txBox="1"/>
-          <p:nvPr/>
-        </p:nvSpPr>
-        <p:spPr>
-          <a:xfrm>
-            <a:off x="3337560" y="6400800"/>
+            <a:off x="3337560" y="7520940"/>
             <a:ext cx="17922240" cy="548640"/>
           </a:xfrm>
           <a:prstGeom prst="rect">
@@ -2979,61 +3147,46 @@
                 <a:ea typeface="Roboto" pitchFamily="34" charset="-122"/>
                 <a:cs typeface="Roboto" pitchFamily="34" charset="-120"/>
               </a:rPr>
-              <a:t>Nos dois primeiros, o produto falhou em avisar. No terceiro, ele avisou que tinha dado certo — e não tinha.</a:t>
+              <a:t>O que eu junto: o registro mostra que ele entendeu tudo — o prato, as 3 porções, até a conta de 1 e meia para cada.</a:t>
             </a:r>
             <a:endParaRPr lang="en-US" sz="2800" dirty="0"/>
           </a:p>
         </p:txBody>
       </p:sp>
-      <p:sp>
-        <p:nvSpPr>
-          <p:cNvPr id="10" name="Text 6"/>
+      <p:pic>
+        <p:nvPicPr>
+          <p:cNvPr id="11" name="Image 4" descr="art\seta.png">    </p:cNvPr>
+          <p:cNvPicPr>
+            <a:picLocks noChangeAspect="1"/>
+          </p:cNvPicPr>
+          <p:nvPr/>
+        </p:nvPicPr>
+        <p:blipFill>
+          <a:blip r:embed="rId5"/>
+          <a:stretch>
+            <a:fillRect/>
+          </a:stretch>
+        </p:blipFill>
+        <p:spPr>
+          <a:xfrm>
+            <a:off x="2423160" y="9203436"/>
+            <a:ext cx="475488" cy="411480"/>
+          </a:xfrm>
+          <a:prstGeom prst="rect">
+            <a:avLst/>
+          </a:prstGeom>
+        </p:spPr>
+      </p:pic>
+      <p:sp>
+        <p:nvSpPr>
+          <p:cNvPr id="12" name="Text 5"/>
           <p:cNvSpPr txBox="1"/>
           <p:nvPr/>
         </p:nvSpPr>
         <p:spPr>
           <a:xfrm>
-            <a:off x="2423160" y="7470648"/>
-            <a:ext cx="777240" cy="548640"/>
-          </a:xfrm>
-          <a:prstGeom prst="rect">
-            <a:avLst/>
-          </a:prstGeom>
-          <a:noFill/>
-          <a:ln/>
-        </p:spPr>
-        <p:txBody>
-          <a:bodyPr wrap="square" lIns="0" tIns="0" rIns="0" bIns="0" rtlCol="0" anchor="t"/>
-          <a:lstStyle/>
-          <a:p>
-            <a:pPr indent="0" marL="0">
-              <a:buNone/>
-            </a:pPr>
-            <a:r>
-              <a:rPr lang="en-US" sz="3000" b="1" dirty="0">
-                <a:solidFill>
-                  <a:srgbClr val="1F53E5"/>
-                </a:solidFill>
-                <a:latin typeface="Roboto" pitchFamily="34" charset="0"/>
-                <a:ea typeface="Roboto" pitchFamily="34" charset="-122"/>
-                <a:cs typeface="Roboto" pitchFamily="34" charset="-120"/>
-              </a:rPr>
-              <a:t>→</a:t>
-            </a:r>
-            <a:endParaRPr lang="en-US" sz="3000" dirty="0"/>
-          </a:p>
-        </p:txBody>
-      </p:sp>
-      <p:sp>
-        <p:nvSpPr>
-          <p:cNvPr id="11" name="Text 7"/>
-          <p:cNvSpPr txBox="1"/>
-          <p:nvPr/>
-        </p:nvSpPr>
-        <p:spPr>
-          <a:xfrm>
-            <a:off x="3337560" y="7452360"/>
-            <a:ext cx="17922240" cy="1097280"/>
+            <a:off x="3337560" y="9075420"/>
+            <a:ext cx="17922240" cy="548640"/>
           </a:xfrm>
           <a:prstGeom prst="rect">
             <a:avLst/>
@@ -3052,23 +3205,89 @@
               <a:buNone/>
             </a:pPr>
             <a:r>
-              <a:rPr lang="en-US" sz="2800" b="1" dirty="0">
+              <a:rPr lang="en-US" sz="2800" dirty="0">
                 <a:solidFill>
-                  <a:srgbClr val="BDBFC7"/>
+                  <a:srgbClr val="A7A9B4"/>
                 </a:solidFill>
                 <a:latin typeface="Roboto" pitchFamily="34" charset="0"/>
                 <a:ea typeface="Roboto" pitchFamily="34" charset="-122"/>
                 <a:cs typeface="Roboto" pitchFamily="34" charset="-120"/>
               </a:rPr>
-              <a:t>O reflexo “o problema é o prompt” está errado aqui: a inteligência acertou nos três. Quem errou foi o produto em volta dela.</a:t>
+              <a:t>Ou seja: a inteligência acertou. Alguma outra coisa errou — e eu não sei qual.</a:t>
             </a:r>
             <a:endParaRPr lang="en-US" sz="2800" dirty="0"/>
           </a:p>
         </p:txBody>
       </p:sp>
-      <p:sp>
-        <p:nvSpPr>
-          <p:cNvPr id="12" name="Text 8"/>
+      <p:pic>
+        <p:nvPicPr>
+          <p:cNvPr id="13" name="Image 5" descr="art\seta.png">    </p:cNvPr>
+          <p:cNvPicPr>
+            <a:picLocks noChangeAspect="1"/>
+          </p:cNvPicPr>
+          <p:nvPr/>
+        </p:nvPicPr>
+        <p:blipFill>
+          <a:blip r:embed="rId6"/>
+          <a:stretch>
+            <a:fillRect/>
+          </a:stretch>
+        </p:blipFill>
+        <p:spPr>
+          <a:xfrm>
+            <a:off x="2423160" y="10757916"/>
+            <a:ext cx="475488" cy="411480"/>
+          </a:xfrm>
+          <a:prstGeom prst="rect">
+            <a:avLst/>
+          </a:prstGeom>
+        </p:spPr>
+      </p:pic>
+      <p:sp>
+        <p:nvSpPr>
+          <p:cNvPr id="14" name="Text 6"/>
+          <p:cNvSpPr txBox="1"/>
+          <p:nvPr/>
+        </p:nvSpPr>
+        <p:spPr>
+          <a:xfrm>
+            <a:off x="3337560" y="10629900"/>
+            <a:ext cx="17922240" cy="548640"/>
+          </a:xfrm>
+          <a:prstGeom prst="rect">
+            <a:avLst/>
+          </a:prstGeom>
+          <a:noFill/>
+          <a:ln/>
+        </p:spPr>
+        <p:txBody>
+          <a:bodyPr wrap="square" lIns="0" tIns="0" rIns="0" bIns="0" rtlCol="0" anchor="t"/>
+          <a:lstStyle/>
+          <a:p>
+            <a:pPr indent="0" marL="0">
+              <a:lnSpc>
+                <a:spcPct val="118000"/>
+              </a:lnSpc>
+              <a:buNone/>
+            </a:pPr>
+            <a:r>
+              <a:rPr lang="en-US" sz="2800" b="1" dirty="0">
+                <a:solidFill>
+                  <a:srgbClr val="F4F5F6"/>
+                </a:solidFill>
+                <a:latin typeface="Roboto" pitchFamily="34" charset="0"/>
+                <a:ea typeface="Roboto" pitchFamily="34" charset="-122"/>
+                <a:cs typeface="Roboto" pitchFamily="34" charset="-120"/>
+              </a:rPr>
+              <a:t>O que eu levo ao Claude: “ele entendeu certo e mesmo assim o estoque não baixou. Por quê?”</a:t>
+            </a:r>
+            <a:endParaRPr lang="en-US" sz="2800" dirty="0"/>
+          </a:p>
+        </p:txBody>
+      </p:sp>
+      <p:sp>
+        <p:nvSpPr>
+          <p:cNvPr id="15" name="Text 7"/>
           <p:cNvSpPr txBox="1"/>
           <p:nvPr/>
         </p:nvSpPr>
@@ -3121,7 +3340,7 @@
     <p:bg>
       <p:bgPr>
         <a:solidFill>
-          <a:srgbClr val="052FD3"/>
+          <a:srgbClr val="0C0C0E"/>
         </a:solidFill>
       </p:bgPr>
     </p:bg>
@@ -3141,7 +3360,7 @@
       </p:grpSpPr>
       <p:pic>
         <p:nvPicPr>
-          <p:cNvPr id="2" name="Image 0" descr="C:\Users\PCSTUD~1\AppData\Local\Temp\claude\C--Users-PC-Studio-2-Desktop-6498-Evals\7ce78c02-4c99-40d4-bc57-5394098065c6\scratchpad\art\logo.png">    </p:cNvPr>
+          <p:cNvPr id="2" name="Image 0" descr="art\malha.png">    </p:cNvPr>
           <p:cNvPicPr>
             <a:picLocks noChangeAspect="1"/>
           </p:cNvPicPr>
@@ -3155,6 +3374,30 @@
         </p:blipFill>
         <p:spPr>
           <a:xfrm>
+            <a:off x="0" y="0"/>
+            <a:ext cx="24387048" cy="13716000"/>
+          </a:xfrm>
+          <a:prstGeom prst="rect">
+            <a:avLst/>
+          </a:prstGeom>
+        </p:spPr>
+      </p:pic>
+      <p:pic>
+        <p:nvPicPr>
+          <p:cNvPr id="3" name="Image 1" descr="art\logo.png">    </p:cNvPr>
+          <p:cNvPicPr>
+            <a:picLocks noChangeAspect="1"/>
+          </p:cNvPicPr>
+          <p:nvPr/>
+        </p:nvPicPr>
+        <p:blipFill>
+          <a:blip r:embed="rId2"/>
+          <a:stretch>
+            <a:fillRect/>
+          </a:stretch>
+        </p:blipFill>
+        <p:spPr>
+          <a:xfrm>
             <a:off x="23436072" y="402336"/>
             <a:ext cx="475488" cy="594360"/>
           </a:xfrm>
@@ -3165,14 +3408,14 @@
       </p:pic>
       <p:sp>
         <p:nvSpPr>
-          <p:cNvPr id="3" name="Text 0"/>
+          <p:cNvPr id="4" name="Text 0"/>
           <p:cNvSpPr txBox="1"/>
           <p:nvPr/>
         </p:nvSpPr>
         <p:spPr>
           <a:xfrm>
-            <a:off x="4416552" y="4023360"/>
-            <a:ext cx="15544800" cy="5669280"/>
+            <a:off x="2423160" y="1051560"/>
+            <a:ext cx="19540728" cy="594360"/>
           </a:xfrm>
           <a:prstGeom prst="rect">
             <a:avLst/>
@@ -3184,24 +3427,388 @@
           <a:bodyPr wrap="square" lIns="0" tIns="0" rIns="0" bIns="0" rtlCol="0" anchor="ctr"/>
           <a:lstStyle/>
           <a:p>
-            <a:pPr algn="ctr" indent="0" marL="0">
+            <a:pPr indent="0" marL="0">
+              <a:buNone/>
+            </a:pPr>
+            <a:r>
+              <a:rPr lang="en-US" sz="2100" b="1" spc="250" kern="0" dirty="0">
+                <a:solidFill>
+                  <a:srgbClr val="1F53E5"/>
+                </a:solidFill>
+                <a:latin typeface="Encode Sans" pitchFamily="34" charset="0"/>
+                <a:ea typeface="Encode Sans" pitchFamily="34" charset="-122"/>
+                <a:cs typeface="Encode Sans" pitchFamily="34" charset="-120"/>
+              </a:rPr>
+              <a:t>VÍDEO 4.2 — EPISÓDIO D, 14/09</a:t>
+            </a:r>
+            <a:endParaRPr lang="en-US" sz="2100" dirty="0"/>
+          </a:p>
+        </p:txBody>
+      </p:sp>
+      <p:sp>
+        <p:nvSpPr>
+          <p:cNvPr id="5" name="Text 1"/>
+          <p:cNvSpPr txBox="1"/>
+          <p:nvPr/>
+        </p:nvSpPr>
+        <p:spPr>
+          <a:xfrm>
+            <a:off x="2423160" y="1783080"/>
+            <a:ext cx="19568160" cy="2377440"/>
+          </a:xfrm>
+          <a:prstGeom prst="rect">
+            <a:avLst/>
+          </a:prstGeom>
+          <a:noFill/>
+          <a:ln/>
+        </p:spPr>
+        <p:txBody>
+          <a:bodyPr wrap="square" lIns="0" tIns="0" rIns="0" bIns="0" rtlCol="0" anchor="t"/>
+          <a:lstStyle/>
+          <a:p>
+            <a:pPr indent="0" marL="0">
               <a:lnSpc>
                 <a:spcPct val="105000"/>
               </a:lnSpc>
               <a:buNone/>
             </a:pPr>
             <a:r>
-              <a:rPr lang="en-US" sz="9600" dirty="0">
+              <a:rPr lang="en-US" sz="6600" dirty="0">
                 <a:solidFill>
-                  <a:srgbClr val="FFFFFF"/>
+                  <a:srgbClr val="BDBFC7"/>
                 </a:solidFill>
                 <a:latin typeface="Encode Sans" pitchFamily="34" charset="0"/>
                 <a:ea typeface="Encode Sans" pitchFamily="34" charset="-122"/>
                 <a:cs typeface="Encode Sans" pitchFamily="34" charset="-120"/>
               </a:rPr>
-              <a:t>4.3 Corrigindo antes do usuário</a:t>
-            </a:r>
-            <a:endParaRPr lang="en-US" sz="9600" dirty="0"/>
+              <a:t>O hambúrguer que sumiu</a:t>
+            </a:r>
+            <a:endParaRPr lang="en-US" sz="6600" dirty="0"/>
+          </a:p>
+        </p:txBody>
+      </p:sp>
+      <p:sp>
+        <p:nvSpPr>
+          <p:cNvPr id="6" name="Shape 2"/>
+          <p:cNvSpPr/>
+          <p:nvPr/>
+        </p:nvSpPr>
+        <p:spPr>
+          <a:xfrm>
+            <a:off x="2423160" y="4526280"/>
+            <a:ext cx="2011680" cy="68580"/>
+          </a:xfrm>
+          <a:prstGeom prst="rect">
+            <a:avLst/>
+          </a:prstGeom>
+          <a:solidFill>
+            <a:srgbClr val="1F53E5"/>
+          </a:solidFill>
+          <a:ln/>
+        </p:spPr>
+      </p:sp>
+      <p:pic>
+        <p:nvPicPr>
+          <p:cNvPr id="7" name="Image 2" descr="art\seta.png">    </p:cNvPr>
+          <p:cNvPicPr>
+            <a:picLocks noChangeAspect="1"/>
+          </p:cNvPicPr>
+          <p:nvPr/>
+        </p:nvPicPr>
+        <p:blipFill>
+          <a:blip r:embed="rId3"/>
+          <a:stretch>
+            <a:fillRect/>
+          </a:stretch>
+        </p:blipFill>
+        <p:spPr>
+          <a:xfrm>
+            <a:off x="2423160" y="6094476"/>
+            <a:ext cx="475488" cy="411480"/>
+          </a:xfrm>
+          <a:prstGeom prst="rect">
+            <a:avLst/>
+          </a:prstGeom>
+        </p:spPr>
+      </p:pic>
+      <p:sp>
+        <p:nvSpPr>
+          <p:cNvPr id="8" name="Text 3"/>
+          <p:cNvSpPr txBox="1"/>
+          <p:nvPr/>
+        </p:nvSpPr>
+        <p:spPr>
+          <a:xfrm>
+            <a:off x="3337560" y="5966460"/>
+            <a:ext cx="17922240" cy="548640"/>
+          </a:xfrm>
+          <a:prstGeom prst="rect">
+            <a:avLst/>
+          </a:prstGeom>
+          <a:noFill/>
+          <a:ln/>
+        </p:spPr>
+        <p:txBody>
+          <a:bodyPr wrap="square" lIns="0" tIns="0" rIns="0" bIns="0" rtlCol="0" anchor="t"/>
+          <a:lstStyle/>
+          <a:p>
+            <a:pPr indent="0" marL="0">
+              <a:lnSpc>
+                <a:spcPct val="118000"/>
+              </a:lnSpc>
+              <a:buNone/>
+            </a:pPr>
+            <a:r>
+              <a:rPr lang="en-US" sz="2800" dirty="0">
+                <a:solidFill>
+                  <a:srgbClr val="A7A9B4"/>
+                </a:solidFill>
+                <a:latin typeface="Roboto" pitchFamily="34" charset="0"/>
+                <a:ea typeface="Roboto" pitchFamily="34" charset="-122"/>
+                <a:cs typeface="Roboto" pitchFamily="34" charset="-120"/>
+              </a:rPr>
+              <a:t>O sintoma: preparei um hambúrguer, contei pro bot, respondi a pergunta dele — três vezes, de jeitos diferentes.</a:t>
+            </a:r>
+            <a:endParaRPr lang="en-US" sz="2800" dirty="0"/>
+          </a:p>
+        </p:txBody>
+      </p:sp>
+      <p:pic>
+        <p:nvPicPr>
+          <p:cNvPr id="9" name="Image 3" descr="art\seta.png">    </p:cNvPr>
+          <p:cNvPicPr>
+            <a:picLocks noChangeAspect="1"/>
+          </p:cNvPicPr>
+          <p:nvPr/>
+        </p:nvPicPr>
+        <p:blipFill>
+          <a:blip r:embed="rId4"/>
+          <a:stretch>
+            <a:fillRect/>
+          </a:stretch>
+        </p:blipFill>
+        <p:spPr>
+          <a:xfrm>
+            <a:off x="2423160" y="7648956"/>
+            <a:ext cx="475488" cy="411480"/>
+          </a:xfrm>
+          <a:prstGeom prst="rect">
+            <a:avLst/>
+          </a:prstGeom>
+        </p:spPr>
+      </p:pic>
+      <p:sp>
+        <p:nvSpPr>
+          <p:cNvPr id="10" name="Text 4"/>
+          <p:cNvSpPr txBox="1"/>
+          <p:nvPr/>
+        </p:nvSpPr>
+        <p:spPr>
+          <a:xfrm>
+            <a:off x="3337560" y="7520940"/>
+            <a:ext cx="17922240" cy="548640"/>
+          </a:xfrm>
+          <a:prstGeom prst="rect">
+            <a:avLst/>
+          </a:prstGeom>
+          <a:noFill/>
+          <a:ln/>
+        </p:spPr>
+        <p:txBody>
+          <a:bodyPr wrap="square" lIns="0" tIns="0" rIns="0" bIns="0" rtlCol="0" anchor="t"/>
+          <a:lstStyle/>
+          <a:p>
+            <a:pPr indent="0" marL="0">
+              <a:lnSpc>
+                <a:spcPct val="118000"/>
+              </a:lnSpc>
+              <a:buNone/>
+            </a:pPr>
+            <a:r>
+              <a:rPr lang="en-US" sz="2800" b="1" dirty="0">
+                <a:solidFill>
+                  <a:srgbClr val="F4F5F6"/>
+                </a:solidFill>
+                <a:latin typeface="Roboto" pitchFamily="34" charset="0"/>
+                <a:ea typeface="Roboto" pitchFamily="34" charset="-122"/>
+                <a:cs typeface="Roboto" pitchFamily="34" charset="-120"/>
+              </a:rPr>
+              <a:t>O que eu junto: as quatro classificações estão perfeitas. Zero erro, zero exceção.</a:t>
+            </a:r>
+            <a:endParaRPr lang="en-US" sz="2800" dirty="0"/>
+          </a:p>
+        </p:txBody>
+      </p:sp>
+      <p:pic>
+        <p:nvPicPr>
+          <p:cNvPr id="11" name="Image 4" descr="art\seta.png">    </p:cNvPr>
+          <p:cNvPicPr>
+            <a:picLocks noChangeAspect="1"/>
+          </p:cNvPicPr>
+          <p:nvPr/>
+        </p:nvPicPr>
+        <p:blipFill>
+          <a:blip r:embed="rId5"/>
+          <a:stretch>
+            <a:fillRect/>
+          </a:stretch>
+        </p:blipFill>
+        <p:spPr>
+          <a:xfrm>
+            <a:off x="2423160" y="9203436"/>
+            <a:ext cx="475488" cy="411480"/>
+          </a:xfrm>
+          <a:prstGeom prst="rect">
+            <a:avLst/>
+          </a:prstGeom>
+        </p:spPr>
+      </p:pic>
+      <p:sp>
+        <p:nvSpPr>
+          <p:cNvPr id="12" name="Text 5"/>
+          <p:cNvSpPr txBox="1"/>
+          <p:nvPr/>
+        </p:nvSpPr>
+        <p:spPr>
+          <a:xfrm>
+            <a:off x="3337560" y="9075420"/>
+            <a:ext cx="17922240" cy="548640"/>
+          </a:xfrm>
+          <a:prstGeom prst="rect">
+            <a:avLst/>
+          </a:prstGeom>
+          <a:noFill/>
+          <a:ln/>
+        </p:spPr>
+        <p:txBody>
+          <a:bodyPr wrap="square" lIns="0" tIns="0" rIns="0" bIns="0" rtlCol="0" anchor="t"/>
+          <a:lstStyle/>
+          <a:p>
+            <a:pPr indent="0" marL="0">
+              <a:lnSpc>
+                <a:spcPct val="118000"/>
+              </a:lnSpc>
+              <a:buNone/>
+            </a:pPr>
+            <a:r>
+              <a:rPr lang="en-US" sz="2800" dirty="0">
+                <a:solidFill>
+                  <a:srgbClr val="A7A9B4"/>
+                </a:solidFill>
+                <a:latin typeface="Roboto" pitchFamily="34" charset="0"/>
+                <a:ea typeface="Roboto" pitchFamily="34" charset="-122"/>
+                <a:cs typeface="Roboto" pitchFamily="34" charset="-120"/>
+              </a:rPr>
+              <a:t>E mesmo assim, o prato nunca entrou no estoque. Resultado líquido zero, sem uma falha visível.</a:t>
+            </a:r>
+            <a:endParaRPr lang="en-US" sz="2800" dirty="0"/>
+          </a:p>
+        </p:txBody>
+      </p:sp>
+      <p:pic>
+        <p:nvPicPr>
+          <p:cNvPr id="13" name="Image 5" descr="art\seta.png">    </p:cNvPr>
+          <p:cNvPicPr>
+            <a:picLocks noChangeAspect="1"/>
+          </p:cNvPicPr>
+          <p:nvPr/>
+        </p:nvPicPr>
+        <p:blipFill>
+          <a:blip r:embed="rId6"/>
+          <a:stretch>
+            <a:fillRect/>
+          </a:stretch>
+        </p:blipFill>
+        <p:spPr>
+          <a:xfrm>
+            <a:off x="2423160" y="10757916"/>
+            <a:ext cx="475488" cy="411480"/>
+          </a:xfrm>
+          <a:prstGeom prst="rect">
+            <a:avLst/>
+          </a:prstGeom>
+        </p:spPr>
+      </p:pic>
+      <p:sp>
+        <p:nvSpPr>
+          <p:cNvPr id="14" name="Text 6"/>
+          <p:cNvSpPr txBox="1"/>
+          <p:nvPr/>
+        </p:nvSpPr>
+        <p:spPr>
+          <a:xfrm>
+            <a:off x="3337560" y="10629900"/>
+            <a:ext cx="17922240" cy="548640"/>
+          </a:xfrm>
+          <a:prstGeom prst="rect">
+            <a:avLst/>
+          </a:prstGeom>
+          <a:noFill/>
+          <a:ln/>
+        </p:spPr>
+        <p:txBody>
+          <a:bodyPr wrap="square" lIns="0" tIns="0" rIns="0" bIns="0" rtlCol="0" anchor="t"/>
+          <a:lstStyle/>
+          <a:p>
+            <a:pPr indent="0" marL="0">
+              <a:lnSpc>
+                <a:spcPct val="118000"/>
+              </a:lnSpc>
+              <a:buNone/>
+            </a:pPr>
+            <a:r>
+              <a:rPr lang="en-US" sz="2800" dirty="0">
+                <a:solidFill>
+                  <a:srgbClr val="A7A9B4"/>
+                </a:solidFill>
+                <a:latin typeface="Roboto" pitchFamily="34" charset="0"/>
+                <a:ea typeface="Roboto" pitchFamily="34" charset="-122"/>
+                <a:cs typeface="Roboto" pitchFamily="34" charset="-120"/>
+              </a:rPr>
+              <a:t>O que eu levo ao Claude: “prompt, dados ou modelo — qual dos três explica isso?” Resposta: nenhum. É o sistema que não guarda memória entre mensagens.</a:t>
+            </a:r>
+            <a:endParaRPr lang="en-US" sz="2800" dirty="0"/>
+          </a:p>
+        </p:txBody>
+      </p:sp>
+      <p:sp>
+        <p:nvSpPr>
+          <p:cNvPr id="15" name="Text 7"/>
+          <p:cNvSpPr txBox="1"/>
+          <p:nvPr/>
+        </p:nvSpPr>
+        <p:spPr>
+          <a:xfrm>
+            <a:off x="2423160" y="12755880"/>
+            <a:ext cx="19540728" cy="457200"/>
+          </a:xfrm>
+          <a:prstGeom prst="rect">
+            <a:avLst/>
+          </a:prstGeom>
+          <a:noFill/>
+          <a:ln/>
+        </p:spPr>
+        <p:txBody>
+          <a:bodyPr wrap="square" lIns="0" tIns="0" rIns="0" bIns="0" rtlCol="0" anchor="ctr"/>
+          <a:lstStyle/>
+          <a:p>
+            <a:pPr indent="0" marL="0">
+              <a:buNone/>
+            </a:pPr>
+            <a:r>
+              <a:rPr lang="en-US" sz="1500" dirty="0">
+                <a:solidFill>
+                  <a:srgbClr val="A7A9B4">
+                    <a:alpha val="65000"/>
+                  </a:srgbClr>
+                </a:solidFill>
+                <a:latin typeface="Roboto" pitchFamily="34" charset="0"/>
+                <a:ea typeface="Roboto" pitchFamily="34" charset="-122"/>
+                <a:cs typeface="Roboto" pitchFamily="34" charset="-120"/>
+              </a:rPr>
+              <a:t>Aula 4 — Detectar, diagnosticar e corrigir — Evals, observabilidade e conformidade</a:t>
+            </a:r>
+            <a:endParaRPr lang="en-US" sz="1500" dirty="0"/>
           </a:p>
         </p:txBody>
       </p:sp>
@@ -3239,7 +3846,7 @@
       </p:grpSpPr>
       <p:pic>
         <p:nvPicPr>
-          <p:cNvPr id="2" name="Image 0" descr="C:\Users\PCSTUD~1\AppData\Local\Temp\claude\C--Users-PC-Studio-2-Desktop-6498-Evals\7ce78c02-4c99-40d4-bc57-5394098065c6\scratchpad\art\malha.png">    </p:cNvPr>
+          <p:cNvPr id="2" name="Image 0" descr="art\malha.png">    </p:cNvPr>
           <p:cNvPicPr>
             <a:picLocks noChangeAspect="1"/>
           </p:cNvPicPr>
@@ -3263,7 +3870,7 @@
       </p:pic>
       <p:pic>
         <p:nvPicPr>
-          <p:cNvPr id="3" name="Image 1" descr="C:\Users\PCSTUD~1\AppData\Local\Temp\claude\C--Users-PC-Studio-2-Desktop-6498-Evals\7ce78c02-4c99-40d4-bc57-5394098065c6\scratchpad\art\logo.png">    </p:cNvPr>
+          <p:cNvPr id="3" name="Image 1" descr="art\logo.png">    </p:cNvPr>
           <p:cNvPicPr>
             <a:picLocks noChangeAspect="1"/>
           </p:cNvPicPr>
@@ -3293,7 +3900,7 @@
         </p:nvSpPr>
         <p:spPr>
           <a:xfrm>
-            <a:off x="2423160" y="2148840"/>
+            <a:off x="2423160" y="1051560"/>
             <a:ext cx="19540728" cy="594360"/>
           </a:xfrm>
           <a:prstGeom prst="rect">
@@ -3318,7 +3925,7 @@
                 <a:ea typeface="Encode Sans" pitchFamily="34" charset="-122"/>
                 <a:cs typeface="Encode Sans" pitchFamily="34" charset="-120"/>
               </a:rPr>
-              <a:t>VÍDEO 4.3 — A CORREÇÃO</a:t>
+              <a:t>VÍDEO 4.2</a:t>
             </a:r>
             <a:endParaRPr lang="en-US" sz="2100" dirty="0"/>
           </a:p>
@@ -3332,8 +3939,8 @@
         </p:nvSpPr>
         <p:spPr>
           <a:xfrm>
-            <a:off x="2423160" y="2880360"/>
-            <a:ext cx="18745200" cy="2377440"/>
+            <a:off x="2423160" y="1783080"/>
+            <a:ext cx="19568160" cy="2377440"/>
           </a:xfrm>
           <a:prstGeom prst="rect">
             <a:avLst/>
@@ -3360,7 +3967,7 @@
                 <a:ea typeface="Encode Sans" pitchFamily="34" charset="-122"/>
                 <a:cs typeface="Encode Sans" pitchFamily="34" charset="-120"/>
               </a:rPr>
-              <a:t>Ensinar o produto a dizer “não sei”</a:t>
+              <a:t>O que os quatro casos têm em comum</a:t>
             </a:r>
             <a:endParaRPr lang="en-US" sz="6600" dirty="0"/>
           </a:p>
@@ -3368,53 +3975,58 @@
       </p:sp>
       <p:sp>
         <p:nvSpPr>
-          <p:cNvPr id="6" name="Text 2"/>
+          <p:cNvPr id="6" name="Shape 2"/>
+          <p:cNvSpPr/>
+          <p:nvPr/>
+        </p:nvSpPr>
+        <p:spPr>
+          <a:xfrm>
+            <a:off x="2423160" y="4526280"/>
+            <a:ext cx="2011680" cy="68580"/>
+          </a:xfrm>
+          <a:prstGeom prst="rect">
+            <a:avLst/>
+          </a:prstGeom>
+          <a:solidFill>
+            <a:srgbClr val="1F53E5"/>
+          </a:solidFill>
+          <a:ln/>
+        </p:spPr>
+      </p:sp>
+      <p:pic>
+        <p:nvPicPr>
+          <p:cNvPr id="7" name="Image 2" descr="art\seta.png">    </p:cNvPr>
+          <p:cNvPicPr>
+            <a:picLocks noChangeAspect="1"/>
+          </p:cNvPicPr>
+          <p:nvPr/>
+        </p:nvPicPr>
+        <p:blipFill>
+          <a:blip r:embed="rId3"/>
+          <a:stretch>
+            <a:fillRect/>
+          </a:stretch>
+        </p:blipFill>
+        <p:spPr>
+          <a:xfrm>
+            <a:off x="2423160" y="6871716"/>
+            <a:ext cx="475488" cy="411480"/>
+          </a:xfrm>
+          <a:prstGeom prst="rect">
+            <a:avLst/>
+          </a:prstGeom>
+        </p:spPr>
+      </p:pic>
+      <p:sp>
+        <p:nvSpPr>
+          <p:cNvPr id="8" name="Text 3"/>
           <p:cNvSpPr txBox="1"/>
           <p:nvPr/>
         </p:nvSpPr>
         <p:spPr>
           <a:xfrm>
-            <a:off x="2423160" y="5367528"/>
-            <a:ext cx="777240" cy="548640"/>
-          </a:xfrm>
-          <a:prstGeom prst="rect">
-            <a:avLst/>
-          </a:prstGeom>
-          <a:noFill/>
-          <a:ln/>
-        </p:spPr>
-        <p:txBody>
-          <a:bodyPr wrap="square" lIns="0" tIns="0" rIns="0" bIns="0" rtlCol="0" anchor="t"/>
-          <a:lstStyle/>
-          <a:p>
-            <a:pPr indent="0" marL="0">
-              <a:buNone/>
-            </a:pPr>
-            <a:r>
-              <a:rPr lang="en-US" sz="3000" b="1" dirty="0">
-                <a:solidFill>
-                  <a:srgbClr val="1F53E5"/>
-                </a:solidFill>
-                <a:latin typeface="Roboto" pitchFamily="34" charset="0"/>
-                <a:ea typeface="Roboto" pitchFamily="34" charset="-122"/>
-                <a:cs typeface="Roboto" pitchFamily="34" charset="-120"/>
-              </a:rPr>
-              <a:t>→</a:t>
-            </a:r>
-            <a:endParaRPr lang="en-US" sz="3000" dirty="0"/>
-          </a:p>
-        </p:txBody>
-      </p:sp>
-      <p:sp>
-        <p:nvSpPr>
-          <p:cNvPr id="7" name="Text 3"/>
-          <p:cNvSpPr txBox="1"/>
-          <p:nvPr/>
-        </p:nvSpPr>
-        <p:spPr>
-          <a:xfrm>
-            <a:off x="3337560" y="5349240"/>
-            <a:ext cx="17922240" cy="1097280"/>
+            <a:off x="3337560" y="6743700"/>
+            <a:ext cx="17922240" cy="548640"/>
           </a:xfrm>
           <a:prstGeom prst="rect">
             <a:avLst/>
@@ -3441,60 +4053,45 @@
                 <a:ea typeface="Roboto" pitchFamily="34" charset="-122"/>
                 <a:cs typeface="Roboto" pitchFamily="34" charset="-120"/>
               </a:rPr>
-              <a:t>O Claude achou o ponto: existe um caminho em que o produto recebe a mensagem e simplesmente sai calado.</a:t>
+              <a:t>Em nenhum deles eu li código para descobrir o problema. Eu observei, juntei evidência e perguntei.</a:t>
             </a:r>
             <a:endParaRPr lang="en-US" sz="2800" dirty="0"/>
           </a:p>
         </p:txBody>
       </p:sp>
-      <p:sp>
-        <p:nvSpPr>
-          <p:cNvPr id="8" name="Text 4"/>
+      <p:pic>
+        <p:nvPicPr>
+          <p:cNvPr id="9" name="Image 3" descr="art\seta.png">    </p:cNvPr>
+          <p:cNvPicPr>
+            <a:picLocks noChangeAspect="1"/>
+          </p:cNvPicPr>
+          <p:nvPr/>
+        </p:nvPicPr>
+        <p:blipFill>
+          <a:blip r:embed="rId4"/>
+          <a:stretch>
+            <a:fillRect/>
+          </a:stretch>
+        </p:blipFill>
+        <p:spPr>
+          <a:xfrm>
+            <a:off x="2423160" y="8426196"/>
+            <a:ext cx="475488" cy="411480"/>
+          </a:xfrm>
+          <a:prstGeom prst="rect">
+            <a:avLst/>
+          </a:prstGeom>
+        </p:spPr>
+      </p:pic>
+      <p:sp>
+        <p:nvSpPr>
+          <p:cNvPr id="10" name="Text 4"/>
           <p:cNvSpPr txBox="1"/>
           <p:nvPr/>
         </p:nvSpPr>
         <p:spPr>
           <a:xfrm>
-            <a:off x="2423160" y="6967728"/>
-            <a:ext cx="777240" cy="548640"/>
-          </a:xfrm>
-          <a:prstGeom prst="rect">
-            <a:avLst/>
-          </a:prstGeom>
-          <a:noFill/>
-          <a:ln/>
-        </p:spPr>
-        <p:txBody>
-          <a:bodyPr wrap="square" lIns="0" tIns="0" rIns="0" bIns="0" rtlCol="0" anchor="t"/>
-          <a:lstStyle/>
-          <a:p>
-            <a:pPr indent="0" marL="0">
-              <a:buNone/>
-            </a:pPr>
-            <a:r>
-              <a:rPr lang="en-US" sz="3000" b="1" dirty="0">
-                <a:solidFill>
-                  <a:srgbClr val="1F53E5"/>
-                </a:solidFill>
-                <a:latin typeface="Roboto" pitchFamily="34" charset="0"/>
-                <a:ea typeface="Roboto" pitchFamily="34" charset="-122"/>
-                <a:cs typeface="Roboto" pitchFamily="34" charset="-120"/>
-              </a:rPr>
-              <a:t>→</a:t>
-            </a:r>
-            <a:endParaRPr lang="en-US" sz="3000" dirty="0"/>
-          </a:p>
-        </p:txBody>
-      </p:sp>
-      <p:sp>
-        <p:nvSpPr>
-          <p:cNvPr id="9" name="Text 5"/>
-          <p:cNvSpPr txBox="1"/>
-          <p:nvPr/>
-        </p:nvSpPr>
-        <p:spPr>
-          <a:xfrm>
-            <a:off x="3337560" y="6949440"/>
+            <a:off x="3337560" y="8298180"/>
             <a:ext cx="17922240" cy="548640"/>
           </a:xfrm>
           <a:prstGeom prst="rect">
@@ -3522,60 +4119,45 @@
                 <a:ea typeface="Roboto" pitchFamily="34" charset="-122"/>
                 <a:cs typeface="Roboto" pitchFamily="34" charset="-120"/>
               </a:rPr>
-              <a:t>A correção não ensina ele a ler foto. Ensina ele a avisar que não sabe ler.</a:t>
+              <a:t>Nos dois primeiros, o produto falhou em avisar. No terceiro, ele avisou que tinha dado certo — e não tinha.</a:t>
             </a:r>
             <a:endParaRPr lang="en-US" sz="2800" dirty="0"/>
           </a:p>
         </p:txBody>
       </p:sp>
-      <p:sp>
-        <p:nvSpPr>
-          <p:cNvPr id="10" name="Text 6"/>
+      <p:pic>
+        <p:nvPicPr>
+          <p:cNvPr id="11" name="Image 4" descr="art\seta.png">    </p:cNvPr>
+          <p:cNvPicPr>
+            <a:picLocks noChangeAspect="1"/>
+          </p:cNvPicPr>
+          <p:nvPr/>
+        </p:nvPicPr>
+        <p:blipFill>
+          <a:blip r:embed="rId5"/>
+          <a:stretch>
+            <a:fillRect/>
+          </a:stretch>
+        </p:blipFill>
+        <p:spPr>
+          <a:xfrm>
+            <a:off x="2423160" y="9980676"/>
+            <a:ext cx="475488" cy="411480"/>
+          </a:xfrm>
+          <a:prstGeom prst="rect">
+            <a:avLst/>
+          </a:prstGeom>
+        </p:spPr>
+      </p:pic>
+      <p:sp>
+        <p:nvSpPr>
+          <p:cNvPr id="12" name="Text 5"/>
           <p:cNvSpPr txBox="1"/>
           <p:nvPr/>
         </p:nvSpPr>
         <p:spPr>
           <a:xfrm>
-            <a:off x="2423160" y="8019288"/>
-            <a:ext cx="777240" cy="548640"/>
-          </a:xfrm>
-          <a:prstGeom prst="rect">
-            <a:avLst/>
-          </a:prstGeom>
-          <a:noFill/>
-          <a:ln/>
-        </p:spPr>
-        <p:txBody>
-          <a:bodyPr wrap="square" lIns="0" tIns="0" rIns="0" bIns="0" rtlCol="0" anchor="t"/>
-          <a:lstStyle/>
-          <a:p>
-            <a:pPr indent="0" marL="0">
-              <a:buNone/>
-            </a:pPr>
-            <a:r>
-              <a:rPr lang="en-US" sz="3000" b="1" dirty="0">
-                <a:solidFill>
-                  <a:srgbClr val="1F53E5"/>
-                </a:solidFill>
-                <a:latin typeface="Roboto" pitchFamily="34" charset="0"/>
-                <a:ea typeface="Roboto" pitchFamily="34" charset="-122"/>
-                <a:cs typeface="Roboto" pitchFamily="34" charset="-120"/>
-              </a:rPr>
-              <a:t>→</a:t>
-            </a:r>
-            <a:endParaRPr lang="en-US" sz="3000" dirty="0"/>
-          </a:p>
-        </p:txBody>
-      </p:sp>
-      <p:sp>
-        <p:nvSpPr>
-          <p:cNvPr id="11" name="Text 7"/>
-          <p:cNvSpPr txBox="1"/>
-          <p:nvPr/>
-        </p:nvSpPr>
-        <p:spPr>
-          <a:xfrm>
-            <a:off x="3337560" y="8001000"/>
+            <a:off x="3337560" y="9852660"/>
             <a:ext cx="17922240" cy="548640"/>
           </a:xfrm>
           <a:prstGeom prst="rect">
@@ -3595,15 +4177,15 @@
               <a:buNone/>
             </a:pPr>
             <a:r>
-              <a:rPr lang="en-US" sz="2800" dirty="0">
+              <a:rPr lang="en-US" sz="2800" b="1" dirty="0">
                 <a:solidFill>
-                  <a:srgbClr val="A7A9B4"/>
+                  <a:srgbClr val="F4F5F6"/>
                 </a:solidFill>
                 <a:latin typeface="Roboto" pitchFamily="34" charset="0"/>
                 <a:ea typeface="Roboto" pitchFamily="34" charset="-122"/>
                 <a:cs typeface="Roboto" pitchFamily="34" charset="-120"/>
               </a:rPr>
-              <a:t>E resolve o outro caso junto: o aviso de erro nunca mais apaga a informação do erro.</a:t>
+              <a:t>E no quarto, cada peça isolada estava certa — a soma delas ainda assim falhou. Quem errou foi o produto em volta do modelo, ou a peça que nunca existiu.</a:t>
             </a:r>
             <a:endParaRPr lang="en-US" sz="2800" dirty="0"/>
           </a:p>
@@ -3611,88 +4193,7 @@
       </p:sp>
       <p:sp>
         <p:nvSpPr>
-          <p:cNvPr id="12" name="Text 8"/>
-          <p:cNvSpPr txBox="1"/>
-          <p:nvPr/>
-        </p:nvSpPr>
-        <p:spPr>
-          <a:xfrm>
-            <a:off x="2423160" y="9070848"/>
-            <a:ext cx="777240" cy="548640"/>
-          </a:xfrm>
-          <a:prstGeom prst="rect">
-            <a:avLst/>
-          </a:prstGeom>
-          <a:noFill/>
-          <a:ln/>
-        </p:spPr>
-        <p:txBody>
-          <a:bodyPr wrap="square" lIns="0" tIns="0" rIns="0" bIns="0" rtlCol="0" anchor="t"/>
-          <a:lstStyle/>
-          <a:p>
-            <a:pPr indent="0" marL="0">
-              <a:buNone/>
-            </a:pPr>
-            <a:r>
-              <a:rPr lang="en-US" sz="3000" b="1" dirty="0">
-                <a:solidFill>
-                  <a:srgbClr val="1F53E5"/>
-                </a:solidFill>
-                <a:latin typeface="Roboto" pitchFamily="34" charset="0"/>
-                <a:ea typeface="Roboto" pitchFamily="34" charset="-122"/>
-                <a:cs typeface="Roboto" pitchFamily="34" charset="-120"/>
-              </a:rPr>
-              <a:t>→</a:t>
-            </a:r>
-            <a:endParaRPr lang="en-US" sz="3000" dirty="0"/>
-          </a:p>
-        </p:txBody>
-      </p:sp>
-      <p:sp>
-        <p:nvSpPr>
-          <p:cNvPr id="13" name="Text 9"/>
-          <p:cNvSpPr txBox="1"/>
-          <p:nvPr/>
-        </p:nvSpPr>
-        <p:spPr>
-          <a:xfrm>
-            <a:off x="3337560" y="9052560"/>
-            <a:ext cx="17922240" cy="548640"/>
-          </a:xfrm>
-          <a:prstGeom prst="rect">
-            <a:avLst/>
-          </a:prstGeom>
-          <a:noFill/>
-          <a:ln/>
-        </p:spPr>
-        <p:txBody>
-          <a:bodyPr wrap="square" lIns="0" tIns="0" rIns="0" bIns="0" rtlCol="0" anchor="t"/>
-          <a:lstStyle/>
-          <a:p>
-            <a:pPr indent="0" marL="0">
-              <a:lnSpc>
-                <a:spcPct val="118000"/>
-              </a:lnSpc>
-              <a:buNone/>
-            </a:pPr>
-            <a:r>
-              <a:rPr lang="en-US" sz="2800" b="1" dirty="0">
-                <a:solidFill>
-                  <a:srgbClr val="BDBFC7"/>
-                </a:solidFill>
-                <a:latin typeface="Roboto" pitchFamily="34" charset="0"/>
-                <a:ea typeface="Roboto" pitchFamily="34" charset="-122"/>
-                <a:cs typeface="Roboto" pitchFamily="34" charset="-120"/>
-              </a:rPr>
-              <a:t>Admitir a limitação já é uma correção — o problema não era não saber ler, era não dizer.</a:t>
-            </a:r>
-            <a:endParaRPr lang="en-US" sz="2800" dirty="0"/>
-          </a:p>
-        </p:txBody>
-      </p:sp>
-      <p:sp>
-        <p:nvSpPr>
-          <p:cNvPr id="14" name="Text 10"/>
+          <p:cNvPr id="13" name="Text 6"/>
           <p:cNvSpPr txBox="1"/>
           <p:nvPr/>
         </p:nvSpPr>
@@ -3742,6 +4243,104 @@
 <file path=ppt/slides/slide13.xml><?xml version="1.0" encoding="utf-8"?>
 <p:sld xmlns:a="http://schemas.openxmlformats.org/drawingml/2006/main" xmlns:r="http://schemas.openxmlformats.org/officeDocument/2006/relationships" xmlns:p="http://schemas.openxmlformats.org/presentationml/2006/main">
   <p:cSld name="Slide 13">
+    <p:bg>
+      <p:bgPr>
+        <a:solidFill>
+          <a:srgbClr val="052FD3"/>
+        </a:solidFill>
+      </p:bgPr>
+    </p:bg>
+    <p:spTree>
+      <p:nvGrpSpPr>
+        <p:cNvPr id="1" name=""/>
+        <p:cNvGrpSpPr/>
+        <p:nvPr/>
+      </p:nvGrpSpPr>
+      <p:grpSpPr>
+        <a:xfrm>
+          <a:off x="0" y="0"/>
+          <a:ext cx="0" cy="0"/>
+          <a:chOff x="0" y="0"/>
+          <a:chExt cx="0" cy="0"/>
+        </a:xfrm>
+      </p:grpSpPr>
+      <p:pic>
+        <p:nvPicPr>
+          <p:cNvPr id="2" name="Image 0" descr="art\logo.png">    </p:cNvPr>
+          <p:cNvPicPr>
+            <a:picLocks noChangeAspect="1"/>
+          </p:cNvPicPr>
+          <p:nvPr/>
+        </p:nvPicPr>
+        <p:blipFill>
+          <a:blip r:embed="rId1"/>
+          <a:stretch>
+            <a:fillRect/>
+          </a:stretch>
+        </p:blipFill>
+        <p:spPr>
+          <a:xfrm>
+            <a:off x="23436072" y="402336"/>
+            <a:ext cx="475488" cy="594360"/>
+          </a:xfrm>
+          <a:prstGeom prst="rect">
+            <a:avLst/>
+          </a:prstGeom>
+        </p:spPr>
+      </p:pic>
+      <p:sp>
+        <p:nvSpPr>
+          <p:cNvPr id="3" name="Text 0"/>
+          <p:cNvSpPr txBox="1"/>
+          <p:nvPr/>
+        </p:nvSpPr>
+        <p:spPr>
+          <a:xfrm>
+            <a:off x="4416552" y="4023360"/>
+            <a:ext cx="15544800" cy="5669280"/>
+          </a:xfrm>
+          <a:prstGeom prst="rect">
+            <a:avLst/>
+          </a:prstGeom>
+          <a:noFill/>
+          <a:ln/>
+        </p:spPr>
+        <p:txBody>
+          <a:bodyPr wrap="square" lIns="0" tIns="0" rIns="0" bIns="0" rtlCol="0" anchor="ctr"/>
+          <a:lstStyle/>
+          <a:p>
+            <a:pPr algn="ctr" indent="0" marL="0">
+              <a:lnSpc>
+                <a:spcPct val="105000"/>
+              </a:lnSpc>
+              <a:buNone/>
+            </a:pPr>
+            <a:r>
+              <a:rPr lang="en-US" sz="9600" dirty="0">
+                <a:solidFill>
+                  <a:srgbClr val="FFFFFF"/>
+                </a:solidFill>
+                <a:latin typeface="Encode Sans" pitchFamily="34" charset="0"/>
+                <a:ea typeface="Encode Sans" pitchFamily="34" charset="-122"/>
+                <a:cs typeface="Encode Sans" pitchFamily="34" charset="-120"/>
+              </a:rPr>
+              <a:t>4.3 Corrigindo antes do usuário</a:t>
+            </a:r>
+            <a:endParaRPr lang="en-US" sz="9600" dirty="0"/>
+          </a:p>
+        </p:txBody>
+      </p:sp>
+    </p:spTree>
+  </p:cSld>
+  <p:clrMapOvr>
+    <a:masterClrMapping/>
+  </p:clrMapOvr>
+</p:sld>
+</file>
+
+<file path=ppt/slides/slide14.xml><?xml version="1.0" encoding="utf-8"?>
+<p:sld xmlns:a="http://schemas.openxmlformats.org/drawingml/2006/main" xmlns:r="http://schemas.openxmlformats.org/officeDocument/2006/relationships" xmlns:p="http://schemas.openxmlformats.org/presentationml/2006/main">
+  <p:cSld name="Slide 14">
     <p:bg>
       <p:bgPr>
         <a:solidFill>
@@ -3765,7 +4364,7 @@
       </p:grpSpPr>
       <p:pic>
         <p:nvPicPr>
-          <p:cNvPr id="2" name="Image 0" descr="C:\Users\PCSTUD~1\AppData\Local\Temp\claude\C--Users-PC-Studio-2-Desktop-6498-Evals\7ce78c02-4c99-40d4-bc57-5394098065c6\scratchpad\art\malha.png">    </p:cNvPr>
+          <p:cNvPr id="2" name="Image 0" descr="art\malha.png">    </p:cNvPr>
           <p:cNvPicPr>
             <a:picLocks noChangeAspect="1"/>
           </p:cNvPicPr>
@@ -3789,7 +4388,7 @@
       </p:pic>
       <p:pic>
         <p:nvPicPr>
-          <p:cNvPr id="3" name="Image 1" descr="C:\Users\PCSTUD~1\AppData\Local\Temp\claude\C--Users-PC-Studio-2-Desktop-6498-Evals\7ce78c02-4c99-40d4-bc57-5394098065c6\scratchpad\art\logo.png">    </p:cNvPr>
+          <p:cNvPr id="3" name="Image 1" descr="art\logo.png">    </p:cNvPr>
           <p:cNvPicPr>
             <a:picLocks noChangeAspect="1"/>
           </p:cNvPicPr>
@@ -3819,7 +4418,7 @@
         </p:nvSpPr>
         <p:spPr>
           <a:xfrm>
-            <a:off x="2423160" y="2148840"/>
+            <a:off x="2423160" y="1051560"/>
             <a:ext cx="19540728" cy="594360"/>
           </a:xfrm>
           <a:prstGeom prst="rect">
@@ -3844,7 +4443,7 @@
                 <a:ea typeface="Encode Sans" pitchFamily="34" charset="-122"/>
                 <a:cs typeface="Encode Sans" pitchFamily="34" charset="-120"/>
               </a:rPr>
-              <a:t>VÍDEO 4.3 — A CAPACIDADE NOVA</a:t>
+              <a:t>VÍDEO 4.3 — A CORREÇÃO</a:t>
             </a:r>
             <a:endParaRPr lang="en-US" sz="2100" dirty="0"/>
           </a:p>
@@ -3858,8 +4457,8 @@
         </p:nvSpPr>
         <p:spPr>
           <a:xfrm>
-            <a:off x="2423160" y="2880360"/>
-            <a:ext cx="18745200" cy="2377440"/>
+            <a:off x="2423160" y="1783080"/>
+            <a:ext cx="19568160" cy="2377440"/>
           </a:xfrm>
           <a:prstGeom prst="rect">
             <a:avLst/>
@@ -3886,7 +4485,7 @@
                 <a:ea typeface="Encode Sans" pitchFamily="34" charset="-122"/>
                 <a:cs typeface="Encode Sans" pitchFamily="34" charset="-120"/>
               </a:rPr>
-              <a:t>Agora sim: ensinar a ler a nota</a:t>
+              <a:t>Ensinar o produto a dizer “não sei”</a:t>
             </a:r>
             <a:endParaRPr lang="en-US" sz="6600" dirty="0"/>
           </a:p>
@@ -3894,52 +4493,57 @@
       </p:sp>
       <p:sp>
         <p:nvSpPr>
-          <p:cNvPr id="6" name="Text 2"/>
+          <p:cNvPr id="6" name="Shape 2"/>
+          <p:cNvSpPr/>
+          <p:nvPr/>
+        </p:nvSpPr>
+        <p:spPr>
+          <a:xfrm>
+            <a:off x="2423160" y="4526280"/>
+            <a:ext cx="2011680" cy="68580"/>
+          </a:xfrm>
+          <a:prstGeom prst="rect">
+            <a:avLst/>
+          </a:prstGeom>
+          <a:solidFill>
+            <a:srgbClr val="1F53E5"/>
+          </a:solidFill>
+          <a:ln/>
+        </p:spPr>
+      </p:sp>
+      <p:pic>
+        <p:nvPicPr>
+          <p:cNvPr id="7" name="Image 2" descr="art\seta.png">    </p:cNvPr>
+          <p:cNvPicPr>
+            <a:picLocks noChangeAspect="1"/>
+          </p:cNvPicPr>
+          <p:nvPr/>
+        </p:nvPicPr>
+        <p:blipFill>
+          <a:blip r:embed="rId3"/>
+          <a:stretch>
+            <a:fillRect/>
+          </a:stretch>
+        </p:blipFill>
+        <p:spPr>
+          <a:xfrm>
+            <a:off x="2423160" y="6094476"/>
+            <a:ext cx="475488" cy="411480"/>
+          </a:xfrm>
+          <a:prstGeom prst="rect">
+            <a:avLst/>
+          </a:prstGeom>
+        </p:spPr>
+      </p:pic>
+      <p:sp>
+        <p:nvSpPr>
+          <p:cNvPr id="8" name="Text 3"/>
           <p:cNvSpPr txBox="1"/>
           <p:nvPr/>
         </p:nvSpPr>
         <p:spPr>
           <a:xfrm>
-            <a:off x="2423160" y="5367528"/>
-            <a:ext cx="777240" cy="548640"/>
-          </a:xfrm>
-          <a:prstGeom prst="rect">
-            <a:avLst/>
-          </a:prstGeom>
-          <a:noFill/>
-          <a:ln/>
-        </p:spPr>
-        <p:txBody>
-          <a:bodyPr wrap="square" lIns="0" tIns="0" rIns="0" bIns="0" rtlCol="0" anchor="t"/>
-          <a:lstStyle/>
-          <a:p>
-            <a:pPr indent="0" marL="0">
-              <a:buNone/>
-            </a:pPr>
-            <a:r>
-              <a:rPr lang="en-US" sz="3000" b="1" dirty="0">
-                <a:solidFill>
-                  <a:srgbClr val="1F53E5"/>
-                </a:solidFill>
-                <a:latin typeface="Roboto" pitchFamily="34" charset="0"/>
-                <a:ea typeface="Roboto" pitchFamily="34" charset="-122"/>
-                <a:cs typeface="Roboto" pitchFamily="34" charset="-120"/>
-              </a:rPr>
-              <a:t>→</a:t>
-            </a:r>
-            <a:endParaRPr lang="en-US" sz="3000" dirty="0"/>
-          </a:p>
-        </p:txBody>
-      </p:sp>
-      <p:sp>
-        <p:nvSpPr>
-          <p:cNvPr id="7" name="Text 3"/>
-          <p:cNvSpPr txBox="1"/>
-          <p:nvPr/>
-        </p:nvSpPr>
-        <p:spPr>
-          <a:xfrm>
-            <a:off x="3337560" y="5349240"/>
+            <a:off x="3337560" y="5966460"/>
             <a:ext cx="17922240" cy="548640"/>
           </a:xfrm>
           <a:prstGeom prst="rect">
@@ -3967,60 +4571,45 @@
                 <a:ea typeface="Roboto" pitchFamily="34" charset="-122"/>
                 <a:cs typeface="Roboto" pitchFamily="34" charset="-120"/>
               </a:rPr>
-              <a:t>Só depois de o produto saber dizer “não sei” é que faz sentido ensinar ele a saber.</a:t>
+              <a:t>O Claude achou o ponto: existe um caminho em que o produto recebe a mensagem e simplesmente sai calado.</a:t>
             </a:r>
             <a:endParaRPr lang="en-US" sz="2800" dirty="0"/>
           </a:p>
         </p:txBody>
       </p:sp>
-      <p:sp>
-        <p:nvSpPr>
-          <p:cNvPr id="8" name="Text 4"/>
+      <p:pic>
+        <p:nvPicPr>
+          <p:cNvPr id="9" name="Image 3" descr="art\seta.png">    </p:cNvPr>
+          <p:cNvPicPr>
+            <a:picLocks noChangeAspect="1"/>
+          </p:cNvPicPr>
+          <p:nvPr/>
+        </p:nvPicPr>
+        <p:blipFill>
+          <a:blip r:embed="rId4"/>
+          <a:stretch>
+            <a:fillRect/>
+          </a:stretch>
+        </p:blipFill>
+        <p:spPr>
+          <a:xfrm>
+            <a:off x="2423160" y="7648956"/>
+            <a:ext cx="475488" cy="411480"/>
+          </a:xfrm>
+          <a:prstGeom prst="rect">
+            <a:avLst/>
+          </a:prstGeom>
+        </p:spPr>
+      </p:pic>
+      <p:sp>
+        <p:nvSpPr>
+          <p:cNvPr id="10" name="Text 4"/>
           <p:cNvSpPr txBox="1"/>
           <p:nvPr/>
         </p:nvSpPr>
         <p:spPr>
           <a:xfrm>
-            <a:off x="2423160" y="6419088"/>
-            <a:ext cx="777240" cy="548640"/>
-          </a:xfrm>
-          <a:prstGeom prst="rect">
-            <a:avLst/>
-          </a:prstGeom>
-          <a:noFill/>
-          <a:ln/>
-        </p:spPr>
-        <p:txBody>
-          <a:bodyPr wrap="square" lIns="0" tIns="0" rIns="0" bIns="0" rtlCol="0" anchor="t"/>
-          <a:lstStyle/>
-          <a:p>
-            <a:pPr indent="0" marL="0">
-              <a:buNone/>
-            </a:pPr>
-            <a:r>
-              <a:rPr lang="en-US" sz="3000" b="1" dirty="0">
-                <a:solidFill>
-                  <a:srgbClr val="1F53E5"/>
-                </a:solidFill>
-                <a:latin typeface="Roboto" pitchFamily="34" charset="0"/>
-                <a:ea typeface="Roboto" pitchFamily="34" charset="-122"/>
-                <a:cs typeface="Roboto" pitchFamily="34" charset="-120"/>
-              </a:rPr>
-              <a:t>→</a:t>
-            </a:r>
-            <a:endParaRPr lang="en-US" sz="3000" dirty="0"/>
-          </a:p>
-        </p:txBody>
-      </p:sp>
-      <p:sp>
-        <p:nvSpPr>
-          <p:cNvPr id="9" name="Text 5"/>
-          <p:cNvSpPr txBox="1"/>
-          <p:nvPr/>
-        </p:nvSpPr>
-        <p:spPr>
-          <a:xfrm>
-            <a:off x="3337560" y="6400800"/>
+            <a:off x="3337560" y="7520940"/>
             <a:ext cx="17922240" cy="548640"/>
           </a:xfrm>
           <a:prstGeom prst="rect">
@@ -4048,141 +4637,45 @@
                 <a:ea typeface="Roboto" pitchFamily="34" charset="-122"/>
                 <a:cs typeface="Roboto" pitchFamily="34" charset="-120"/>
               </a:rPr>
-              <a:t>A foto entra e os itens caem no estoque com o dado oficial da nota — não com chute de modelo.</a:t>
+              <a:t>A correção não ensina ele a ler foto. Ensina ele a avisar que não sabe ler.</a:t>
             </a:r>
             <a:endParaRPr lang="en-US" sz="2800" dirty="0"/>
           </a:p>
         </p:txBody>
       </p:sp>
-      <p:sp>
-        <p:nvSpPr>
-          <p:cNvPr id="10" name="Text 6"/>
+      <p:pic>
+        <p:nvPicPr>
+          <p:cNvPr id="11" name="Image 4" descr="art\seta.png">    </p:cNvPr>
+          <p:cNvPicPr>
+            <a:picLocks noChangeAspect="1"/>
+          </p:cNvPicPr>
+          <p:nvPr/>
+        </p:nvPicPr>
+        <p:blipFill>
+          <a:blip r:embed="rId5"/>
+          <a:stretch>
+            <a:fillRect/>
+          </a:stretch>
+        </p:blipFill>
+        <p:spPr>
+          <a:xfrm>
+            <a:off x="2423160" y="9203436"/>
+            <a:ext cx="475488" cy="411480"/>
+          </a:xfrm>
+          <a:prstGeom prst="rect">
+            <a:avLst/>
+          </a:prstGeom>
+        </p:spPr>
+      </p:pic>
+      <p:sp>
+        <p:nvSpPr>
+          <p:cNvPr id="12" name="Text 5"/>
           <p:cNvSpPr txBox="1"/>
           <p:nvPr/>
         </p:nvSpPr>
         <p:spPr>
           <a:xfrm>
-            <a:off x="2423160" y="7470648"/>
-            <a:ext cx="777240" cy="548640"/>
-          </a:xfrm>
-          <a:prstGeom prst="rect">
-            <a:avLst/>
-          </a:prstGeom>
-          <a:noFill/>
-          <a:ln/>
-        </p:spPr>
-        <p:txBody>
-          <a:bodyPr wrap="square" lIns="0" tIns="0" rIns="0" bIns="0" rtlCol="0" anchor="t"/>
-          <a:lstStyle/>
-          <a:p>
-            <a:pPr indent="0" marL="0">
-              <a:buNone/>
-            </a:pPr>
-            <a:r>
-              <a:rPr lang="en-US" sz="3000" b="1" dirty="0">
-                <a:solidFill>
-                  <a:srgbClr val="1F53E5"/>
-                </a:solidFill>
-                <a:latin typeface="Roboto" pitchFamily="34" charset="0"/>
-                <a:ea typeface="Roboto" pitchFamily="34" charset="-122"/>
-                <a:cs typeface="Roboto" pitchFamily="34" charset="-120"/>
-              </a:rPr>
-              <a:t>→</a:t>
-            </a:r>
-            <a:endParaRPr lang="en-US" sz="3000" dirty="0"/>
-          </a:p>
-        </p:txBody>
-      </p:sp>
-      <p:sp>
-        <p:nvSpPr>
-          <p:cNvPr id="11" name="Text 7"/>
-          <p:cNvSpPr txBox="1"/>
-          <p:nvPr/>
-        </p:nvSpPr>
-        <p:spPr>
-          <a:xfrm>
-            <a:off x="3337560" y="7452360"/>
-            <a:ext cx="17922240" cy="1097280"/>
-          </a:xfrm>
-          <a:prstGeom prst="rect">
-            <a:avLst/>
-          </a:prstGeom>
-          <a:noFill/>
-          <a:ln/>
-        </p:spPr>
-        <p:txBody>
-          <a:bodyPr wrap="square" lIns="0" tIns="0" rIns="0" bIns="0" rtlCol="0" anchor="t"/>
-          <a:lstStyle/>
-          <a:p>
-            <a:pPr indent="0" marL="0">
-              <a:lnSpc>
-                <a:spcPct val="118000"/>
-              </a:lnSpc>
-              <a:buNone/>
-            </a:pPr>
-            <a:r>
-              <a:rPr lang="en-US" sz="2800" b="1" dirty="0">
-                <a:solidFill>
-                  <a:srgbClr val="BDBFC7"/>
-                </a:solidFill>
-                <a:latin typeface="Roboto" pitchFamily="34" charset="0"/>
-                <a:ea typeface="Roboto" pitchFamily="34" charset="-122"/>
-                <a:cs typeface="Roboto" pitchFamily="34" charset="-120"/>
-              </a:rPr>
-              <a:t>O desenho que eu imaginei primeiro não funcionou: os números impressos não bastavam, o dado oficial só vem pelo link do QR code.</a:t>
-            </a:r>
-            <a:endParaRPr lang="en-US" sz="2800" dirty="0"/>
-          </a:p>
-        </p:txBody>
-      </p:sp>
-      <p:sp>
-        <p:nvSpPr>
-          <p:cNvPr id="12" name="Text 8"/>
-          <p:cNvSpPr txBox="1"/>
-          <p:nvPr/>
-        </p:nvSpPr>
-        <p:spPr>
-          <a:xfrm>
-            <a:off x="2423160" y="9070848"/>
-            <a:ext cx="777240" cy="548640"/>
-          </a:xfrm>
-          <a:prstGeom prst="rect">
-            <a:avLst/>
-          </a:prstGeom>
-          <a:noFill/>
-          <a:ln/>
-        </p:spPr>
-        <p:txBody>
-          <a:bodyPr wrap="square" lIns="0" tIns="0" rIns="0" bIns="0" rtlCol="0" anchor="t"/>
-          <a:lstStyle/>
-          <a:p>
-            <a:pPr indent="0" marL="0">
-              <a:buNone/>
-            </a:pPr>
-            <a:r>
-              <a:rPr lang="en-US" sz="3000" b="1" dirty="0">
-                <a:solidFill>
-                  <a:srgbClr val="1F53E5"/>
-                </a:solidFill>
-                <a:latin typeface="Roboto" pitchFamily="34" charset="0"/>
-                <a:ea typeface="Roboto" pitchFamily="34" charset="-122"/>
-                <a:cs typeface="Roboto" pitchFamily="34" charset="-120"/>
-              </a:rPr>
-              <a:t>→</a:t>
-            </a:r>
-            <a:endParaRPr lang="en-US" sz="3000" dirty="0"/>
-          </a:p>
-        </p:txBody>
-      </p:sp>
-      <p:sp>
-        <p:nvSpPr>
-          <p:cNvPr id="13" name="Text 9"/>
-          <p:cNvSpPr txBox="1"/>
-          <p:nvPr/>
-        </p:nvSpPr>
-        <p:spPr>
-          <a:xfrm>
-            <a:off x="3337560" y="9052560"/>
+            <a:off x="3337560" y="9075420"/>
             <a:ext cx="17922240" cy="548640"/>
           </a:xfrm>
           <a:prstGeom prst="rect">
@@ -4210,15 +4703,81 @@
                 <a:ea typeface="Roboto" pitchFamily="34" charset="-122"/>
                 <a:cs typeface="Roboto" pitchFamily="34" charset="-120"/>
               </a:rPr>
-              <a:t>Quem teve a ideia fui eu. Quem descobriu que ela não parava em pé fui eu, testando.</a:t>
+              <a:t>E resolve o outro caso junto: o aviso de erro nunca mais apaga a informação do erro.</a:t>
             </a:r>
             <a:endParaRPr lang="en-US" sz="2800" dirty="0"/>
           </a:p>
         </p:txBody>
       </p:sp>
-      <p:sp>
-        <p:nvSpPr>
-          <p:cNvPr id="14" name="Text 10"/>
+      <p:pic>
+        <p:nvPicPr>
+          <p:cNvPr id="13" name="Image 5" descr="art\seta.png">    </p:cNvPr>
+          <p:cNvPicPr>
+            <a:picLocks noChangeAspect="1"/>
+          </p:cNvPicPr>
+          <p:nvPr/>
+        </p:nvPicPr>
+        <p:blipFill>
+          <a:blip r:embed="rId6"/>
+          <a:stretch>
+            <a:fillRect/>
+          </a:stretch>
+        </p:blipFill>
+        <p:spPr>
+          <a:xfrm>
+            <a:off x="2423160" y="10757916"/>
+            <a:ext cx="475488" cy="411480"/>
+          </a:xfrm>
+          <a:prstGeom prst="rect">
+            <a:avLst/>
+          </a:prstGeom>
+        </p:spPr>
+      </p:pic>
+      <p:sp>
+        <p:nvSpPr>
+          <p:cNvPr id="14" name="Text 6"/>
+          <p:cNvSpPr txBox="1"/>
+          <p:nvPr/>
+        </p:nvSpPr>
+        <p:spPr>
+          <a:xfrm>
+            <a:off x="3337560" y="10629900"/>
+            <a:ext cx="17922240" cy="548640"/>
+          </a:xfrm>
+          <a:prstGeom prst="rect">
+            <a:avLst/>
+          </a:prstGeom>
+          <a:noFill/>
+          <a:ln/>
+        </p:spPr>
+        <p:txBody>
+          <a:bodyPr wrap="square" lIns="0" tIns="0" rIns="0" bIns="0" rtlCol="0" anchor="t"/>
+          <a:lstStyle/>
+          <a:p>
+            <a:pPr indent="0" marL="0">
+              <a:lnSpc>
+                <a:spcPct val="118000"/>
+              </a:lnSpc>
+              <a:buNone/>
+            </a:pPr>
+            <a:r>
+              <a:rPr lang="en-US" sz="2800" b="1" dirty="0">
+                <a:solidFill>
+                  <a:srgbClr val="F4F5F6"/>
+                </a:solidFill>
+                <a:latin typeface="Roboto" pitchFamily="34" charset="0"/>
+                <a:ea typeface="Roboto" pitchFamily="34" charset="-122"/>
+                <a:cs typeface="Roboto" pitchFamily="34" charset="-120"/>
+              </a:rPr>
+              <a:t>Admitir a limitação já é uma correção — o problema não era não saber ler, era não dizer.</a:t>
+            </a:r>
+            <a:endParaRPr lang="en-US" sz="2800" dirty="0"/>
+          </a:p>
+        </p:txBody>
+      </p:sp>
+      <p:sp>
+        <p:nvSpPr>
+          <p:cNvPr id="15" name="Text 7"/>
           <p:cNvSpPr txBox="1"/>
           <p:nvPr/>
         </p:nvSpPr>
@@ -4254,104 +4813,6 @@
               <a:t>Aula 4 — Detectar, diagnosticar e corrigir — Evals, observabilidade e conformidade</a:t>
             </a:r>
             <a:endParaRPr lang="en-US" sz="1500" dirty="0"/>
-          </a:p>
-        </p:txBody>
-      </p:sp>
-    </p:spTree>
-  </p:cSld>
-  <p:clrMapOvr>
-    <a:masterClrMapping/>
-  </p:clrMapOvr>
-</p:sld>
-</file>
-
-<file path=ppt/slides/slide14.xml><?xml version="1.0" encoding="utf-8"?>
-<p:sld xmlns:a="http://schemas.openxmlformats.org/drawingml/2006/main" xmlns:r="http://schemas.openxmlformats.org/officeDocument/2006/relationships" xmlns:p="http://schemas.openxmlformats.org/presentationml/2006/main">
-  <p:cSld name="Slide 14">
-    <p:bg>
-      <p:bgPr>
-        <a:solidFill>
-          <a:srgbClr val="052FD3"/>
-        </a:solidFill>
-      </p:bgPr>
-    </p:bg>
-    <p:spTree>
-      <p:nvGrpSpPr>
-        <p:cNvPr id="1" name=""/>
-        <p:cNvGrpSpPr/>
-        <p:nvPr/>
-      </p:nvGrpSpPr>
-      <p:grpSpPr>
-        <a:xfrm>
-          <a:off x="0" y="0"/>
-          <a:ext cx="0" cy="0"/>
-          <a:chOff x="0" y="0"/>
-          <a:chExt cx="0" cy="0"/>
-        </a:xfrm>
-      </p:grpSpPr>
-      <p:pic>
-        <p:nvPicPr>
-          <p:cNvPr id="2" name="Image 0" descr="C:\Users\PCSTUD~1\AppData\Local\Temp\claude\C--Users-PC-Studio-2-Desktop-6498-Evals\7ce78c02-4c99-40d4-bc57-5394098065c6\scratchpad\art\logo.png">    </p:cNvPr>
-          <p:cNvPicPr>
-            <a:picLocks noChangeAspect="1"/>
-          </p:cNvPicPr>
-          <p:nvPr/>
-        </p:nvPicPr>
-        <p:blipFill>
-          <a:blip r:embed="rId1"/>
-          <a:stretch>
-            <a:fillRect/>
-          </a:stretch>
-        </p:blipFill>
-        <p:spPr>
-          <a:xfrm>
-            <a:off x="23436072" y="402336"/>
-            <a:ext cx="475488" cy="594360"/>
-          </a:xfrm>
-          <a:prstGeom prst="rect">
-            <a:avLst/>
-          </a:prstGeom>
-        </p:spPr>
-      </p:pic>
-      <p:sp>
-        <p:nvSpPr>
-          <p:cNvPr id="3" name="Text 0"/>
-          <p:cNvSpPr txBox="1"/>
-          <p:nvPr/>
-        </p:nvSpPr>
-        <p:spPr>
-          <a:xfrm>
-            <a:off x="4416552" y="4023360"/>
-            <a:ext cx="15544800" cy="5669280"/>
-          </a:xfrm>
-          <a:prstGeom prst="rect">
-            <a:avLst/>
-          </a:prstGeom>
-          <a:noFill/>
-          <a:ln/>
-        </p:spPr>
-        <p:txBody>
-          <a:bodyPr wrap="square" lIns="0" tIns="0" rIns="0" bIns="0" rtlCol="0" anchor="ctr"/>
-          <a:lstStyle/>
-          <a:p>
-            <a:pPr algn="ctr" indent="0" marL="0">
-              <a:lnSpc>
-                <a:spcPct val="105000"/>
-              </a:lnSpc>
-              <a:buNone/>
-            </a:pPr>
-            <a:r>
-              <a:rPr lang="en-US" sz="9600" dirty="0">
-                <a:solidFill>
-                  <a:srgbClr val="FFFFFF"/>
-                </a:solidFill>
-                <a:latin typeface="Encode Sans" pitchFamily="34" charset="0"/>
-                <a:ea typeface="Encode Sans" pitchFamily="34" charset="-122"/>
-                <a:cs typeface="Encode Sans" pitchFamily="34" charset="-120"/>
-              </a:rPr>
-              <a:t>4.4 Simulando o ciclo completo</a:t>
-            </a:r>
-            <a:endParaRPr lang="en-US" sz="9600" dirty="0"/>
           </a:p>
         </p:txBody>
       </p:sp>
@@ -4389,7 +4850,7 @@
       </p:grpSpPr>
       <p:pic>
         <p:nvPicPr>
-          <p:cNvPr id="2" name="Image 0" descr="C:\Users\PCSTUD~1\AppData\Local\Temp\claude\C--Users-PC-Studio-2-Desktop-6498-Evals\7ce78c02-4c99-40d4-bc57-5394098065c6\scratchpad\art\malha.png">    </p:cNvPr>
+          <p:cNvPr id="2" name="Image 0" descr="art\malha.png">    </p:cNvPr>
           <p:cNvPicPr>
             <a:picLocks noChangeAspect="1"/>
           </p:cNvPicPr>
@@ -4413,7 +4874,7 @@
       </p:pic>
       <p:pic>
         <p:nvPicPr>
-          <p:cNvPr id="3" name="Image 1" descr="C:\Users\PCSTUD~1\AppData\Local\Temp\claude\C--Users-PC-Studio-2-Desktop-6498-Evals\7ce78c02-4c99-40d4-bc57-5394098065c6\scratchpad\art\logo.png">    </p:cNvPr>
+          <p:cNvPr id="3" name="Image 1" descr="art\logo.png">    </p:cNvPr>
           <p:cNvPicPr>
             <a:picLocks noChangeAspect="1"/>
           </p:cNvPicPr>
@@ -4443,7 +4904,7 @@
         </p:nvSpPr>
         <p:spPr>
           <a:xfrm>
-            <a:off x="2423160" y="2148840"/>
+            <a:off x="2423160" y="1051560"/>
             <a:ext cx="19540728" cy="594360"/>
           </a:xfrm>
           <a:prstGeom prst="rect">
@@ -4468,7 +4929,7 @@
                 <a:ea typeface="Encode Sans" pitchFamily="34" charset="-122"/>
                 <a:cs typeface="Encode Sans" pitchFamily="34" charset="-120"/>
               </a:rPr>
-              <a:t>VÍDEO 4.4</a:t>
+              <a:t>VÍDEO 4.3 — A CAPACIDADE NOVA</a:t>
             </a:r>
             <a:endParaRPr lang="en-US" sz="2100" dirty="0"/>
           </a:p>
@@ -4482,8 +4943,8 @@
         </p:nvSpPr>
         <p:spPr>
           <a:xfrm>
-            <a:off x="2423160" y="2880360"/>
-            <a:ext cx="18745200" cy="2377440"/>
+            <a:off x="2423160" y="1783080"/>
+            <a:ext cx="19568160" cy="2377440"/>
           </a:xfrm>
           <a:prstGeom prst="rect">
             <a:avLst/>
@@ -4510,7 +4971,7 @@
                 <a:ea typeface="Encode Sans" pitchFamily="34" charset="-122"/>
                 <a:cs typeface="Encode Sans" pitchFamily="34" charset="-120"/>
               </a:rPr>
-              <a:t>O que essa correção criou</a:t>
+              <a:t>Agora sim: ensinar a ler a nota</a:t>
             </a:r>
             <a:endParaRPr lang="en-US" sz="6600" dirty="0"/>
           </a:p>
@@ -4518,52 +4979,57 @@
       </p:sp>
       <p:sp>
         <p:nvSpPr>
-          <p:cNvPr id="6" name="Text 2"/>
+          <p:cNvPr id="6" name="Shape 2"/>
+          <p:cNvSpPr/>
+          <p:nvPr/>
+        </p:nvSpPr>
+        <p:spPr>
+          <a:xfrm>
+            <a:off x="2423160" y="4526280"/>
+            <a:ext cx="2011680" cy="68580"/>
+          </a:xfrm>
+          <a:prstGeom prst="rect">
+            <a:avLst/>
+          </a:prstGeom>
+          <a:solidFill>
+            <a:srgbClr val="1F53E5"/>
+          </a:solidFill>
+          <a:ln/>
+        </p:spPr>
+      </p:sp>
+      <p:pic>
+        <p:nvPicPr>
+          <p:cNvPr id="7" name="Image 2" descr="art\seta.png">    </p:cNvPr>
+          <p:cNvPicPr>
+            <a:picLocks noChangeAspect="1"/>
+          </p:cNvPicPr>
+          <p:nvPr/>
+        </p:nvPicPr>
+        <p:blipFill>
+          <a:blip r:embed="rId3"/>
+          <a:stretch>
+            <a:fillRect/>
+          </a:stretch>
+        </p:blipFill>
+        <p:spPr>
+          <a:xfrm>
+            <a:off x="2423160" y="6094476"/>
+            <a:ext cx="475488" cy="411480"/>
+          </a:xfrm>
+          <a:prstGeom prst="rect">
+            <a:avLst/>
+          </a:prstGeom>
+        </p:spPr>
+      </p:pic>
+      <p:sp>
+        <p:nvSpPr>
+          <p:cNvPr id="8" name="Text 3"/>
           <p:cNvSpPr txBox="1"/>
           <p:nvPr/>
         </p:nvSpPr>
         <p:spPr>
           <a:xfrm>
-            <a:off x="2423160" y="5367528"/>
-            <a:ext cx="777240" cy="548640"/>
-          </a:xfrm>
-          <a:prstGeom prst="rect">
-            <a:avLst/>
-          </a:prstGeom>
-          <a:noFill/>
-          <a:ln/>
-        </p:spPr>
-        <p:txBody>
-          <a:bodyPr wrap="square" lIns="0" tIns="0" rIns="0" bIns="0" rtlCol="0" anchor="t"/>
-          <a:lstStyle/>
-          <a:p>
-            <a:pPr indent="0" marL="0">
-              <a:buNone/>
-            </a:pPr>
-            <a:r>
-              <a:rPr lang="en-US" sz="3000" b="1" dirty="0">
-                <a:solidFill>
-                  <a:srgbClr val="1F53E5"/>
-                </a:solidFill>
-                <a:latin typeface="Roboto" pitchFamily="34" charset="0"/>
-                <a:ea typeface="Roboto" pitchFamily="34" charset="-122"/>
-                <a:cs typeface="Roboto" pitchFamily="34" charset="-120"/>
-              </a:rPr>
-              <a:t>→</a:t>
-            </a:r>
-            <a:endParaRPr lang="en-US" sz="3000" dirty="0"/>
-          </a:p>
-        </p:txBody>
-      </p:sp>
-      <p:sp>
-        <p:nvSpPr>
-          <p:cNvPr id="7" name="Text 3"/>
-          <p:cNvSpPr txBox="1"/>
-          <p:nvPr/>
-        </p:nvSpPr>
-        <p:spPr>
-          <a:xfrm>
-            <a:off x="3337560" y="5349240"/>
+            <a:off x="3337560" y="5966460"/>
             <a:ext cx="17922240" cy="548640"/>
           </a:xfrm>
           <a:prstGeom prst="rect">
@@ -4591,60 +5057,45 @@
                 <a:ea typeface="Roboto" pitchFamily="34" charset="-122"/>
                 <a:cs typeface="Roboto" pitchFamily="34" charset="-120"/>
               </a:rPr>
-              <a:t>Toda capacidade nova traz erro novo: com foto entrando, cresce a chance de item errado no estoque.</a:t>
+              <a:t>Só depois de o produto saber dizer “não sei” é que faz sentido ensinar ele a saber.</a:t>
             </a:r>
             <a:endParaRPr lang="en-US" sz="2800" dirty="0"/>
           </a:p>
         </p:txBody>
       </p:sp>
-      <p:sp>
-        <p:nvSpPr>
-          <p:cNvPr id="8" name="Text 4"/>
+      <p:pic>
+        <p:nvPicPr>
+          <p:cNvPr id="9" name="Image 3" descr="art\seta.png">    </p:cNvPr>
+          <p:cNvPicPr>
+            <a:picLocks noChangeAspect="1"/>
+          </p:cNvPicPr>
+          <p:nvPr/>
+        </p:nvPicPr>
+        <p:blipFill>
+          <a:blip r:embed="rId4"/>
+          <a:stretch>
+            <a:fillRect/>
+          </a:stretch>
+        </p:blipFill>
+        <p:spPr>
+          <a:xfrm>
+            <a:off x="2423160" y="7648956"/>
+            <a:ext cx="475488" cy="411480"/>
+          </a:xfrm>
+          <a:prstGeom prst="rect">
+            <a:avLst/>
+          </a:prstGeom>
+        </p:spPr>
+      </p:pic>
+      <p:sp>
+        <p:nvSpPr>
+          <p:cNvPr id="10" name="Text 4"/>
           <p:cNvSpPr txBox="1"/>
           <p:nvPr/>
         </p:nvSpPr>
         <p:spPr>
           <a:xfrm>
-            <a:off x="2423160" y="6419088"/>
-            <a:ext cx="777240" cy="548640"/>
-          </a:xfrm>
-          <a:prstGeom prst="rect">
-            <a:avLst/>
-          </a:prstGeom>
-          <a:noFill/>
-          <a:ln/>
-        </p:spPr>
-        <p:txBody>
-          <a:bodyPr wrap="square" lIns="0" tIns="0" rIns="0" bIns="0" rtlCol="0" anchor="t"/>
-          <a:lstStyle/>
-          <a:p>
-            <a:pPr indent="0" marL="0">
-              <a:buNone/>
-            </a:pPr>
-            <a:r>
-              <a:rPr lang="en-US" sz="3000" b="1" dirty="0">
-                <a:solidFill>
-                  <a:srgbClr val="1F53E5"/>
-                </a:solidFill>
-                <a:latin typeface="Roboto" pitchFamily="34" charset="0"/>
-                <a:ea typeface="Roboto" pitchFamily="34" charset="-122"/>
-                <a:cs typeface="Roboto" pitchFamily="34" charset="-120"/>
-              </a:rPr>
-              <a:t>→</a:t>
-            </a:r>
-            <a:endParaRPr lang="en-US" sz="3000" dirty="0"/>
-          </a:p>
-        </p:txBody>
-      </p:sp>
-      <p:sp>
-        <p:nvSpPr>
-          <p:cNvPr id="9" name="Text 5"/>
-          <p:cNvSpPr txBox="1"/>
-          <p:nvPr/>
-        </p:nvSpPr>
-        <p:spPr>
-          <a:xfrm>
-            <a:off x="3337560" y="6400800"/>
+            <a:off x="3337560" y="7520940"/>
             <a:ext cx="17922240" cy="548640"/>
           </a:xfrm>
           <a:prstGeom prst="rect">
@@ -4672,22 +5123,46 @@
                 <a:ea typeface="Roboto" pitchFamily="34" charset="-122"/>
                 <a:cs typeface="Roboto" pitchFamily="34" charset="-120"/>
               </a:rPr>
-              <a:t>A tela de conferir antes de salvar deixou de ser luxo — virou a próxima coisa a construir.</a:t>
+              <a:t>A foto entra e os itens caem no estoque com o dado oficial da nota — não com chute de modelo.</a:t>
             </a:r>
             <a:endParaRPr lang="en-US" sz="2800" dirty="0"/>
           </a:p>
         </p:txBody>
       </p:sp>
-      <p:sp>
-        <p:nvSpPr>
-          <p:cNvPr id="10" name="Text 6"/>
+      <p:pic>
+        <p:nvPicPr>
+          <p:cNvPr id="11" name="Image 4" descr="art\seta.png">    </p:cNvPr>
+          <p:cNvPicPr>
+            <a:picLocks noChangeAspect="1"/>
+          </p:cNvPicPr>
+          <p:nvPr/>
+        </p:nvPicPr>
+        <p:blipFill>
+          <a:blip r:embed="rId5"/>
+          <a:stretch>
+            <a:fillRect/>
+          </a:stretch>
+        </p:blipFill>
+        <p:spPr>
+          <a:xfrm>
+            <a:off x="2423160" y="9203436"/>
+            <a:ext cx="475488" cy="411480"/>
+          </a:xfrm>
+          <a:prstGeom prst="rect">
+            <a:avLst/>
+          </a:prstGeom>
+        </p:spPr>
+      </p:pic>
+      <p:sp>
+        <p:nvSpPr>
+          <p:cNvPr id="12" name="Text 5"/>
           <p:cNvSpPr txBox="1"/>
           <p:nvPr/>
         </p:nvSpPr>
         <p:spPr>
           <a:xfrm>
-            <a:off x="2423160" y="7470648"/>
-            <a:ext cx="777240" cy="548640"/>
+            <a:off x="3337560" y="9075420"/>
+            <a:ext cx="17922240" cy="548640"/>
           </a:xfrm>
           <a:prstGeom prst="rect">
             <a:avLst/>
@@ -4700,32 +5175,59 @@
           <a:lstStyle/>
           <a:p>
             <a:pPr indent="0" marL="0">
+              <a:lnSpc>
+                <a:spcPct val="118000"/>
+              </a:lnSpc>
               <a:buNone/>
             </a:pPr>
             <a:r>
-              <a:rPr lang="en-US" sz="3000" b="1" dirty="0">
+              <a:rPr lang="en-US" sz="2800" b="1" dirty="0">
                 <a:solidFill>
-                  <a:srgbClr val="1F53E5"/>
+                  <a:srgbClr val="F4F5F6"/>
                 </a:solidFill>
                 <a:latin typeface="Roboto" pitchFamily="34" charset="0"/>
                 <a:ea typeface="Roboto" pitchFamily="34" charset="-122"/>
                 <a:cs typeface="Roboto" pitchFamily="34" charset="-120"/>
               </a:rPr>
-              <a:t>→</a:t>
-            </a:r>
-            <a:endParaRPr lang="en-US" sz="3000" dirty="0"/>
-          </a:p>
-        </p:txBody>
-      </p:sp>
-      <p:sp>
-        <p:nvSpPr>
-          <p:cNvPr id="11" name="Text 7"/>
+              <a:t>O desenho que eu imaginei primeiro não funcionou: os números impressos não bastavam, o dado oficial só vem pelo link do QR code.</a:t>
+            </a:r>
+            <a:endParaRPr lang="en-US" sz="2800" dirty="0"/>
+          </a:p>
+        </p:txBody>
+      </p:sp>
+      <p:pic>
+        <p:nvPicPr>
+          <p:cNvPr id="13" name="Image 5" descr="art\seta.png">    </p:cNvPr>
+          <p:cNvPicPr>
+            <a:picLocks noChangeAspect="1"/>
+          </p:cNvPicPr>
+          <p:nvPr/>
+        </p:nvPicPr>
+        <p:blipFill>
+          <a:blip r:embed="rId6"/>
+          <a:stretch>
+            <a:fillRect/>
+          </a:stretch>
+        </p:blipFill>
+        <p:spPr>
+          <a:xfrm>
+            <a:off x="2423160" y="10757916"/>
+            <a:ext cx="475488" cy="411480"/>
+          </a:xfrm>
+          <a:prstGeom prst="rect">
+            <a:avLst/>
+          </a:prstGeom>
+        </p:spPr>
+      </p:pic>
+      <p:sp>
+        <p:nvSpPr>
+          <p:cNvPr id="14" name="Text 6"/>
           <p:cNvSpPr txBox="1"/>
           <p:nvPr/>
         </p:nvSpPr>
         <p:spPr>
           <a:xfrm>
-            <a:off x="3337560" y="7452360"/>
+            <a:off x="3337560" y="10629900"/>
             <a:ext cx="17922240" cy="548640"/>
           </a:xfrm>
           <a:prstGeom prst="rect">
@@ -4753,7 +5255,7 @@
                 <a:ea typeface="Roboto" pitchFamily="34" charset="-122"/>
                 <a:cs typeface="Roboto" pitchFamily="34" charset="-120"/>
               </a:rPr>
-              <a:t>E tem o que eu escolhi NÃO corrigir: o caso da lasanha continua quebrado neste momento, de propósito.</a:t>
+              <a:t>Quem teve a ideia fui eu. Quem descobriu que ela não parava em pé fui eu, testando.</a:t>
             </a:r>
             <a:endParaRPr lang="en-US" sz="2800" dirty="0"/>
           </a:p>
@@ -4761,88 +5263,7 @@
       </p:sp>
       <p:sp>
         <p:nvSpPr>
-          <p:cNvPr id="12" name="Text 8"/>
-          <p:cNvSpPr txBox="1"/>
-          <p:nvPr/>
-        </p:nvSpPr>
-        <p:spPr>
-          <a:xfrm>
-            <a:off x="2423160" y="8522208"/>
-            <a:ext cx="777240" cy="548640"/>
-          </a:xfrm>
-          <a:prstGeom prst="rect">
-            <a:avLst/>
-          </a:prstGeom>
-          <a:noFill/>
-          <a:ln/>
-        </p:spPr>
-        <p:txBody>
-          <a:bodyPr wrap="square" lIns="0" tIns="0" rIns="0" bIns="0" rtlCol="0" anchor="t"/>
-          <a:lstStyle/>
-          <a:p>
-            <a:pPr indent="0" marL="0">
-              <a:buNone/>
-            </a:pPr>
-            <a:r>
-              <a:rPr lang="en-US" sz="3000" b="1" dirty="0">
-                <a:solidFill>
-                  <a:srgbClr val="1F53E5"/>
-                </a:solidFill>
-                <a:latin typeface="Roboto" pitchFamily="34" charset="0"/>
-                <a:ea typeface="Roboto" pitchFamily="34" charset="-122"/>
-                <a:cs typeface="Roboto" pitchFamily="34" charset="-120"/>
-              </a:rPr>
-              <a:t>→</a:t>
-            </a:r>
-            <a:endParaRPr lang="en-US" sz="3000" dirty="0"/>
-          </a:p>
-        </p:txBody>
-      </p:sp>
-      <p:sp>
-        <p:nvSpPr>
-          <p:cNvPr id="13" name="Text 9"/>
-          <p:cNvSpPr txBox="1"/>
-          <p:nvPr/>
-        </p:nvSpPr>
-        <p:spPr>
-          <a:xfrm>
-            <a:off x="3337560" y="8503920"/>
-            <a:ext cx="17922240" cy="548640"/>
-          </a:xfrm>
-          <a:prstGeom prst="rect">
-            <a:avLst/>
-          </a:prstGeom>
-          <a:noFill/>
-          <a:ln/>
-        </p:spPr>
-        <p:txBody>
-          <a:bodyPr wrap="square" lIns="0" tIns="0" rIns="0" bIns="0" rtlCol="0" anchor="t"/>
-          <a:lstStyle/>
-          <a:p>
-            <a:pPr indent="0" marL="0">
-              <a:lnSpc>
-                <a:spcPct val="118000"/>
-              </a:lnSpc>
-              <a:buNone/>
-            </a:pPr>
-            <a:r>
-              <a:rPr lang="en-US" sz="2800" b="1" dirty="0">
-                <a:solidFill>
-                  <a:srgbClr val="BDBFC7"/>
-                </a:solidFill>
-                <a:latin typeface="Roboto" pitchFamily="34" charset="0"/>
-                <a:ea typeface="Roboto" pitchFamily="34" charset="-122"/>
-                <a:cs typeface="Roboto" pitchFamily="34" charset="-120"/>
-              </a:rPr>
-              <a:t>Risco que eu conheço e registro é diferente de risco escondido — e é onde a próxima aula começa.</a:t>
-            </a:r>
-            <a:endParaRPr lang="en-US" sz="2800" dirty="0"/>
-          </a:p>
-        </p:txBody>
-      </p:sp>
-      <p:sp>
-        <p:nvSpPr>
-          <p:cNvPr id="14" name="Text 10"/>
+          <p:cNvPr id="15" name="Text 7"/>
           <p:cNvSpPr txBox="1"/>
           <p:nvPr/>
         </p:nvSpPr>
@@ -4915,7 +5336,7 @@
       </p:grpSpPr>
       <p:pic>
         <p:nvPicPr>
-          <p:cNvPr id="2" name="Image 0" descr="C:\Users\PCSTUD~1\AppData\Local\Temp\claude\C--Users-PC-Studio-2-Desktop-6498-Evals\7ce78c02-4c99-40d4-bc57-5394098065c6\scratchpad\art\logo.png">    </p:cNvPr>
+          <p:cNvPr id="2" name="Image 0" descr="art\logo.png">    </p:cNvPr>
           <p:cNvPicPr>
             <a:picLocks noChangeAspect="1"/>
           </p:cNvPicPr>
@@ -4973,7 +5394,7 @@
                 <a:ea typeface="Encode Sans" pitchFamily="34" charset="-122"/>
                 <a:cs typeface="Encode Sans" pitchFamily="34" charset="-120"/>
               </a:rPr>
-              <a:t>4.5 O que aprendemos?</a:t>
+              <a:t>4.4 Simulando o ciclo completo</a:t>
             </a:r>
             <a:endParaRPr lang="en-US" sz="9600" dirty="0"/>
           </a:p>
@@ -5013,7 +5434,7 @@
       </p:grpSpPr>
       <p:pic>
         <p:nvPicPr>
-          <p:cNvPr id="2" name="Image 0" descr="C:\Users\PCSTUD~1\AppData\Local\Temp\claude\C--Users-PC-Studio-2-Desktop-6498-Evals\7ce78c02-4c99-40d4-bc57-5394098065c6\scratchpad\art\malha.png">    </p:cNvPr>
+          <p:cNvPr id="2" name="Image 0" descr="art\malha.png">    </p:cNvPr>
           <p:cNvPicPr>
             <a:picLocks noChangeAspect="1"/>
           </p:cNvPicPr>
@@ -5037,7 +5458,7 @@
       </p:pic>
       <p:pic>
         <p:nvPicPr>
-          <p:cNvPr id="3" name="Image 1" descr="C:\Users\PCSTUD~1\AppData\Local\Temp\claude\C--Users-PC-Studio-2-Desktop-6498-Evals\7ce78c02-4c99-40d4-bc57-5394098065c6\scratchpad\art\logo.png">    </p:cNvPr>
+          <p:cNvPr id="3" name="Image 1" descr="art\logo.png">    </p:cNvPr>
           <p:cNvPicPr>
             <a:picLocks noChangeAspect="1"/>
           </p:cNvPicPr>
@@ -5067,7 +5488,7 @@
         </p:nvSpPr>
         <p:spPr>
           <a:xfrm>
-            <a:off x="2423160" y="2148840"/>
+            <a:off x="2423160" y="1051560"/>
             <a:ext cx="19540728" cy="594360"/>
           </a:xfrm>
           <a:prstGeom prst="rect">
@@ -5092,7 +5513,7 @@
                 <a:ea typeface="Encode Sans" pitchFamily="34" charset="-122"/>
                 <a:cs typeface="Encode Sans" pitchFamily="34" charset="-120"/>
               </a:rPr>
-              <a:t>FECHAMENTO DA AULA</a:t>
+              <a:t>VÍDEO 4.4</a:t>
             </a:r>
             <a:endParaRPr lang="en-US" sz="2100" dirty="0"/>
           </a:p>
@@ -5106,8 +5527,8 @@
         </p:nvSpPr>
         <p:spPr>
           <a:xfrm>
-            <a:off x="2423160" y="2880360"/>
-            <a:ext cx="18745200" cy="2377440"/>
+            <a:off x="2423160" y="1783080"/>
+            <a:ext cx="19568160" cy="2377440"/>
           </a:xfrm>
           <a:prstGeom prst="rect">
             <a:avLst/>
@@ -5134,7 +5555,7 @@
                 <a:ea typeface="Encode Sans" pitchFamily="34" charset="-122"/>
                 <a:cs typeface="Encode Sans" pitchFamily="34" charset="-120"/>
               </a:rPr>
-              <a:t>O que aprendemos</a:t>
+              <a:t>O que essa correção criou</a:t>
             </a:r>
             <a:endParaRPr lang="en-US" sz="6600" dirty="0"/>
           </a:p>
@@ -5142,52 +5563,57 @@
       </p:sp>
       <p:sp>
         <p:nvSpPr>
-          <p:cNvPr id="6" name="Text 2"/>
+          <p:cNvPr id="6" name="Shape 2"/>
+          <p:cNvSpPr/>
+          <p:nvPr/>
+        </p:nvSpPr>
+        <p:spPr>
+          <a:xfrm>
+            <a:off x="2423160" y="4526280"/>
+            <a:ext cx="2011680" cy="68580"/>
+          </a:xfrm>
+          <a:prstGeom prst="rect">
+            <a:avLst/>
+          </a:prstGeom>
+          <a:solidFill>
+            <a:srgbClr val="1F53E5"/>
+          </a:solidFill>
+          <a:ln/>
+        </p:spPr>
+      </p:sp>
+      <p:pic>
+        <p:nvPicPr>
+          <p:cNvPr id="7" name="Image 2" descr="art\seta.png">    </p:cNvPr>
+          <p:cNvPicPr>
+            <a:picLocks noChangeAspect="1"/>
+          </p:cNvPicPr>
+          <p:nvPr/>
+        </p:nvPicPr>
+        <p:blipFill>
+          <a:blip r:embed="rId3"/>
+          <a:stretch>
+            <a:fillRect/>
+          </a:stretch>
+        </p:blipFill>
+        <p:spPr>
+          <a:xfrm>
+            <a:off x="2423160" y="6094476"/>
+            <a:ext cx="475488" cy="411480"/>
+          </a:xfrm>
+          <a:prstGeom prst="rect">
+            <a:avLst/>
+          </a:prstGeom>
+        </p:spPr>
+      </p:pic>
+      <p:sp>
+        <p:nvSpPr>
+          <p:cNvPr id="8" name="Text 3"/>
           <p:cNvSpPr txBox="1"/>
           <p:nvPr/>
         </p:nvSpPr>
         <p:spPr>
           <a:xfrm>
-            <a:off x="2423160" y="5367528"/>
-            <a:ext cx="777240" cy="548640"/>
-          </a:xfrm>
-          <a:prstGeom prst="rect">
-            <a:avLst/>
-          </a:prstGeom>
-          <a:noFill/>
-          <a:ln/>
-        </p:spPr>
-        <p:txBody>
-          <a:bodyPr wrap="square" lIns="0" tIns="0" rIns="0" bIns="0" rtlCol="0" anchor="t"/>
-          <a:lstStyle/>
-          <a:p>
-            <a:pPr indent="0" marL="0">
-              <a:buNone/>
-            </a:pPr>
-            <a:r>
-              <a:rPr lang="en-US" sz="3000" b="1" dirty="0">
-                <a:solidFill>
-                  <a:srgbClr val="1F53E5"/>
-                </a:solidFill>
-                <a:latin typeface="Roboto" pitchFamily="34" charset="0"/>
-                <a:ea typeface="Roboto" pitchFamily="34" charset="-122"/>
-                <a:cs typeface="Roboto" pitchFamily="34" charset="-120"/>
-              </a:rPr>
-              <a:t>→</a:t>
-            </a:r>
-            <a:endParaRPr lang="en-US" sz="3000" dirty="0"/>
-          </a:p>
-        </p:txBody>
-      </p:sp>
-      <p:sp>
-        <p:nvSpPr>
-          <p:cNvPr id="7" name="Text 3"/>
-          <p:cNvSpPr txBox="1"/>
-          <p:nvPr/>
-        </p:nvSpPr>
-        <p:spPr>
-          <a:xfrm>
-            <a:off x="3337560" y="5349240"/>
+            <a:off x="3337560" y="5966460"/>
             <a:ext cx="17922240" cy="548640"/>
           </a:xfrm>
           <a:prstGeom prst="rect">
@@ -5215,60 +5641,45 @@
                 <a:ea typeface="Roboto" pitchFamily="34" charset="-122"/>
                 <a:cs typeface="Roboto" pitchFamily="34" charset="-120"/>
               </a:rPr>
-              <a:t>Nenhuma das três falhas gritou. Todas apareceram porque eu fui olhar.</a:t>
+              <a:t>Toda capacidade nova traz erro novo: com foto entrando, cresce a chance de item errado no estoque.</a:t>
             </a:r>
             <a:endParaRPr lang="en-US" sz="2800" dirty="0"/>
           </a:p>
         </p:txBody>
       </p:sp>
-      <p:sp>
-        <p:nvSpPr>
-          <p:cNvPr id="8" name="Text 4"/>
+      <p:pic>
+        <p:nvPicPr>
+          <p:cNvPr id="9" name="Image 3" descr="art\seta.png">    </p:cNvPr>
+          <p:cNvPicPr>
+            <a:picLocks noChangeAspect="1"/>
+          </p:cNvPicPr>
+          <p:nvPr/>
+        </p:nvPicPr>
+        <p:blipFill>
+          <a:blip r:embed="rId4"/>
+          <a:stretch>
+            <a:fillRect/>
+          </a:stretch>
+        </p:blipFill>
+        <p:spPr>
+          <a:xfrm>
+            <a:off x="2423160" y="7648956"/>
+            <a:ext cx="475488" cy="411480"/>
+          </a:xfrm>
+          <a:prstGeom prst="rect">
+            <a:avLst/>
+          </a:prstGeom>
+        </p:spPr>
+      </p:pic>
+      <p:sp>
+        <p:nvSpPr>
+          <p:cNvPr id="10" name="Text 4"/>
           <p:cNvSpPr txBox="1"/>
           <p:nvPr/>
         </p:nvSpPr>
         <p:spPr>
           <a:xfrm>
-            <a:off x="2423160" y="6419088"/>
-            <a:ext cx="777240" cy="548640"/>
-          </a:xfrm>
-          <a:prstGeom prst="rect">
-            <a:avLst/>
-          </a:prstGeom>
-          <a:noFill/>
-          <a:ln/>
-        </p:spPr>
-        <p:txBody>
-          <a:bodyPr wrap="square" lIns="0" tIns="0" rIns="0" bIns="0" rtlCol="0" anchor="t"/>
-          <a:lstStyle/>
-          <a:p>
-            <a:pPr indent="0" marL="0">
-              <a:buNone/>
-            </a:pPr>
-            <a:r>
-              <a:rPr lang="en-US" sz="3000" b="1" dirty="0">
-                <a:solidFill>
-                  <a:srgbClr val="1F53E5"/>
-                </a:solidFill>
-                <a:latin typeface="Roboto" pitchFamily="34" charset="0"/>
-                <a:ea typeface="Roboto" pitchFamily="34" charset="-122"/>
-                <a:cs typeface="Roboto" pitchFamily="34" charset="-120"/>
-              </a:rPr>
-              <a:t>→</a:t>
-            </a:r>
-            <a:endParaRPr lang="en-US" sz="3000" dirty="0"/>
-          </a:p>
-        </p:txBody>
-      </p:sp>
-      <p:sp>
-        <p:nvSpPr>
-          <p:cNvPr id="9" name="Text 5"/>
-          <p:cNvSpPr txBox="1"/>
-          <p:nvPr/>
-        </p:nvSpPr>
-        <p:spPr>
-          <a:xfrm>
-            <a:off x="3337560" y="6400800"/>
+            <a:off x="3337560" y="7520940"/>
             <a:ext cx="17922240" cy="548640"/>
           </a:xfrm>
           <a:prstGeom prst="rect">
@@ -5296,141 +5707,45 @@
                 <a:ea typeface="Roboto" pitchFamily="34" charset="-122"/>
                 <a:cs typeface="Roboto" pitchFamily="34" charset="-120"/>
               </a:rPr>
-              <a:t>Eu não li código para diagnosticar: observei, juntei evidência e perguntei.</a:t>
+              <a:t>A tela de conferir antes de salvar deixou de ser luxo — virou a próxima coisa a construir.</a:t>
             </a:r>
             <a:endParaRPr lang="en-US" sz="2800" dirty="0"/>
           </a:p>
         </p:txBody>
       </p:sp>
-      <p:sp>
-        <p:nvSpPr>
-          <p:cNvPr id="10" name="Text 6"/>
+      <p:pic>
+        <p:nvPicPr>
+          <p:cNvPr id="11" name="Image 4" descr="art\seta.png">    </p:cNvPr>
+          <p:cNvPicPr>
+            <a:picLocks noChangeAspect="1"/>
+          </p:cNvPicPr>
+          <p:nvPr/>
+        </p:nvPicPr>
+        <p:blipFill>
+          <a:blip r:embed="rId5"/>
+          <a:stretch>
+            <a:fillRect/>
+          </a:stretch>
+        </p:blipFill>
+        <p:spPr>
+          <a:xfrm>
+            <a:off x="2423160" y="9203436"/>
+            <a:ext cx="475488" cy="411480"/>
+          </a:xfrm>
+          <a:prstGeom prst="rect">
+            <a:avLst/>
+          </a:prstGeom>
+        </p:spPr>
+      </p:pic>
+      <p:sp>
+        <p:nvSpPr>
+          <p:cNvPr id="12" name="Text 5"/>
           <p:cNvSpPr txBox="1"/>
           <p:nvPr/>
         </p:nvSpPr>
         <p:spPr>
           <a:xfrm>
-            <a:off x="2423160" y="7470648"/>
-            <a:ext cx="777240" cy="548640"/>
-          </a:xfrm>
-          <a:prstGeom prst="rect">
-            <a:avLst/>
-          </a:prstGeom>
-          <a:noFill/>
-          <a:ln/>
-        </p:spPr>
-        <p:txBody>
-          <a:bodyPr wrap="square" lIns="0" tIns="0" rIns="0" bIns="0" rtlCol="0" anchor="t"/>
-          <a:lstStyle/>
-          <a:p>
-            <a:pPr indent="0" marL="0">
-              <a:buNone/>
-            </a:pPr>
-            <a:r>
-              <a:rPr lang="en-US" sz="3000" b="1" dirty="0">
-                <a:solidFill>
-                  <a:srgbClr val="1F53E5"/>
-                </a:solidFill>
-                <a:latin typeface="Roboto" pitchFamily="34" charset="0"/>
-                <a:ea typeface="Roboto" pitchFamily="34" charset="-122"/>
-                <a:cs typeface="Roboto" pitchFamily="34" charset="-120"/>
-              </a:rPr>
-              <a:t>→</a:t>
-            </a:r>
-            <a:endParaRPr lang="en-US" sz="3000" dirty="0"/>
-          </a:p>
-        </p:txBody>
-      </p:sp>
-      <p:sp>
-        <p:nvSpPr>
-          <p:cNvPr id="11" name="Text 7"/>
-          <p:cNvSpPr txBox="1"/>
-          <p:nvPr/>
-        </p:nvSpPr>
-        <p:spPr>
-          <a:xfrm>
-            <a:off x="3337560" y="7452360"/>
-            <a:ext cx="17922240" cy="1097280"/>
-          </a:xfrm>
-          <a:prstGeom prst="rect">
-            <a:avLst/>
-          </a:prstGeom>
-          <a:noFill/>
-          <a:ln/>
-        </p:spPr>
-        <p:txBody>
-          <a:bodyPr wrap="square" lIns="0" tIns="0" rIns="0" bIns="0" rtlCol="0" anchor="t"/>
-          <a:lstStyle/>
-          <a:p>
-            <a:pPr indent="0" marL="0">
-              <a:lnSpc>
-                <a:spcPct val="118000"/>
-              </a:lnSpc>
-              <a:buNone/>
-            </a:pPr>
-            <a:r>
-              <a:rPr lang="en-US" sz="2800" b="1" dirty="0">
-                <a:solidFill>
-                  <a:srgbClr val="BDBFC7"/>
-                </a:solidFill>
-                <a:latin typeface="Roboto" pitchFamily="34" charset="0"/>
-                <a:ea typeface="Roboto" pitchFamily="34" charset="-122"/>
-                <a:cs typeface="Roboto" pitchFamily="34" charset="-120"/>
-              </a:rPr>
-              <a:t>A inteligência acertou nos três casos. Quem falhou foi o produto em volta dela — e cuidar disso é trabalho de quem constrói o produto.</a:t>
-            </a:r>
-            <a:endParaRPr lang="en-US" sz="2800" dirty="0"/>
-          </a:p>
-        </p:txBody>
-      </p:sp>
-      <p:sp>
-        <p:nvSpPr>
-          <p:cNvPr id="12" name="Text 8"/>
-          <p:cNvSpPr txBox="1"/>
-          <p:nvPr/>
-        </p:nvSpPr>
-        <p:spPr>
-          <a:xfrm>
-            <a:off x="2423160" y="9070848"/>
-            <a:ext cx="777240" cy="548640"/>
-          </a:xfrm>
-          <a:prstGeom prst="rect">
-            <a:avLst/>
-          </a:prstGeom>
-          <a:noFill/>
-          <a:ln/>
-        </p:spPr>
-        <p:txBody>
-          <a:bodyPr wrap="square" lIns="0" tIns="0" rIns="0" bIns="0" rtlCol="0" anchor="t"/>
-          <a:lstStyle/>
-          <a:p>
-            <a:pPr indent="0" marL="0">
-              <a:buNone/>
-            </a:pPr>
-            <a:r>
-              <a:rPr lang="en-US" sz="3000" b="1" dirty="0">
-                <a:solidFill>
-                  <a:srgbClr val="1F53E5"/>
-                </a:solidFill>
-                <a:latin typeface="Roboto" pitchFamily="34" charset="0"/>
-                <a:ea typeface="Roboto" pitchFamily="34" charset="-122"/>
-                <a:cs typeface="Roboto" pitchFamily="34" charset="-120"/>
-              </a:rPr>
-              <a:t>→</a:t>
-            </a:r>
-            <a:endParaRPr lang="en-US" sz="3000" dirty="0"/>
-          </a:p>
-        </p:txBody>
-      </p:sp>
-      <p:sp>
-        <p:nvSpPr>
-          <p:cNvPr id="13" name="Text 9"/>
-          <p:cNvSpPr txBox="1"/>
-          <p:nvPr/>
-        </p:nvSpPr>
-        <p:spPr>
-          <a:xfrm>
-            <a:off x="3337560" y="9052560"/>
+            <a:off x="3337560" y="9075420"/>
             <a:ext cx="17922240" cy="548640"/>
           </a:xfrm>
           <a:prstGeom prst="rect">
@@ -5458,15 +5773,81 @@
                 <a:ea typeface="Roboto" pitchFamily="34" charset="-122"/>
                 <a:cs typeface="Roboto" pitchFamily="34" charset="-120"/>
               </a:rPr>
-              <a:t>Corrigir antes do usuário perceber é possível quando o dado de produção está visível para você.</a:t>
+              <a:t>A saída óbvia pra lasanha seria o produto perguntar em vez de chutar — só que esse mecanismo já existe, e foi ele que quebrou no episódio do hambúrguer.</a:t>
             </a:r>
             <a:endParaRPr lang="en-US" sz="2800" dirty="0"/>
           </a:p>
         </p:txBody>
       </p:sp>
-      <p:sp>
-        <p:nvSpPr>
-          <p:cNvPr id="14" name="Text 10"/>
+      <p:pic>
+        <p:nvPicPr>
+          <p:cNvPr id="13" name="Image 5" descr="art\seta.png">    </p:cNvPr>
+          <p:cNvPicPr>
+            <a:picLocks noChangeAspect="1"/>
+          </p:cNvPicPr>
+          <p:nvPr/>
+        </p:nvPicPr>
+        <p:blipFill>
+          <a:blip r:embed="rId6"/>
+          <a:stretch>
+            <a:fillRect/>
+          </a:stretch>
+        </p:blipFill>
+        <p:spPr>
+          <a:xfrm>
+            <a:off x="2423160" y="10757916"/>
+            <a:ext cx="475488" cy="411480"/>
+          </a:xfrm>
+          <a:prstGeom prst="rect">
+            <a:avLst/>
+          </a:prstGeom>
+        </p:spPr>
+      </p:pic>
+      <p:sp>
+        <p:nvSpPr>
+          <p:cNvPr id="14" name="Text 6"/>
+          <p:cNvSpPr txBox="1"/>
+          <p:nvPr/>
+        </p:nvSpPr>
+        <p:spPr>
+          <a:xfrm>
+            <a:off x="3337560" y="10629900"/>
+            <a:ext cx="17922240" cy="548640"/>
+          </a:xfrm>
+          <a:prstGeom prst="rect">
+            <a:avLst/>
+          </a:prstGeom>
+          <a:noFill/>
+          <a:ln/>
+        </p:spPr>
+        <p:txBody>
+          <a:bodyPr wrap="square" lIns="0" tIns="0" rIns="0" bIns="0" rtlCol="0" anchor="t"/>
+          <a:lstStyle/>
+          <a:p>
+            <a:pPr indent="0" marL="0">
+              <a:lnSpc>
+                <a:spcPct val="118000"/>
+              </a:lnSpc>
+              <a:buNone/>
+            </a:pPr>
+            <a:r>
+              <a:rPr lang="en-US" sz="2800" b="1" dirty="0">
+                <a:solidFill>
+                  <a:srgbClr val="F4F5F6"/>
+                </a:solidFill>
+                <a:latin typeface="Roboto" pitchFamily="34" charset="0"/>
+                <a:ea typeface="Roboto" pitchFamily="34" charset="-122"/>
+                <a:cs typeface="Roboto" pitchFamily="34" charset="-120"/>
+              </a:rPr>
+              <a:t>Risco que eu conheço e registro é diferente de risco escondido — e é onde a próxima aula começa.</a:t>
+            </a:r>
+            <a:endParaRPr lang="en-US" sz="2800" dirty="0"/>
+          </a:p>
+        </p:txBody>
+      </p:sp>
+      <p:sp>
+        <p:nvSpPr>
+          <p:cNvPr id="15" name="Text 7"/>
           <p:cNvSpPr txBox="1"/>
           <p:nvPr/>
         </p:nvSpPr>
@@ -5519,7 +5900,7 @@
     <p:bg>
       <p:bgPr>
         <a:solidFill>
-          <a:srgbClr val="010C53"/>
+          <a:srgbClr val="052FD3"/>
         </a:solidFill>
       </p:bgPr>
     </p:bg>
@@ -5539,7 +5920,7 @@
       </p:grpSpPr>
       <p:pic>
         <p:nvPicPr>
-          <p:cNvPr id="2" name="Image 0" descr="C:\Users\PCSTUD~1\AppData\Local\Temp\claude\C--Users-PC-Studio-2-Desktop-6498-Evals\7ce78c02-4c99-40d4-bc57-5394098065c6\scratchpad\art\logo.png">    </p:cNvPr>
+          <p:cNvPr id="2" name="Image 0" descr="art\logo.png">    </p:cNvPr>
           <p:cNvPicPr>
             <a:picLocks noChangeAspect="1"/>
           </p:cNvPicPr>
@@ -5569,8 +5950,130 @@
         </p:nvSpPr>
         <p:spPr>
           <a:xfrm>
-            <a:off x="2423160" y="5029200"/>
-            <a:ext cx="19540728" cy="822960"/>
+            <a:off x="4416552" y="4023360"/>
+            <a:ext cx="15544800" cy="5669280"/>
+          </a:xfrm>
+          <a:prstGeom prst="rect">
+            <a:avLst/>
+          </a:prstGeom>
+          <a:noFill/>
+          <a:ln/>
+        </p:spPr>
+        <p:txBody>
+          <a:bodyPr wrap="square" lIns="0" tIns="0" rIns="0" bIns="0" rtlCol="0" anchor="ctr"/>
+          <a:lstStyle/>
+          <a:p>
+            <a:pPr algn="ctr" indent="0" marL="0">
+              <a:lnSpc>
+                <a:spcPct val="105000"/>
+              </a:lnSpc>
+              <a:buNone/>
+            </a:pPr>
+            <a:r>
+              <a:rPr lang="en-US" sz="9600" dirty="0">
+                <a:solidFill>
+                  <a:srgbClr val="FFFFFF"/>
+                </a:solidFill>
+                <a:latin typeface="Encode Sans" pitchFamily="34" charset="0"/>
+                <a:ea typeface="Encode Sans" pitchFamily="34" charset="-122"/>
+                <a:cs typeface="Encode Sans" pitchFamily="34" charset="-120"/>
+              </a:rPr>
+              <a:t>4.5 O que aprendemos?</a:t>
+            </a:r>
+            <a:endParaRPr lang="en-US" sz="9600" dirty="0"/>
+          </a:p>
+        </p:txBody>
+      </p:sp>
+    </p:spTree>
+  </p:cSld>
+  <p:clrMapOvr>
+    <a:masterClrMapping/>
+  </p:clrMapOvr>
+</p:sld>
+</file>
+
+<file path=ppt/slides/slide19.xml><?xml version="1.0" encoding="utf-8"?>
+<p:sld xmlns:a="http://schemas.openxmlformats.org/drawingml/2006/main" xmlns:r="http://schemas.openxmlformats.org/officeDocument/2006/relationships" xmlns:p="http://schemas.openxmlformats.org/presentationml/2006/main">
+  <p:cSld name="Slide 19">
+    <p:bg>
+      <p:bgPr>
+        <a:solidFill>
+          <a:srgbClr val="0C0C0E"/>
+        </a:solidFill>
+      </p:bgPr>
+    </p:bg>
+    <p:spTree>
+      <p:nvGrpSpPr>
+        <p:cNvPr id="1" name=""/>
+        <p:cNvGrpSpPr/>
+        <p:nvPr/>
+      </p:nvGrpSpPr>
+      <p:grpSpPr>
+        <a:xfrm>
+          <a:off x="0" y="0"/>
+          <a:ext cx="0" cy="0"/>
+          <a:chOff x="0" y="0"/>
+          <a:chExt cx="0" cy="0"/>
+        </a:xfrm>
+      </p:grpSpPr>
+      <p:pic>
+        <p:nvPicPr>
+          <p:cNvPr id="2" name="Image 0" descr="art\malha.png">    </p:cNvPr>
+          <p:cNvPicPr>
+            <a:picLocks noChangeAspect="1"/>
+          </p:cNvPicPr>
+          <p:nvPr/>
+        </p:nvPicPr>
+        <p:blipFill>
+          <a:blip r:embed="rId1"/>
+          <a:stretch>
+            <a:fillRect/>
+          </a:stretch>
+        </p:blipFill>
+        <p:spPr>
+          <a:xfrm>
+            <a:off x="0" y="0"/>
+            <a:ext cx="24387048" cy="13716000"/>
+          </a:xfrm>
+          <a:prstGeom prst="rect">
+            <a:avLst/>
+          </a:prstGeom>
+        </p:spPr>
+      </p:pic>
+      <p:pic>
+        <p:nvPicPr>
+          <p:cNvPr id="3" name="Image 1" descr="art\logo.png">    </p:cNvPr>
+          <p:cNvPicPr>
+            <a:picLocks noChangeAspect="1"/>
+          </p:cNvPicPr>
+          <p:nvPr/>
+        </p:nvPicPr>
+        <p:blipFill>
+          <a:blip r:embed="rId2"/>
+          <a:stretch>
+            <a:fillRect/>
+          </a:stretch>
+        </p:blipFill>
+        <p:spPr>
+          <a:xfrm>
+            <a:off x="23436072" y="402336"/>
+            <a:ext cx="475488" cy="594360"/>
+          </a:xfrm>
+          <a:prstGeom prst="rect">
+            <a:avLst/>
+          </a:prstGeom>
+        </p:spPr>
+      </p:pic>
+      <p:sp>
+        <p:nvSpPr>
+          <p:cNvPr id="4" name="Text 0"/>
+          <p:cNvSpPr txBox="1"/>
+          <p:nvPr/>
+        </p:nvSpPr>
+        <p:spPr>
+          <a:xfrm>
+            <a:off x="2423160" y="1051560"/>
+            <a:ext cx="19540728" cy="594360"/>
           </a:xfrm>
           <a:prstGeom prst="rect">
             <a:avLst/>
@@ -5586,7 +6089,7 @@
               <a:buNone/>
             </a:pPr>
             <a:r>
-              <a:rPr lang="en-US" sz="2600" b="1" spc="300" kern="0" dirty="0">
+              <a:rPr lang="en-US" sz="2100" b="1" spc="250" kern="0" dirty="0">
                 <a:solidFill>
                   <a:srgbClr val="1F53E5"/>
                 </a:solidFill>
@@ -5594,22 +6097,22 @@
                 <a:ea typeface="Encode Sans" pitchFamily="34" charset="-122"/>
                 <a:cs typeface="Encode Sans" pitchFamily="34" charset="-120"/>
               </a:rPr>
-              <a:t>AULA 4 CONCLUÍDA</a:t>
-            </a:r>
-            <a:endParaRPr lang="en-US" sz="2600" dirty="0"/>
-          </a:p>
-        </p:txBody>
-      </p:sp>
-      <p:sp>
-        <p:nvSpPr>
-          <p:cNvPr id="4" name="Text 1"/>
+              <a:t>FECHAMENTO DA AULA</a:t>
+            </a:r>
+            <a:endParaRPr lang="en-US" sz="2100" dirty="0"/>
+          </a:p>
+        </p:txBody>
+      </p:sp>
+      <p:sp>
+        <p:nvSpPr>
+          <p:cNvPr id="5" name="Text 1"/>
           <p:cNvSpPr txBox="1"/>
           <p:nvPr/>
         </p:nvSpPr>
         <p:spPr>
           <a:xfrm>
-            <a:off x="2423160" y="5989320"/>
-            <a:ext cx="17830800" cy="4754880"/>
+            <a:off x="2423160" y="1783080"/>
+            <a:ext cx="19568160" cy="2377440"/>
           </a:xfrm>
           <a:prstGeom prst="rect">
             <a:avLst/>
@@ -5623,62 +6126,347 @@
           <a:p>
             <a:pPr indent="0" marL="0">
               <a:lnSpc>
-                <a:spcPct val="112000"/>
+                <a:spcPct val="105000"/>
               </a:lnSpc>
               <a:buNone/>
             </a:pPr>
             <a:r>
-              <a:rPr lang="en-US" sz="7800" dirty="0">
+              <a:rPr lang="en-US" sz="6600" dirty="0">
                 <a:solidFill>
-                  <a:srgbClr val="F4F5F6"/>
+                  <a:srgbClr val="BDBFC7"/>
                 </a:solidFill>
                 <a:latin typeface="Encode Sans" pitchFamily="34" charset="0"/>
                 <a:ea typeface="Encode Sans" pitchFamily="34" charset="-122"/>
                 <a:cs typeface="Encode Sans" pitchFamily="34" charset="-120"/>
               </a:rPr>
-              <a:t>Nenhuma falha gritou</a:t>
-            </a:r>
-            <a:endParaRPr lang="en-US" sz="7800" dirty="0"/>
-          </a:p>
+              <a:t>O que aprendemos</a:t>
+            </a:r>
+            <a:endParaRPr lang="en-US" sz="6600" dirty="0"/>
+          </a:p>
+        </p:txBody>
+      </p:sp>
+      <p:sp>
+        <p:nvSpPr>
+          <p:cNvPr id="6" name="Shape 2"/>
+          <p:cNvSpPr/>
+          <p:nvPr/>
+        </p:nvSpPr>
+        <p:spPr>
+          <a:xfrm>
+            <a:off x="2423160" y="4526280"/>
+            <a:ext cx="2011680" cy="68580"/>
+          </a:xfrm>
+          <a:prstGeom prst="rect">
+            <a:avLst/>
+          </a:prstGeom>
+          <a:solidFill>
+            <a:srgbClr val="1F53E5"/>
+          </a:solidFill>
+          <a:ln/>
+        </p:spPr>
+      </p:sp>
+      <p:pic>
+        <p:nvPicPr>
+          <p:cNvPr id="7" name="Image 2" descr="art\seta.png">    </p:cNvPr>
+          <p:cNvPicPr>
+            <a:picLocks noChangeAspect="1"/>
+          </p:cNvPicPr>
+          <p:nvPr/>
+        </p:nvPicPr>
+        <p:blipFill>
+          <a:blip r:embed="rId3"/>
+          <a:stretch>
+            <a:fillRect/>
+          </a:stretch>
+        </p:blipFill>
+        <p:spPr>
+          <a:xfrm>
+            <a:off x="2423160" y="6094476"/>
+            <a:ext cx="475488" cy="411480"/>
+          </a:xfrm>
+          <a:prstGeom prst="rect">
+            <a:avLst/>
+          </a:prstGeom>
+        </p:spPr>
+      </p:pic>
+      <p:sp>
+        <p:nvSpPr>
+          <p:cNvPr id="8" name="Text 3"/>
+          <p:cNvSpPr txBox="1"/>
+          <p:nvPr/>
+        </p:nvSpPr>
+        <p:spPr>
+          <a:xfrm>
+            <a:off x="3337560" y="5966460"/>
+            <a:ext cx="17922240" cy="548640"/>
+          </a:xfrm>
+          <a:prstGeom prst="rect">
+            <a:avLst/>
+          </a:prstGeom>
+          <a:noFill/>
+          <a:ln/>
+        </p:spPr>
+        <p:txBody>
+          <a:bodyPr wrap="square" lIns="0" tIns="0" rIns="0" bIns="0" rtlCol="0" anchor="t"/>
+          <a:lstStyle/>
           <a:p>
             <a:pPr indent="0" marL="0">
               <a:lnSpc>
-                <a:spcPct val="112000"/>
+                <a:spcPct val="118000"/>
               </a:lnSpc>
               <a:buNone/>
             </a:pPr>
             <a:r>
-              <a:rPr lang="en-US" sz="7800" dirty="0">
+              <a:rPr lang="en-US" sz="2800" dirty="0">
+                <a:solidFill>
+                  <a:srgbClr val="A7A9B4"/>
+                </a:solidFill>
+                <a:latin typeface="Roboto" pitchFamily="34" charset="0"/>
+                <a:ea typeface="Roboto" pitchFamily="34" charset="-122"/>
+                <a:cs typeface="Roboto" pitchFamily="34" charset="-120"/>
+              </a:rPr>
+              <a:t>Quatro falhas reais, e nenhuma gritou. Três eu fui atrás olhando; a quarta apareceu sozinha, usando o produto de verdade.</a:t>
+            </a:r>
+            <a:endParaRPr lang="en-US" sz="2800" dirty="0"/>
+          </a:p>
+        </p:txBody>
+      </p:sp>
+      <p:pic>
+        <p:nvPicPr>
+          <p:cNvPr id="9" name="Image 3" descr="art\seta.png">    </p:cNvPr>
+          <p:cNvPicPr>
+            <a:picLocks noChangeAspect="1"/>
+          </p:cNvPicPr>
+          <p:nvPr/>
+        </p:nvPicPr>
+        <p:blipFill>
+          <a:blip r:embed="rId4"/>
+          <a:stretch>
+            <a:fillRect/>
+          </a:stretch>
+        </p:blipFill>
+        <p:spPr>
+          <a:xfrm>
+            <a:off x="2423160" y="7648956"/>
+            <a:ext cx="475488" cy="411480"/>
+          </a:xfrm>
+          <a:prstGeom prst="rect">
+            <a:avLst/>
+          </a:prstGeom>
+        </p:spPr>
+      </p:pic>
+      <p:sp>
+        <p:nvSpPr>
+          <p:cNvPr id="10" name="Text 4"/>
+          <p:cNvSpPr txBox="1"/>
+          <p:nvPr/>
+        </p:nvSpPr>
+        <p:spPr>
+          <a:xfrm>
+            <a:off x="3337560" y="7520940"/>
+            <a:ext cx="17922240" cy="548640"/>
+          </a:xfrm>
+          <a:prstGeom prst="rect">
+            <a:avLst/>
+          </a:prstGeom>
+          <a:noFill/>
+          <a:ln/>
+        </p:spPr>
+        <p:txBody>
+          <a:bodyPr wrap="square" lIns="0" tIns="0" rIns="0" bIns="0" rtlCol="0" anchor="t"/>
+          <a:lstStyle/>
+          <a:p>
+            <a:pPr indent="0" marL="0">
+              <a:lnSpc>
+                <a:spcPct val="118000"/>
+              </a:lnSpc>
+              <a:buNone/>
+            </a:pPr>
+            <a:r>
+              <a:rPr lang="en-US" sz="2800" dirty="0">
+                <a:solidFill>
+                  <a:srgbClr val="A7A9B4"/>
+                </a:solidFill>
+                <a:latin typeface="Roboto" pitchFamily="34" charset="0"/>
+                <a:ea typeface="Roboto" pitchFamily="34" charset="-122"/>
+                <a:cs typeface="Roboto" pitchFamily="34" charset="-120"/>
+              </a:rPr>
+              <a:t>Eu não li código para diagnosticar: observei, juntei evidência e perguntei.</a:t>
+            </a:r>
+            <a:endParaRPr lang="en-US" sz="2800" dirty="0"/>
+          </a:p>
+        </p:txBody>
+      </p:sp>
+      <p:pic>
+        <p:nvPicPr>
+          <p:cNvPr id="11" name="Image 4" descr="art\seta.png">    </p:cNvPr>
+          <p:cNvPicPr>
+            <a:picLocks noChangeAspect="1"/>
+          </p:cNvPicPr>
+          <p:nvPr/>
+        </p:nvPicPr>
+        <p:blipFill>
+          <a:blip r:embed="rId5"/>
+          <a:stretch>
+            <a:fillRect/>
+          </a:stretch>
+        </p:blipFill>
+        <p:spPr>
+          <a:xfrm>
+            <a:off x="2423160" y="9203436"/>
+            <a:ext cx="475488" cy="411480"/>
+          </a:xfrm>
+          <a:prstGeom prst="rect">
+            <a:avLst/>
+          </a:prstGeom>
+        </p:spPr>
+      </p:pic>
+      <p:sp>
+        <p:nvSpPr>
+          <p:cNvPr id="12" name="Text 5"/>
+          <p:cNvSpPr txBox="1"/>
+          <p:nvPr/>
+        </p:nvSpPr>
+        <p:spPr>
+          <a:xfrm>
+            <a:off x="3337560" y="9075420"/>
+            <a:ext cx="17922240" cy="548640"/>
+          </a:xfrm>
+          <a:prstGeom prst="rect">
+            <a:avLst/>
+          </a:prstGeom>
+          <a:noFill/>
+          <a:ln/>
+        </p:spPr>
+        <p:txBody>
+          <a:bodyPr wrap="square" lIns="0" tIns="0" rIns="0" bIns="0" rtlCol="0" anchor="t"/>
+          <a:lstStyle/>
+          <a:p>
+            <a:pPr indent="0" marL="0">
+              <a:lnSpc>
+                <a:spcPct val="118000"/>
+              </a:lnSpc>
+              <a:buNone/>
+            </a:pPr>
+            <a:r>
+              <a:rPr lang="en-US" sz="2800" b="1" dirty="0">
                 <a:solidFill>
                   <a:srgbClr val="F4F5F6"/>
                 </a:solidFill>
-                <a:latin typeface="Encode Sans" pitchFamily="34" charset="0"/>
-                <a:ea typeface="Encode Sans" pitchFamily="34" charset="-122"/>
-                <a:cs typeface="Encode Sans" pitchFamily="34" charset="-120"/>
+                <a:latin typeface="Roboto" pitchFamily="34" charset="0"/>
+                <a:ea typeface="Roboto" pitchFamily="34" charset="-122"/>
+                <a:cs typeface="Roboto" pitchFamily="34" charset="-120"/>
               </a:rPr>
-              <a:t>sozinha. Todas foram</a:t>
-            </a:r>
-            <a:endParaRPr lang="en-US" sz="7800" dirty="0"/>
-          </a:p>
+              <a:t>A inteligência acertou nos quatro casos — inclusive quatro vezes seguidas no mais difícil. Quem falhou foi o produto em volta dela.</a:t>
+            </a:r>
+            <a:endParaRPr lang="en-US" sz="2800" dirty="0"/>
+          </a:p>
+        </p:txBody>
+      </p:sp>
+      <p:pic>
+        <p:nvPicPr>
+          <p:cNvPr id="13" name="Image 5" descr="art\seta.png">    </p:cNvPr>
+          <p:cNvPicPr>
+            <a:picLocks noChangeAspect="1"/>
+          </p:cNvPicPr>
+          <p:nvPr/>
+        </p:nvPicPr>
+        <p:blipFill>
+          <a:blip r:embed="rId6"/>
+          <a:stretch>
+            <a:fillRect/>
+          </a:stretch>
+        </p:blipFill>
+        <p:spPr>
+          <a:xfrm>
+            <a:off x="2423160" y="10757916"/>
+            <a:ext cx="475488" cy="411480"/>
+          </a:xfrm>
+          <a:prstGeom prst="rect">
+            <a:avLst/>
+          </a:prstGeom>
+        </p:spPr>
+      </p:pic>
+      <p:sp>
+        <p:nvSpPr>
+          <p:cNvPr id="14" name="Text 6"/>
+          <p:cNvSpPr txBox="1"/>
+          <p:nvPr/>
+        </p:nvSpPr>
+        <p:spPr>
+          <a:xfrm>
+            <a:off x="3337560" y="10629900"/>
+            <a:ext cx="17922240" cy="548640"/>
+          </a:xfrm>
+          <a:prstGeom prst="rect">
+            <a:avLst/>
+          </a:prstGeom>
+          <a:noFill/>
+          <a:ln/>
+        </p:spPr>
+        <p:txBody>
+          <a:bodyPr wrap="square" lIns="0" tIns="0" rIns="0" bIns="0" rtlCol="0" anchor="t"/>
+          <a:lstStyle/>
           <a:p>
             <a:pPr indent="0" marL="0">
               <a:lnSpc>
-                <a:spcPct val="112000"/>
+                <a:spcPct val="118000"/>
               </a:lnSpc>
               <a:buNone/>
             </a:pPr>
             <a:r>
-              <a:rPr lang="en-US" sz="7800" dirty="0">
+              <a:rPr lang="en-US" sz="2800" dirty="0">
                 <a:solidFill>
-                  <a:srgbClr val="F4F5F6"/>
+                  <a:srgbClr val="A7A9B4"/>
                 </a:solidFill>
-                <a:latin typeface="Encode Sans" pitchFamily="34" charset="0"/>
-                <a:ea typeface="Encode Sans" pitchFamily="34" charset="-122"/>
-                <a:cs typeface="Encode Sans" pitchFamily="34" charset="-120"/>
+                <a:latin typeface="Roboto" pitchFamily="34" charset="0"/>
+                <a:ea typeface="Roboto" pitchFamily="34" charset="-122"/>
+                <a:cs typeface="Roboto" pitchFamily="34" charset="-120"/>
               </a:rPr>
-              <a:t>encontradas olhando.</a:t>
-            </a:r>
-            <a:endParaRPr lang="en-US" sz="7800" dirty="0"/>
+              <a:t>Corrigir antes do usuário perceber é possível quando o dado de produção está visível para você.</a:t>
+            </a:r>
+            <a:endParaRPr lang="en-US" sz="2800" dirty="0"/>
+          </a:p>
+        </p:txBody>
+      </p:sp>
+      <p:sp>
+        <p:nvSpPr>
+          <p:cNvPr id="15" name="Text 7"/>
+          <p:cNvSpPr txBox="1"/>
+          <p:nvPr/>
+        </p:nvSpPr>
+        <p:spPr>
+          <a:xfrm>
+            <a:off x="2423160" y="12755880"/>
+            <a:ext cx="19540728" cy="457200"/>
+          </a:xfrm>
+          <a:prstGeom prst="rect">
+            <a:avLst/>
+          </a:prstGeom>
+          <a:noFill/>
+          <a:ln/>
+        </p:spPr>
+        <p:txBody>
+          <a:bodyPr wrap="square" lIns="0" tIns="0" rIns="0" bIns="0" rtlCol="0" anchor="ctr"/>
+          <a:lstStyle/>
+          <a:p>
+            <a:pPr indent="0" marL="0">
+              <a:buNone/>
+            </a:pPr>
+            <a:r>
+              <a:rPr lang="en-US" sz="1500" dirty="0">
+                <a:solidFill>
+                  <a:srgbClr val="A7A9B4">
+                    <a:alpha val="65000"/>
+                  </a:srgbClr>
+                </a:solidFill>
+                <a:latin typeface="Roboto" pitchFamily="34" charset="0"/>
+                <a:ea typeface="Roboto" pitchFamily="34" charset="-122"/>
+                <a:cs typeface="Roboto" pitchFamily="34" charset="-120"/>
+              </a:rPr>
+              <a:t>Aula 4 — Detectar, diagnosticar e corrigir — Evals, observabilidade e conformidade</a:t>
+            </a:r>
+            <a:endParaRPr lang="en-US" sz="1500" dirty="0"/>
           </a:p>
         </p:txBody>
       </p:sp>
@@ -5716,7 +6504,7 @@
       </p:grpSpPr>
       <p:pic>
         <p:nvPicPr>
-          <p:cNvPr id="2" name="Image 0" descr="C:\Users\PCSTUD~1\AppData\Local\Temp\claude\C--Users-PC-Studio-2-Desktop-6498-Evals\7ce78c02-4c99-40d4-bc57-5394098065c6\scratchpad\art\logo.png">    </p:cNvPr>
+          <p:cNvPr id="2" name="Image 0" descr="art\logo.png">    </p:cNvPr>
           <p:cNvPicPr>
             <a:picLocks noChangeAspect="1"/>
           </p:cNvPicPr>
@@ -5777,6 +6565,183 @@
               <a:t>4.1 Detectando degradação</a:t>
             </a:r>
             <a:endParaRPr lang="en-US" sz="9600" dirty="0"/>
+          </a:p>
+        </p:txBody>
+      </p:sp>
+    </p:spTree>
+  </p:cSld>
+  <p:clrMapOvr>
+    <a:masterClrMapping/>
+  </p:clrMapOvr>
+</p:sld>
+</file>
+
+<file path=ppt/slides/slide20.xml><?xml version="1.0" encoding="utf-8"?>
+<p:sld xmlns:a="http://schemas.openxmlformats.org/drawingml/2006/main" xmlns:r="http://schemas.openxmlformats.org/officeDocument/2006/relationships" xmlns:p="http://schemas.openxmlformats.org/presentationml/2006/main">
+  <p:cSld name="Slide 20">
+    <p:bg>
+      <p:bgPr>
+        <a:solidFill>
+          <a:srgbClr val="010C53"/>
+        </a:solidFill>
+      </p:bgPr>
+    </p:bg>
+    <p:spTree>
+      <p:nvGrpSpPr>
+        <p:cNvPr id="1" name=""/>
+        <p:cNvGrpSpPr/>
+        <p:nvPr/>
+      </p:nvGrpSpPr>
+      <p:grpSpPr>
+        <a:xfrm>
+          <a:off x="0" y="0"/>
+          <a:ext cx="0" cy="0"/>
+          <a:chOff x="0" y="0"/>
+          <a:chExt cx="0" cy="0"/>
+        </a:xfrm>
+      </p:grpSpPr>
+      <p:pic>
+        <p:nvPicPr>
+          <p:cNvPr id="2" name="Image 0" descr="art\logo.png">    </p:cNvPr>
+          <p:cNvPicPr>
+            <a:picLocks noChangeAspect="1"/>
+          </p:cNvPicPr>
+          <p:nvPr/>
+        </p:nvPicPr>
+        <p:blipFill>
+          <a:blip r:embed="rId1"/>
+          <a:stretch>
+            <a:fillRect/>
+          </a:stretch>
+        </p:blipFill>
+        <p:spPr>
+          <a:xfrm>
+            <a:off x="23436072" y="402336"/>
+            <a:ext cx="475488" cy="594360"/>
+          </a:xfrm>
+          <a:prstGeom prst="rect">
+            <a:avLst/>
+          </a:prstGeom>
+        </p:spPr>
+      </p:pic>
+      <p:sp>
+        <p:nvSpPr>
+          <p:cNvPr id="3" name="Text 0"/>
+          <p:cNvSpPr txBox="1"/>
+          <p:nvPr/>
+        </p:nvSpPr>
+        <p:spPr>
+          <a:xfrm>
+            <a:off x="2423160" y="5029200"/>
+            <a:ext cx="19540728" cy="822960"/>
+          </a:xfrm>
+          <a:prstGeom prst="rect">
+            <a:avLst/>
+          </a:prstGeom>
+          <a:noFill/>
+          <a:ln/>
+        </p:spPr>
+        <p:txBody>
+          <a:bodyPr wrap="square" lIns="0" tIns="0" rIns="0" bIns="0" rtlCol="0" anchor="ctr"/>
+          <a:lstStyle/>
+          <a:p>
+            <a:pPr indent="0" marL="0">
+              <a:buNone/>
+            </a:pPr>
+            <a:r>
+              <a:rPr lang="en-US" sz="2600" b="1" spc="300" kern="0" dirty="0">
+                <a:solidFill>
+                  <a:srgbClr val="1F53E5"/>
+                </a:solidFill>
+                <a:latin typeface="Encode Sans" pitchFamily="34" charset="0"/>
+                <a:ea typeface="Encode Sans" pitchFamily="34" charset="-122"/>
+                <a:cs typeface="Encode Sans" pitchFamily="34" charset="-120"/>
+              </a:rPr>
+              <a:t>AULA 4 CONCLUÍDA</a:t>
+            </a:r>
+            <a:endParaRPr lang="en-US" sz="2600" dirty="0"/>
+          </a:p>
+        </p:txBody>
+      </p:sp>
+      <p:sp>
+        <p:nvSpPr>
+          <p:cNvPr id="4" name="Text 1"/>
+          <p:cNvSpPr txBox="1"/>
+          <p:nvPr/>
+        </p:nvSpPr>
+        <p:spPr>
+          <a:xfrm>
+            <a:off x="2423160" y="5989320"/>
+            <a:ext cx="17830800" cy="4754880"/>
+          </a:xfrm>
+          <a:prstGeom prst="rect">
+            <a:avLst/>
+          </a:prstGeom>
+          <a:noFill/>
+          <a:ln/>
+        </p:spPr>
+        <p:txBody>
+          <a:bodyPr wrap="square" lIns="0" tIns="0" rIns="0" bIns="0" rtlCol="0" anchor="t"/>
+          <a:lstStyle/>
+          <a:p>
+            <a:pPr indent="0" marL="0">
+              <a:lnSpc>
+                <a:spcPct val="112000"/>
+              </a:lnSpc>
+              <a:buNone/>
+            </a:pPr>
+            <a:r>
+              <a:rPr lang="en-US" sz="7800" dirty="0">
+                <a:solidFill>
+                  <a:srgbClr val="F4F5F6"/>
+                </a:solidFill>
+                <a:latin typeface="Encode Sans" pitchFamily="34" charset="0"/>
+                <a:ea typeface="Encode Sans" pitchFamily="34" charset="-122"/>
+                <a:cs typeface="Encode Sans" pitchFamily="34" charset="-120"/>
+              </a:rPr>
+              <a:t>Nenhuma falha gritou</a:t>
+            </a:r>
+            <a:endParaRPr lang="en-US" sz="7800" dirty="0"/>
+          </a:p>
+          <a:p>
+            <a:pPr indent="0" marL="0">
+              <a:lnSpc>
+                <a:spcPct val="112000"/>
+              </a:lnSpc>
+              <a:buNone/>
+            </a:pPr>
+            <a:r>
+              <a:rPr lang="en-US" sz="7800" dirty="0">
+                <a:solidFill>
+                  <a:srgbClr val="F4F5F6"/>
+                </a:solidFill>
+                <a:latin typeface="Encode Sans" pitchFamily="34" charset="0"/>
+                <a:ea typeface="Encode Sans" pitchFamily="34" charset="-122"/>
+                <a:cs typeface="Encode Sans" pitchFamily="34" charset="-120"/>
+              </a:rPr>
+              <a:t>sozinha. Todas foram</a:t>
+            </a:r>
+            <a:endParaRPr lang="en-US" sz="7800" dirty="0"/>
+          </a:p>
+          <a:p>
+            <a:pPr indent="0" marL="0">
+              <a:lnSpc>
+                <a:spcPct val="112000"/>
+              </a:lnSpc>
+              <a:buNone/>
+            </a:pPr>
+            <a:r>
+              <a:rPr lang="en-US" sz="7800" dirty="0">
+                <a:solidFill>
+                  <a:srgbClr val="F4F5F6"/>
+                </a:solidFill>
+                <a:latin typeface="Encode Sans" pitchFamily="34" charset="0"/>
+                <a:ea typeface="Encode Sans" pitchFamily="34" charset="-122"/>
+                <a:cs typeface="Encode Sans" pitchFamily="34" charset="-120"/>
+              </a:rPr>
+              <a:t>encontradas olhando.</a:t>
+            </a:r>
+            <a:endParaRPr lang="en-US" sz="7800" dirty="0"/>
           </a:p>
         </p:txBody>
       </p:sp>
@@ -5814,7 +6779,7 @@
       </p:grpSpPr>
       <p:pic>
         <p:nvPicPr>
-          <p:cNvPr id="2" name="Image 0" descr="C:\Users\PCSTUD~1\AppData\Local\Temp\claude\C--Users-PC-Studio-2-Desktop-6498-Evals\7ce78c02-4c99-40d4-bc57-5394098065c6\scratchpad\art\malha.png">    </p:cNvPr>
+          <p:cNvPr id="2" name="Image 0" descr="art\malha.png">    </p:cNvPr>
           <p:cNvPicPr>
             <a:picLocks noChangeAspect="1"/>
           </p:cNvPicPr>
@@ -5838,7 +6803,7 @@
       </p:pic>
       <p:pic>
         <p:nvPicPr>
-          <p:cNvPr id="3" name="Image 1" descr="C:\Users\PCSTUD~1\AppData\Local\Temp\claude\C--Users-PC-Studio-2-Desktop-6498-Evals\7ce78c02-4c99-40d4-bc57-5394098065c6\scratchpad\art\logo.png">    </p:cNvPr>
+          <p:cNvPr id="3" name="Image 1" descr="art\logo.png">    </p:cNvPr>
           <p:cNvPicPr>
             <a:picLocks noChangeAspect="1"/>
           </p:cNvPicPr>
@@ -5868,7 +6833,7 @@
         </p:nvSpPr>
         <p:spPr>
           <a:xfrm>
-            <a:off x="2423160" y="2148840"/>
+            <a:off x="2423160" y="1051560"/>
             <a:ext cx="19540728" cy="594360"/>
           </a:xfrm>
           <a:prstGeom prst="rect">
@@ -5907,8 +6872,8 @@
         </p:nvSpPr>
         <p:spPr>
           <a:xfrm>
-            <a:off x="2423160" y="2880360"/>
-            <a:ext cx="18745200" cy="2377440"/>
+            <a:off x="2423160" y="1783080"/>
+            <a:ext cx="19568160" cy="2377440"/>
           </a:xfrm>
           <a:prstGeom prst="rect">
             <a:avLst/>
@@ -5943,52 +6908,57 @@
       </p:sp>
       <p:sp>
         <p:nvSpPr>
-          <p:cNvPr id="6" name="Text 2"/>
+          <p:cNvPr id="6" name="Shape 2"/>
+          <p:cNvSpPr/>
+          <p:nvPr/>
+        </p:nvSpPr>
+        <p:spPr>
+          <a:xfrm>
+            <a:off x="2423160" y="4526280"/>
+            <a:ext cx="2011680" cy="68580"/>
+          </a:xfrm>
+          <a:prstGeom prst="rect">
+            <a:avLst/>
+          </a:prstGeom>
+          <a:solidFill>
+            <a:srgbClr val="1F53E5"/>
+          </a:solidFill>
+          <a:ln/>
+        </p:spPr>
+      </p:sp>
+      <p:pic>
+        <p:nvPicPr>
+          <p:cNvPr id="7" name="Image 2" descr="art\seta.png">    </p:cNvPr>
+          <p:cNvPicPr>
+            <a:picLocks noChangeAspect="1"/>
+          </p:cNvPicPr>
+          <p:nvPr/>
+        </p:nvPicPr>
+        <p:blipFill>
+          <a:blip r:embed="rId3"/>
+          <a:stretch>
+            <a:fillRect/>
+          </a:stretch>
+        </p:blipFill>
+        <p:spPr>
+          <a:xfrm>
+            <a:off x="2423160" y="6871716"/>
+            <a:ext cx="475488" cy="411480"/>
+          </a:xfrm>
+          <a:prstGeom prst="rect">
+            <a:avLst/>
+          </a:prstGeom>
+        </p:spPr>
+      </p:pic>
+      <p:sp>
+        <p:nvSpPr>
+          <p:cNvPr id="8" name="Text 3"/>
           <p:cNvSpPr txBox="1"/>
           <p:nvPr/>
         </p:nvSpPr>
         <p:spPr>
           <a:xfrm>
-            <a:off x="2423160" y="5367528"/>
-            <a:ext cx="777240" cy="548640"/>
-          </a:xfrm>
-          <a:prstGeom prst="rect">
-            <a:avLst/>
-          </a:prstGeom>
-          <a:noFill/>
-          <a:ln/>
-        </p:spPr>
-        <p:txBody>
-          <a:bodyPr wrap="square" lIns="0" tIns="0" rIns="0" bIns="0" rtlCol="0" anchor="t"/>
-          <a:lstStyle/>
-          <a:p>
-            <a:pPr indent="0" marL="0">
-              <a:buNone/>
-            </a:pPr>
-            <a:r>
-              <a:rPr lang="en-US" sz="3000" b="1" dirty="0">
-                <a:solidFill>
-                  <a:srgbClr val="1F53E5"/>
-                </a:solidFill>
-                <a:latin typeface="Roboto" pitchFamily="34" charset="0"/>
-                <a:ea typeface="Roboto" pitchFamily="34" charset="-122"/>
-                <a:cs typeface="Roboto" pitchFamily="34" charset="-120"/>
-              </a:rPr>
-              <a:t>→</a:t>
-            </a:r>
-            <a:endParaRPr lang="en-US" sz="3000" dirty="0"/>
-          </a:p>
-        </p:txBody>
-      </p:sp>
-      <p:sp>
-        <p:nvSpPr>
-          <p:cNvPr id="7" name="Text 3"/>
-          <p:cNvSpPr txBox="1"/>
-          <p:nvPr/>
-        </p:nvSpPr>
-        <p:spPr>
-          <a:xfrm>
-            <a:off x="3337560" y="5349240"/>
+            <a:off x="3337560" y="6743700"/>
             <a:ext cx="17922240" cy="548640"/>
           </a:xfrm>
           <a:prstGeom prst="rect">
@@ -6016,60 +6986,45 @@
                 <a:ea typeface="Roboto" pitchFamily="34" charset="-122"/>
                 <a:cs typeface="Roboto" pitchFamily="34" charset="-120"/>
               </a:rPr>
-              <a:t>O Chef Caseiro está no ar, com dados reais e chamadas de modelo pagas.</a:t>
+              <a:t>Meu produto está no ar, com dados reais e chamadas de modelo pagas.</a:t>
             </a:r>
             <a:endParaRPr lang="en-US" sz="2800" dirty="0"/>
           </a:p>
         </p:txBody>
       </p:sp>
-      <p:sp>
-        <p:nvSpPr>
-          <p:cNvPr id="8" name="Text 4"/>
+      <p:pic>
+        <p:nvPicPr>
+          <p:cNvPr id="9" name="Image 3" descr="art\seta.png">    </p:cNvPr>
+          <p:cNvPicPr>
+            <a:picLocks noChangeAspect="1"/>
+          </p:cNvPicPr>
+          <p:nvPr/>
+        </p:nvPicPr>
+        <p:blipFill>
+          <a:blip r:embed="rId4"/>
+          <a:stretch>
+            <a:fillRect/>
+          </a:stretch>
+        </p:blipFill>
+        <p:spPr>
+          <a:xfrm>
+            <a:off x="2423160" y="8426196"/>
+            <a:ext cx="475488" cy="411480"/>
+          </a:xfrm>
+          <a:prstGeom prst="rect">
+            <a:avLst/>
+          </a:prstGeom>
+        </p:spPr>
+      </p:pic>
+      <p:sp>
+        <p:nvSpPr>
+          <p:cNvPr id="10" name="Text 4"/>
           <p:cNvSpPr txBox="1"/>
           <p:nvPr/>
         </p:nvSpPr>
         <p:spPr>
           <a:xfrm>
-            <a:off x="2423160" y="6419088"/>
-            <a:ext cx="777240" cy="548640"/>
-          </a:xfrm>
-          <a:prstGeom prst="rect">
-            <a:avLst/>
-          </a:prstGeom>
-          <a:noFill/>
-          <a:ln/>
-        </p:spPr>
-        <p:txBody>
-          <a:bodyPr wrap="square" lIns="0" tIns="0" rIns="0" bIns="0" rtlCol="0" anchor="t"/>
-          <a:lstStyle/>
-          <a:p>
-            <a:pPr indent="0" marL="0">
-              <a:buNone/>
-            </a:pPr>
-            <a:r>
-              <a:rPr lang="en-US" sz="3000" b="1" dirty="0">
-                <a:solidFill>
-                  <a:srgbClr val="1F53E5"/>
-                </a:solidFill>
-                <a:latin typeface="Roboto" pitchFamily="34" charset="0"/>
-                <a:ea typeface="Roboto" pitchFamily="34" charset="-122"/>
-                <a:cs typeface="Roboto" pitchFamily="34" charset="-120"/>
-              </a:rPr>
-              <a:t>→</a:t>
-            </a:r>
-            <a:endParaRPr lang="en-US" sz="3000" dirty="0"/>
-          </a:p>
-        </p:txBody>
-      </p:sp>
-      <p:sp>
-        <p:nvSpPr>
-          <p:cNvPr id="9" name="Text 5"/>
-          <p:cNvSpPr txBox="1"/>
-          <p:nvPr/>
-        </p:nvSpPr>
-        <p:spPr>
-          <a:xfrm>
-            <a:off x="3337560" y="6400800"/>
+            <a:off x="3337560" y="8298180"/>
             <a:ext cx="17922240" cy="548640"/>
           </a:xfrm>
           <a:prstGeom prst="rect">
@@ -6097,60 +7052,45 @@
                 <a:ea typeface="Roboto" pitchFamily="34" charset="-122"/>
                 <a:cs typeface="Roboto" pitchFamily="34" charset="-120"/>
               </a:rPr>
-              <a:t>Nenhum alarme disparou. Nenhum usuário reclamou. E há três falhas ativas neste momento.</a:t>
+              <a:t>Nenhum alarme disparou. Nenhum usuário reclamou. E há duas falhas ativas neste momento.</a:t>
             </a:r>
             <a:endParaRPr lang="en-US" sz="2800" dirty="0"/>
           </a:p>
         </p:txBody>
       </p:sp>
-      <p:sp>
-        <p:nvSpPr>
-          <p:cNvPr id="10" name="Text 6"/>
+      <p:pic>
+        <p:nvPicPr>
+          <p:cNvPr id="11" name="Image 4" descr="art\seta.png">    </p:cNvPr>
+          <p:cNvPicPr>
+            <a:picLocks noChangeAspect="1"/>
+          </p:cNvPicPr>
+          <p:nvPr/>
+        </p:nvPicPr>
+        <p:blipFill>
+          <a:blip r:embed="rId5"/>
+          <a:stretch>
+            <a:fillRect/>
+          </a:stretch>
+        </p:blipFill>
+        <p:spPr>
+          <a:xfrm>
+            <a:off x="2423160" y="9980676"/>
+            <a:ext cx="475488" cy="411480"/>
+          </a:xfrm>
+          <a:prstGeom prst="rect">
+            <a:avLst/>
+          </a:prstGeom>
+        </p:spPr>
+      </p:pic>
+      <p:sp>
+        <p:nvSpPr>
+          <p:cNvPr id="12" name="Text 5"/>
           <p:cNvSpPr txBox="1"/>
           <p:nvPr/>
         </p:nvSpPr>
         <p:spPr>
           <a:xfrm>
-            <a:off x="2423160" y="7470648"/>
-            <a:ext cx="777240" cy="548640"/>
-          </a:xfrm>
-          <a:prstGeom prst="rect">
-            <a:avLst/>
-          </a:prstGeom>
-          <a:noFill/>
-          <a:ln/>
-        </p:spPr>
-        <p:txBody>
-          <a:bodyPr wrap="square" lIns="0" tIns="0" rIns="0" bIns="0" rtlCol="0" anchor="t"/>
-          <a:lstStyle/>
-          <a:p>
-            <a:pPr indent="0" marL="0">
-              <a:buNone/>
-            </a:pPr>
-            <a:r>
-              <a:rPr lang="en-US" sz="3000" b="1" dirty="0">
-                <a:solidFill>
-                  <a:srgbClr val="1F53E5"/>
-                </a:solidFill>
-                <a:latin typeface="Roboto" pitchFamily="34" charset="0"/>
-                <a:ea typeface="Roboto" pitchFamily="34" charset="-122"/>
-                <a:cs typeface="Roboto" pitchFamily="34" charset="-120"/>
-              </a:rPr>
-              <a:t>→</a:t>
-            </a:r>
-            <a:endParaRPr lang="en-US" sz="3000" dirty="0"/>
-          </a:p>
-        </p:txBody>
-      </p:sp>
-      <p:sp>
-        <p:nvSpPr>
-          <p:cNvPr id="11" name="Text 7"/>
-          <p:cNvSpPr txBox="1"/>
-          <p:nvPr/>
-        </p:nvSpPr>
-        <p:spPr>
-          <a:xfrm>
-            <a:off x="3337560" y="7452360"/>
+            <a:off x="3337560" y="9852660"/>
             <a:ext cx="17922240" cy="548640"/>
           </a:xfrm>
           <a:prstGeom prst="rect">
@@ -6172,7 +7112,7 @@
             <a:r>
               <a:rPr lang="en-US" sz="2800" b="1" dirty="0">
                 <a:solidFill>
-                  <a:srgbClr val="BDBFC7"/>
+                  <a:srgbClr val="F4F5F6"/>
                 </a:solidFill>
                 <a:latin typeface="Roboto" pitchFamily="34" charset="0"/>
                 <a:ea typeface="Roboto" pitchFamily="34" charset="-122"/>
@@ -6186,7 +7126,7 @@
       </p:sp>
       <p:sp>
         <p:nvSpPr>
-          <p:cNvPr id="12" name="Text 8"/>
+          <p:cNvPr id="13" name="Text 6"/>
           <p:cNvSpPr txBox="1"/>
           <p:nvPr/>
         </p:nvSpPr>
@@ -6259,7 +7199,7 @@
       </p:grpSpPr>
       <p:pic>
         <p:nvPicPr>
-          <p:cNvPr id="2" name="Image 0" descr="C:\Users\PCSTUD~1\AppData\Local\Temp\claude\C--Users-PC-Studio-2-Desktop-6498-Evals\7ce78c02-4c99-40d4-bc57-5394098065c6\scratchpad\art\logo.png">    </p:cNvPr>
+          <p:cNvPr id="2" name="Image 0" descr="art\logo.png">    </p:cNvPr>
           <p:cNvPicPr>
             <a:picLocks noChangeAspect="1"/>
           </p:cNvPicPr>
@@ -6314,7 +7254,7 @@
                 <a:ea typeface="Encode Sans" pitchFamily="34" charset="-122"/>
                 <a:cs typeface="Encode Sans" pitchFamily="34" charset="-120"/>
               </a:rPr>
-              <a:t>VÍDEO 4.1 — DADO REAL</a:t>
+              <a:t>VÍDEO 4.1 — DADO REAL (14/09)</a:t>
             </a:r>
             <a:endParaRPr lang="en-US" sz="2100" dirty="0"/>
           </a:p>
@@ -6816,7 +7756,7 @@
                           <a:ea typeface="Roboto" pitchFamily="34" charset="-122"/>
                           <a:cs typeface="Roboto" pitchFamily="34" charset="-120"/>
                         </a:rPr>
-                        <a:t>12</a:t>
+                        <a:t>10</a:t>
                       </a:r>
                       <a:endParaRPr lang="en-US" sz="2200" dirty="0">
                         <a:latin typeface="Roboto" charset="0"/>
@@ -6884,7 +7824,7 @@
                           <a:ea typeface="Roboto" pitchFamily="34" charset="-122"/>
                           <a:cs typeface="Roboto" pitchFamily="34" charset="-120"/>
                         </a:rPr>
-                        <a:t>US$ 0,1184</a:t>
+                        <a:t>US$ 0,1381</a:t>
                       </a:r>
                       <a:endParaRPr lang="en-US" sz="2200" dirty="0">
                         <a:latin typeface="Roboto" charset="0"/>
@@ -6952,7 +7892,7 @@
                           <a:ea typeface="Roboto" pitchFamily="34" charset="-122"/>
                           <a:cs typeface="Roboto" pitchFamily="34" charset="-120"/>
                         </a:rPr>
-                        <a:t>51,2 s</a:t>
+                        <a:t>55,9 s</a:t>
                       </a:r>
                       <a:endParaRPr lang="en-US" sz="2200" dirty="0">
                         <a:latin typeface="Roboto" charset="0"/>
@@ -7020,7 +7960,7 @@
                           <a:ea typeface="Roboto" pitchFamily="34" charset="-122"/>
                           <a:cs typeface="Roboto" pitchFamily="34" charset="-120"/>
                         </a:rPr>
-                        <a:t>75 %</a:t>
+                        <a:t>90 %</a:t>
                       </a:r>
                       <a:endParaRPr lang="en-US" sz="2200" dirty="0">
                         <a:latin typeface="Roboto" charset="0"/>
@@ -7090,7 +8030,7 @@
                           <a:ea typeface="Roboto" pitchFamily="34" charset="-122"/>
                           <a:cs typeface="Roboto" pitchFamily="34" charset="-120"/>
                         </a:rPr>
-                        <a:t>sugerir-receita</a:t>
+                        <a:t>receita-premium-semanal</a:t>
                       </a:r>
                       <a:endParaRPr lang="en-US" sz="2200" dirty="0">
                         <a:latin typeface="Roboto" charset="0"/>
@@ -7158,7 +8098,7 @@
                           <a:ea typeface="Roboto" pitchFamily="34" charset="-122"/>
                           <a:cs typeface="Roboto" pitchFamily="34" charset="-120"/>
                         </a:rPr>
-                        <a:t>7</a:t>
+                        <a:t>6</a:t>
                       </a:r>
                       <a:endParaRPr lang="en-US" sz="2200" dirty="0">
                         <a:latin typeface="Roboto" charset="0"/>
@@ -7226,7 +8166,7 @@
                           <a:ea typeface="Roboto" pitchFamily="34" charset="-122"/>
                           <a:cs typeface="Roboto" pitchFamily="34" charset="-120"/>
                         </a:rPr>
-                        <a:t>US$ 0,0324</a:t>
+                        <a:t>US$ 0,0115</a:t>
                       </a:r>
                       <a:endParaRPr lang="en-US" sz="2200" dirty="0">
                         <a:latin typeface="Roboto" charset="0"/>
@@ -7294,7 +8234,7 @@
                           <a:ea typeface="Roboto" pitchFamily="34" charset="-122"/>
                           <a:cs typeface="Roboto" pitchFamily="34" charset="-120"/>
                         </a:rPr>
-                        <a:t>34,1 s</a:t>
+                        <a:t>7,3 s</a:t>
                       </a:r>
                       <a:endParaRPr lang="en-US" sz="2200" dirty="0">
                         <a:latin typeface="Roboto" charset="0"/>
@@ -7362,7 +8302,7 @@
                           <a:ea typeface="Roboto" pitchFamily="34" charset="-122"/>
                           <a:cs typeface="Roboto" pitchFamily="34" charset="-120"/>
                         </a:rPr>
-                        <a:t>12 %</a:t>
+                        <a:t>5 %</a:t>
                       </a:r>
                       <a:endParaRPr lang="en-US" sz="2200" dirty="0">
                         <a:latin typeface="Roboto" charset="0"/>
@@ -7500,7 +8440,7 @@
                           <a:ea typeface="Roboto" pitchFamily="34" charset="-122"/>
                           <a:cs typeface="Roboto" pitchFamily="34" charset="-120"/>
                         </a:rPr>
-                        <a:t>37</a:t>
+                        <a:t>17</a:t>
                       </a:r>
                       <a:endParaRPr lang="en-US" sz="2200" dirty="0">
                         <a:latin typeface="Roboto" charset="0"/>
@@ -7568,7 +8508,7 @@
                           <a:ea typeface="Roboto" pitchFamily="34" charset="-122"/>
                           <a:cs typeface="Roboto" pitchFamily="34" charset="-120"/>
                         </a:rPr>
-                        <a:t>US$ 0,0047</a:t>
+                        <a:t>US$ 0,0032</a:t>
                       </a:r>
                       <a:endParaRPr lang="en-US" sz="2200" dirty="0">
                         <a:latin typeface="Roboto" charset="0"/>
@@ -7636,7 +8576,7 @@
                           <a:ea typeface="Roboto" pitchFamily="34" charset="-122"/>
                           <a:cs typeface="Roboto" pitchFamily="34" charset="-120"/>
                         </a:rPr>
-                        <a:t>2,5 s</a:t>
+                        <a:t>1,6 s</a:t>
                       </a:r>
                       <a:endParaRPr lang="en-US" sz="2200" dirty="0">
                         <a:latin typeface="Roboto" charset="0"/>
@@ -7704,7 +8644,7 @@
                           <a:ea typeface="Roboto" pitchFamily="34" charset="-122"/>
                           <a:cs typeface="Roboto" pitchFamily="34" charset="-120"/>
                         </a:rPr>
-                        <a:t>9 %</a:t>
+                        <a:t>4 %</a:t>
                       </a:r>
                       <a:endParaRPr lang="en-US" sz="2200" dirty="0">
                         <a:latin typeface="Roboto" charset="0"/>
@@ -7774,7 +8714,7 @@
                           <a:ea typeface="Roboto" pitchFamily="34" charset="-122"/>
                           <a:cs typeface="Roboto" pitchFamily="34" charset="-120"/>
                         </a:rPr>
-                        <a:t>receita-premium-semanal</a:t>
+                        <a:t>ingerir-nota-imagem</a:t>
                       </a:r>
                       <a:endParaRPr lang="en-US" sz="2200" dirty="0">
                         <a:latin typeface="Roboto" charset="0"/>
@@ -7842,7 +8782,7 @@
                           <a:ea typeface="Roboto" pitchFamily="34" charset="-122"/>
                           <a:cs typeface="Roboto" pitchFamily="34" charset="-120"/>
                         </a:rPr>
-                        <a:t>4</a:t>
+                        <a:t>2</a:t>
                       </a:r>
                       <a:endParaRPr lang="en-US" sz="2200" dirty="0">
                         <a:latin typeface="Roboto" charset="0"/>
@@ -7910,7 +8850,7 @@
                           <a:ea typeface="Roboto" pitchFamily="34" charset="-122"/>
                           <a:cs typeface="Roboto" pitchFamily="34" charset="-120"/>
                         </a:rPr>
-                        <a:t>US$ 0,0085</a:t>
+                        <a:t>US$ 0,0071</a:t>
                       </a:r>
                       <a:endParaRPr lang="en-US" sz="2200" dirty="0">
                         <a:latin typeface="Roboto" charset="0"/>
@@ -7978,7 +8918,7 @@
                           <a:ea typeface="Roboto" pitchFamily="34" charset="-122"/>
                           <a:cs typeface="Roboto" pitchFamily="34" charset="-120"/>
                         </a:rPr>
-                        <a:t>5,8 s</a:t>
+                        <a:t>3,3 s</a:t>
                       </a:r>
                       <a:endParaRPr lang="en-US" sz="2200" dirty="0">
                         <a:latin typeface="Roboto" charset="0"/>
@@ -8046,7 +8986,7 @@
                           <a:ea typeface="Roboto" pitchFamily="34" charset="-122"/>
                           <a:cs typeface="Roboto" pitchFamily="34" charset="-120"/>
                         </a:rPr>
-                        <a:t>2 %</a:t>
+                        <a:t>1 %</a:t>
                       </a:r>
                       <a:endParaRPr lang="en-US" sz="2200" dirty="0">
                         <a:latin typeface="Roboto" charset="0"/>
@@ -8184,7 +9124,7 @@
                           <a:ea typeface="Roboto" pitchFamily="34" charset="-122"/>
                           <a:cs typeface="Roboto" pitchFamily="34" charset="-120"/>
                         </a:rPr>
-                        <a:t>4</a:t>
+                        <a:t>2</a:t>
                       </a:r>
                       <a:endParaRPr lang="en-US" sz="2200" dirty="0">
                         <a:latin typeface="Roboto" charset="0"/>
@@ -8252,7 +9192,7 @@
                           <a:ea typeface="Roboto" pitchFamily="34" charset="-122"/>
                           <a:cs typeface="Roboto" pitchFamily="34" charset="-120"/>
                         </a:rPr>
-                        <a:t>US$ 0,0080</a:t>
+                        <a:t>US$ 0,0054</a:t>
                       </a:r>
                       <a:endParaRPr lang="en-US" sz="2200" dirty="0">
                         <a:latin typeface="Roboto" charset="0"/>
@@ -8320,7 +9260,7 @@
                           <a:ea typeface="Roboto" pitchFamily="34" charset="-122"/>
                           <a:cs typeface="Roboto" pitchFamily="34" charset="-120"/>
                         </a:rPr>
-                        <a:t>3,9 s</a:t>
+                        <a:t>2,7 s</a:t>
                       </a:r>
                       <a:endParaRPr lang="en-US" sz="2200" dirty="0">
                         <a:latin typeface="Roboto" charset="0"/>
@@ -8388,7 +9328,7 @@
                           <a:ea typeface="Roboto" pitchFamily="34" charset="-122"/>
                           <a:cs typeface="Roboto" pitchFamily="34" charset="-120"/>
                         </a:rPr>
-                        <a:t>2 %</a:t>
+                        <a:t>1 %</a:t>
                       </a:r>
                       <a:endParaRPr lang="en-US" sz="2200" dirty="0">
                         <a:latin typeface="Roboto" charset="0"/>
@@ -8556,7 +9496,7 @@
       </p:grpSpPr>
       <p:pic>
         <p:nvPicPr>
-          <p:cNvPr id="2" name="Image 0" descr="C:\Users\PCSTUD~1\AppData\Local\Temp\claude\C--Users-PC-Studio-2-Desktop-6498-Evals\7ce78c02-4c99-40d4-bc57-5394098065c6\scratchpad\art\malha.png">    </p:cNvPr>
+          <p:cNvPr id="2" name="Image 0" descr="art\malha.png">    </p:cNvPr>
           <p:cNvPicPr>
             <a:picLocks noChangeAspect="1"/>
           </p:cNvPicPr>
@@ -8580,7 +9520,7 @@
       </p:pic>
       <p:pic>
         <p:nvPicPr>
-          <p:cNvPr id="3" name="Image 1" descr="C:\Users\PCSTUD~1\AppData\Local\Temp\claude\C--Users-PC-Studio-2-Desktop-6498-Evals\7ce78c02-4c99-40d4-bc57-5394098065c6\scratchpad\art\logo.png">    </p:cNvPr>
+          <p:cNvPr id="3" name="Image 1" descr="art\logo.png">    </p:cNvPr>
           <p:cNvPicPr>
             <a:picLocks noChangeAspect="1"/>
           </p:cNvPicPr>
@@ -8610,7 +9550,7 @@
         </p:nvSpPr>
         <p:spPr>
           <a:xfrm>
-            <a:off x="2423160" y="2148840"/>
+            <a:off x="2423160" y="1051560"/>
             <a:ext cx="19540728" cy="594360"/>
           </a:xfrm>
           <a:prstGeom prst="rect">
@@ -8649,8 +9589,8 @@
         </p:nvSpPr>
         <p:spPr>
           <a:xfrm>
-            <a:off x="2423160" y="2880360"/>
-            <a:ext cx="18745200" cy="2377440"/>
+            <a:off x="2423160" y="1783080"/>
+            <a:ext cx="19568160" cy="2377440"/>
           </a:xfrm>
           <a:prstGeom prst="rect">
             <a:avLst/>
@@ -8677,7 +9617,7 @@
                 <a:ea typeface="Encode Sans" pitchFamily="34" charset="-122"/>
                 <a:cs typeface="Encode Sans" pitchFamily="34" charset="-120"/>
               </a:rPr>
-              <a:t>19% das chamadas, 75% da conta</a:t>
+              <a:t>26% das chamadas, 90% da conta</a:t>
             </a:r>
             <a:endParaRPr lang="en-US" sz="6600" dirty="0"/>
           </a:p>
@@ -8685,52 +9625,57 @@
       </p:sp>
       <p:sp>
         <p:nvSpPr>
-          <p:cNvPr id="6" name="Text 2"/>
+          <p:cNvPr id="6" name="Shape 2"/>
+          <p:cNvSpPr/>
+          <p:nvPr/>
+        </p:nvSpPr>
+        <p:spPr>
+          <a:xfrm>
+            <a:off x="2423160" y="4526280"/>
+            <a:ext cx="2011680" cy="68580"/>
+          </a:xfrm>
+          <a:prstGeom prst="rect">
+            <a:avLst/>
+          </a:prstGeom>
+          <a:solidFill>
+            <a:srgbClr val="1F53E5"/>
+          </a:solidFill>
+          <a:ln/>
+        </p:spPr>
+      </p:sp>
+      <p:pic>
+        <p:nvPicPr>
+          <p:cNvPr id="7" name="Image 2" descr="art\seta.png">    </p:cNvPr>
+          <p:cNvPicPr>
+            <a:picLocks noChangeAspect="1"/>
+          </p:cNvPicPr>
+          <p:nvPr/>
+        </p:nvPicPr>
+        <p:blipFill>
+          <a:blip r:embed="rId3"/>
+          <a:stretch>
+            <a:fillRect/>
+          </a:stretch>
+        </p:blipFill>
+        <p:spPr>
+          <a:xfrm>
+            <a:off x="2423160" y="6871716"/>
+            <a:ext cx="475488" cy="411480"/>
+          </a:xfrm>
+          <a:prstGeom prst="rect">
+            <a:avLst/>
+          </a:prstGeom>
+        </p:spPr>
+      </p:pic>
+      <p:sp>
+        <p:nvSpPr>
+          <p:cNvPr id="8" name="Text 3"/>
           <p:cNvSpPr txBox="1"/>
           <p:nvPr/>
         </p:nvSpPr>
         <p:spPr>
           <a:xfrm>
-            <a:off x="2423160" y="5367528"/>
-            <a:ext cx="777240" cy="548640"/>
-          </a:xfrm>
-          <a:prstGeom prst="rect">
-            <a:avLst/>
-          </a:prstGeom>
-          <a:noFill/>
-          <a:ln/>
-        </p:spPr>
-        <p:txBody>
-          <a:bodyPr wrap="square" lIns="0" tIns="0" rIns="0" bIns="0" rtlCol="0" anchor="t"/>
-          <a:lstStyle/>
-          <a:p>
-            <a:pPr indent="0" marL="0">
-              <a:buNone/>
-            </a:pPr>
-            <a:r>
-              <a:rPr lang="en-US" sz="3000" b="1" dirty="0">
-                <a:solidFill>
-                  <a:srgbClr val="1F53E5"/>
-                </a:solidFill>
-                <a:latin typeface="Roboto" pitchFamily="34" charset="0"/>
-                <a:ea typeface="Roboto" pitchFamily="34" charset="-122"/>
-                <a:cs typeface="Roboto" pitchFamily="34" charset="-120"/>
-              </a:rPr>
-              <a:t>→</a:t>
-            </a:r>
-            <a:endParaRPr lang="en-US" sz="3000" dirty="0"/>
-          </a:p>
-        </p:txBody>
-      </p:sp>
-      <p:sp>
-        <p:nvSpPr>
-          <p:cNvPr id="7" name="Text 3"/>
-          <p:cNvSpPr txBox="1"/>
-          <p:nvPr/>
-        </p:nvSpPr>
-        <p:spPr>
-          <a:xfrm>
-            <a:off x="3337560" y="5349240"/>
+            <a:off x="3337560" y="6743700"/>
             <a:ext cx="17922240" cy="548640"/>
           </a:xfrm>
           <a:prstGeom prst="rect">
@@ -8752,7 +9697,7 @@
             <a:r>
               <a:rPr lang="en-US" sz="2800" b="1" dirty="0">
                 <a:solidFill>
-                  <a:srgbClr val="BDBFC7"/>
+                  <a:srgbClr val="F4F5F6"/>
                 </a:solidFill>
                 <a:latin typeface="Roboto" pitchFamily="34" charset="0"/>
                 <a:ea typeface="Roboto" pitchFamily="34" charset="-122"/>
@@ -8764,54 +9709,39 @@
           </a:p>
         </p:txBody>
       </p:sp>
-      <p:sp>
-        <p:nvSpPr>
-          <p:cNvPr id="8" name="Text 4"/>
+      <p:pic>
+        <p:nvPicPr>
+          <p:cNvPr id="9" name="Image 3" descr="art\seta.png">    </p:cNvPr>
+          <p:cNvPicPr>
+            <a:picLocks noChangeAspect="1"/>
+          </p:cNvPicPr>
+          <p:nvPr/>
+        </p:nvPicPr>
+        <p:blipFill>
+          <a:blip r:embed="rId4"/>
+          <a:stretch>
+            <a:fillRect/>
+          </a:stretch>
+        </p:blipFill>
+        <p:spPr>
+          <a:xfrm>
+            <a:off x="2423160" y="8426196"/>
+            <a:ext cx="475488" cy="411480"/>
+          </a:xfrm>
+          <a:prstGeom prst="rect">
+            <a:avLst/>
+          </a:prstGeom>
+        </p:spPr>
+      </p:pic>
+      <p:sp>
+        <p:nvSpPr>
+          <p:cNvPr id="10" name="Text 4"/>
           <p:cNvSpPr txBox="1"/>
           <p:nvPr/>
         </p:nvSpPr>
         <p:spPr>
           <a:xfrm>
-            <a:off x="2423160" y="6419088"/>
-            <a:ext cx="777240" cy="548640"/>
-          </a:xfrm>
-          <a:prstGeom prst="rect">
-            <a:avLst/>
-          </a:prstGeom>
-          <a:noFill/>
-          <a:ln/>
-        </p:spPr>
-        <p:txBody>
-          <a:bodyPr wrap="square" lIns="0" tIns="0" rIns="0" bIns="0" rtlCol="0" anchor="t"/>
-          <a:lstStyle/>
-          <a:p>
-            <a:pPr indent="0" marL="0">
-              <a:buNone/>
-            </a:pPr>
-            <a:r>
-              <a:rPr lang="en-US" sz="3000" b="1" dirty="0">
-                <a:solidFill>
-                  <a:srgbClr val="1F53E5"/>
-                </a:solidFill>
-                <a:latin typeface="Roboto" pitchFamily="34" charset="0"/>
-                <a:ea typeface="Roboto" pitchFamily="34" charset="-122"/>
-                <a:cs typeface="Roboto" pitchFamily="34" charset="-120"/>
-              </a:rPr>
-              <a:t>→</a:t>
-            </a:r>
-            <a:endParaRPr lang="en-US" sz="3000" dirty="0"/>
-          </a:p>
-        </p:txBody>
-      </p:sp>
-      <p:sp>
-        <p:nvSpPr>
-          <p:cNvPr id="9" name="Text 5"/>
-          <p:cNvSpPr txBox="1"/>
-          <p:nvPr/>
-        </p:nvSpPr>
-        <p:spPr>
-          <a:xfrm>
-            <a:off x="3337560" y="6400800"/>
+            <a:off x="3337560" y="8298180"/>
             <a:ext cx="17922240" cy="548640"/>
           </a:xfrm>
           <a:prstGeom prst="rect">
@@ -8845,54 +9775,39 @@
           </a:p>
         </p:txBody>
       </p:sp>
-      <p:sp>
-        <p:nvSpPr>
-          <p:cNvPr id="10" name="Text 6"/>
+      <p:pic>
+        <p:nvPicPr>
+          <p:cNvPr id="11" name="Image 4" descr="art\seta.png">    </p:cNvPr>
+          <p:cNvPicPr>
+            <a:picLocks noChangeAspect="1"/>
+          </p:cNvPicPr>
+          <p:nvPr/>
+        </p:nvPicPr>
+        <p:blipFill>
+          <a:blip r:embed="rId5"/>
+          <a:stretch>
+            <a:fillRect/>
+          </a:stretch>
+        </p:blipFill>
+        <p:spPr>
+          <a:xfrm>
+            <a:off x="2423160" y="9980676"/>
+            <a:ext cx="475488" cy="411480"/>
+          </a:xfrm>
+          <a:prstGeom prst="rect">
+            <a:avLst/>
+          </a:prstGeom>
+        </p:spPr>
+      </p:pic>
+      <p:sp>
+        <p:nvSpPr>
+          <p:cNvPr id="12" name="Text 5"/>
           <p:cNvSpPr txBox="1"/>
           <p:nvPr/>
         </p:nvSpPr>
         <p:spPr>
           <a:xfrm>
-            <a:off x="2423160" y="7470648"/>
-            <a:ext cx="777240" cy="548640"/>
-          </a:xfrm>
-          <a:prstGeom prst="rect">
-            <a:avLst/>
-          </a:prstGeom>
-          <a:noFill/>
-          <a:ln/>
-        </p:spPr>
-        <p:txBody>
-          <a:bodyPr wrap="square" lIns="0" tIns="0" rIns="0" bIns="0" rtlCol="0" anchor="t"/>
-          <a:lstStyle/>
-          <a:p>
-            <a:pPr indent="0" marL="0">
-              <a:buNone/>
-            </a:pPr>
-            <a:r>
-              <a:rPr lang="en-US" sz="3000" b="1" dirty="0">
-                <a:solidFill>
-                  <a:srgbClr val="1F53E5"/>
-                </a:solidFill>
-                <a:latin typeface="Roboto" pitchFamily="34" charset="0"/>
-                <a:ea typeface="Roboto" pitchFamily="34" charset="-122"/>
-                <a:cs typeface="Roboto" pitchFamily="34" charset="-120"/>
-              </a:rPr>
-              <a:t>→</a:t>
-            </a:r>
-            <a:endParaRPr lang="en-US" sz="3000" dirty="0"/>
-          </a:p>
-        </p:txBody>
-      </p:sp>
-      <p:sp>
-        <p:nvSpPr>
-          <p:cNvPr id="11" name="Text 7"/>
-          <p:cNvSpPr txBox="1"/>
-          <p:nvPr/>
-        </p:nvSpPr>
-        <p:spPr>
-          <a:xfrm>
-            <a:off x="3337560" y="7452360"/>
+            <a:off x="3337560" y="9852660"/>
             <a:ext cx="17922240" cy="548640"/>
           </a:xfrm>
           <a:prstGeom prst="rect">
@@ -8920,7 +9835,7 @@
                 <a:ea typeface="Roboto" pitchFamily="34" charset="-122"/>
                 <a:cs typeface="Roboto" pitchFamily="34" charset="-120"/>
               </a:rPr>
-              <a:t>Com a leitura de nota por foto, entram três eixos trocáveis ao vivo: geração, ingestão e visão.</a:t>
+              <a:t>Com a leitura de nota por foto, são três eixos trocáveis ao vivo: geração, ingestão e visão.</a:t>
             </a:r>
             <a:endParaRPr lang="en-US" sz="2800" dirty="0"/>
           </a:p>
@@ -8928,7 +9843,7 @@
       </p:sp>
       <p:sp>
         <p:nvSpPr>
-          <p:cNvPr id="12" name="Text 8"/>
+          <p:cNvPr id="13" name="Text 6"/>
           <p:cNvSpPr txBox="1"/>
           <p:nvPr/>
         </p:nvSpPr>
@@ -8978,6 +9893,426 @@
 <file path=ppt/slides/slide6.xml><?xml version="1.0" encoding="utf-8"?>
 <p:sld xmlns:a="http://schemas.openxmlformats.org/drawingml/2006/main" xmlns:r="http://schemas.openxmlformats.org/officeDocument/2006/relationships" xmlns:p="http://schemas.openxmlformats.org/presentationml/2006/main">
   <p:cSld name="Slide 6">
+    <p:bg>
+      <p:bgPr>
+        <a:solidFill>
+          <a:srgbClr val="0C0C0E"/>
+        </a:solidFill>
+      </p:bgPr>
+    </p:bg>
+    <p:spTree>
+      <p:nvGrpSpPr>
+        <p:cNvPr id="1" name=""/>
+        <p:cNvGrpSpPr/>
+        <p:nvPr/>
+      </p:nvGrpSpPr>
+      <p:grpSpPr>
+        <a:xfrm>
+          <a:off x="0" y="0"/>
+          <a:ext cx="0" cy="0"/>
+          <a:chOff x="0" y="0"/>
+          <a:chExt cx="0" cy="0"/>
+        </a:xfrm>
+      </p:grpSpPr>
+      <p:pic>
+        <p:nvPicPr>
+          <p:cNvPr id="2" name="Image 0" descr="art\malha.png">    </p:cNvPr>
+          <p:cNvPicPr>
+            <a:picLocks noChangeAspect="1"/>
+          </p:cNvPicPr>
+          <p:nvPr/>
+        </p:nvPicPr>
+        <p:blipFill>
+          <a:blip r:embed="rId1"/>
+          <a:stretch>
+            <a:fillRect/>
+          </a:stretch>
+        </p:blipFill>
+        <p:spPr>
+          <a:xfrm>
+            <a:off x="0" y="0"/>
+            <a:ext cx="24387048" cy="13716000"/>
+          </a:xfrm>
+          <a:prstGeom prst="rect">
+            <a:avLst/>
+          </a:prstGeom>
+        </p:spPr>
+      </p:pic>
+      <p:pic>
+        <p:nvPicPr>
+          <p:cNvPr id="3" name="Image 1" descr="art\logo.png">    </p:cNvPr>
+          <p:cNvPicPr>
+            <a:picLocks noChangeAspect="1"/>
+          </p:cNvPicPr>
+          <p:nvPr/>
+        </p:nvPicPr>
+        <p:blipFill>
+          <a:blip r:embed="rId2"/>
+          <a:stretch>
+            <a:fillRect/>
+          </a:stretch>
+        </p:blipFill>
+        <p:spPr>
+          <a:xfrm>
+            <a:off x="23436072" y="402336"/>
+            <a:ext cx="475488" cy="594360"/>
+          </a:xfrm>
+          <a:prstGeom prst="rect">
+            <a:avLst/>
+          </a:prstGeom>
+        </p:spPr>
+      </p:pic>
+      <p:sp>
+        <p:nvSpPr>
+          <p:cNvPr id="4" name="Text 0"/>
+          <p:cNvSpPr txBox="1"/>
+          <p:nvPr/>
+        </p:nvSpPr>
+        <p:spPr>
+          <a:xfrm>
+            <a:off x="2423160" y="1051560"/>
+            <a:ext cx="19540728" cy="594360"/>
+          </a:xfrm>
+          <a:prstGeom prst="rect">
+            <a:avLst/>
+          </a:prstGeom>
+          <a:noFill/>
+          <a:ln/>
+        </p:spPr>
+        <p:txBody>
+          <a:bodyPr wrap="square" lIns="0" tIns="0" rIns="0" bIns="0" rtlCol="0" anchor="ctr"/>
+          <a:lstStyle/>
+          <a:p>
+            <a:pPr indent="0" marL="0">
+              <a:buNone/>
+            </a:pPr>
+            <a:r>
+              <a:rPr lang="en-US" sz="2100" b="1" spc="250" kern="0" dirty="0">
+                <a:solidFill>
+                  <a:srgbClr val="1F53E5"/>
+                </a:solidFill>
+                <a:latin typeface="Encode Sans" pitchFamily="34" charset="0"/>
+                <a:ea typeface="Encode Sans" pitchFamily="34" charset="-122"/>
+                <a:cs typeface="Encode Sans" pitchFamily="34" charset="-120"/>
+              </a:rPr>
+              <a:t>VÍDEO 4.1</a:t>
+            </a:r>
+            <a:endParaRPr lang="en-US" sz="2100" dirty="0"/>
+          </a:p>
+        </p:txBody>
+      </p:sp>
+      <p:sp>
+        <p:nvSpPr>
+          <p:cNvPr id="5" name="Text 1"/>
+          <p:cNvSpPr txBox="1"/>
+          <p:nvPr/>
+        </p:nvSpPr>
+        <p:spPr>
+          <a:xfrm>
+            <a:off x="2423160" y="1783080"/>
+            <a:ext cx="19568160" cy="2377440"/>
+          </a:xfrm>
+          <a:prstGeom prst="rect">
+            <a:avLst/>
+          </a:prstGeom>
+          <a:noFill/>
+          <a:ln/>
+        </p:spPr>
+        <p:txBody>
+          <a:bodyPr wrap="square" lIns="0" tIns="0" rIns="0" bIns="0" rtlCol="0" anchor="t"/>
+          <a:lstStyle/>
+          <a:p>
+            <a:pPr indent="0" marL="0">
+              <a:lnSpc>
+                <a:spcPct val="105000"/>
+              </a:lnSpc>
+              <a:buNone/>
+            </a:pPr>
+            <a:r>
+              <a:rPr lang="en-US" sz="6600" dirty="0">
+                <a:solidFill>
+                  <a:srgbClr val="BDBFC7"/>
+                </a:solidFill>
+                <a:latin typeface="Encode Sans" pitchFamily="34" charset="0"/>
+                <a:ea typeface="Encode Sans" pitchFamily="34" charset="-122"/>
+                <a:cs typeface="Encode Sans" pitchFamily="34" charset="-120"/>
+              </a:rPr>
+              <a:t>A falha que não deixou rastro</a:t>
+            </a:r>
+            <a:endParaRPr lang="en-US" sz="6600" dirty="0"/>
+          </a:p>
+        </p:txBody>
+      </p:sp>
+      <p:sp>
+        <p:nvSpPr>
+          <p:cNvPr id="6" name="Shape 2"/>
+          <p:cNvSpPr/>
+          <p:nvPr/>
+        </p:nvSpPr>
+        <p:spPr>
+          <a:xfrm>
+            <a:off x="2423160" y="4526280"/>
+            <a:ext cx="2011680" cy="68580"/>
+          </a:xfrm>
+          <a:prstGeom prst="rect">
+            <a:avLst/>
+          </a:prstGeom>
+          <a:solidFill>
+            <a:srgbClr val="1F53E5"/>
+          </a:solidFill>
+          <a:ln/>
+        </p:spPr>
+      </p:sp>
+      <p:pic>
+        <p:nvPicPr>
+          <p:cNvPr id="7" name="Image 2" descr="art\seta.png">    </p:cNvPr>
+          <p:cNvPicPr>
+            <a:picLocks noChangeAspect="1"/>
+          </p:cNvPicPr>
+          <p:nvPr/>
+        </p:nvPicPr>
+        <p:blipFill>
+          <a:blip r:embed="rId3"/>
+          <a:stretch>
+            <a:fillRect/>
+          </a:stretch>
+        </p:blipFill>
+        <p:spPr>
+          <a:xfrm>
+            <a:off x="2423160" y="6871716"/>
+            <a:ext cx="475488" cy="411480"/>
+          </a:xfrm>
+          <a:prstGeom prst="rect">
+            <a:avLst/>
+          </a:prstGeom>
+        </p:spPr>
+      </p:pic>
+      <p:sp>
+        <p:nvSpPr>
+          <p:cNvPr id="8" name="Text 3"/>
+          <p:cNvSpPr txBox="1"/>
+          <p:nvPr/>
+        </p:nvSpPr>
+        <p:spPr>
+          <a:xfrm>
+            <a:off x="3337560" y="6743700"/>
+            <a:ext cx="17922240" cy="548640"/>
+          </a:xfrm>
+          <a:prstGeom prst="rect">
+            <a:avLst/>
+          </a:prstGeom>
+          <a:noFill/>
+          <a:ln/>
+        </p:spPr>
+        <p:txBody>
+          <a:bodyPr wrap="square" lIns="0" tIns="0" rIns="0" bIns="0" rtlCol="0" anchor="t"/>
+          <a:lstStyle/>
+          <a:p>
+            <a:pPr indent="0" marL="0">
+              <a:lnSpc>
+                <a:spcPct val="118000"/>
+              </a:lnSpc>
+              <a:buNone/>
+            </a:pPr>
+            <a:r>
+              <a:rPr lang="en-US" sz="2800" dirty="0">
+                <a:solidFill>
+                  <a:srgbClr val="A7A9B4"/>
+                </a:solidFill>
+                <a:latin typeface="Roboto" pitchFamily="34" charset="0"/>
+                <a:ea typeface="Roboto" pitchFamily="34" charset="-122"/>
+                <a:cs typeface="Roboto" pitchFamily="34" charset="-120"/>
+              </a:rPr>
+              <a:t>Mandei a foto de um cupom pro bot. Nada aconteceu: sem resposta, sem item, sem reação.</a:t>
+            </a:r>
+            <a:endParaRPr lang="en-US" sz="2800" dirty="0"/>
+          </a:p>
+        </p:txBody>
+      </p:sp>
+      <p:pic>
+        <p:nvPicPr>
+          <p:cNvPr id="9" name="Image 3" descr="art\seta.png">    </p:cNvPr>
+          <p:cNvPicPr>
+            <a:picLocks noChangeAspect="1"/>
+          </p:cNvPicPr>
+          <p:nvPr/>
+        </p:nvPicPr>
+        <p:blipFill>
+          <a:blip r:embed="rId4"/>
+          <a:stretch>
+            <a:fillRect/>
+          </a:stretch>
+        </p:blipFill>
+        <p:spPr>
+          <a:xfrm>
+            <a:off x="2423160" y="8426196"/>
+            <a:ext cx="475488" cy="411480"/>
+          </a:xfrm>
+          <a:prstGeom prst="rect">
+            <a:avLst/>
+          </a:prstGeom>
+        </p:spPr>
+      </p:pic>
+      <p:sp>
+        <p:nvSpPr>
+          <p:cNvPr id="10" name="Text 4"/>
+          <p:cNvSpPr txBox="1"/>
+          <p:nvPr/>
+        </p:nvSpPr>
+        <p:spPr>
+          <a:xfrm>
+            <a:off x="3337560" y="8298180"/>
+            <a:ext cx="17922240" cy="548640"/>
+          </a:xfrm>
+          <a:prstGeom prst="rect">
+            <a:avLst/>
+          </a:prstGeom>
+          <a:noFill/>
+          <a:ln/>
+        </p:spPr>
+        <p:txBody>
+          <a:bodyPr wrap="square" lIns="0" tIns="0" rIns="0" bIns="0" rtlCol="0" anchor="t"/>
+          <a:lstStyle/>
+          <a:p>
+            <a:pPr indent="0" marL="0">
+              <a:lnSpc>
+                <a:spcPct val="118000"/>
+              </a:lnSpc>
+              <a:buNone/>
+            </a:pPr>
+            <a:r>
+              <a:rPr lang="en-US" sz="2800" dirty="0">
+                <a:solidFill>
+                  <a:srgbClr val="A7A9B4"/>
+                </a:solidFill>
+                <a:latin typeface="Roboto" pitchFamily="34" charset="0"/>
+                <a:ea typeface="Roboto" pitchFamily="34" charset="-122"/>
+                <a:cs typeface="Roboto" pitchFamily="34" charset="-120"/>
+              </a:rPr>
+              <a:t>Fui atrás do rastro: log vazio, trace vazio, banco sem mudança — e o Telegram confirma que entregou.</a:t>
+            </a:r>
+            <a:endParaRPr lang="en-US" sz="2800" dirty="0"/>
+          </a:p>
+        </p:txBody>
+      </p:sp>
+      <p:pic>
+        <p:nvPicPr>
+          <p:cNvPr id="11" name="Image 4" descr="art\seta.png">    </p:cNvPr>
+          <p:cNvPicPr>
+            <a:picLocks noChangeAspect="1"/>
+          </p:cNvPicPr>
+          <p:nvPr/>
+        </p:nvPicPr>
+        <p:blipFill>
+          <a:blip r:embed="rId5"/>
+          <a:stretch>
+            <a:fillRect/>
+          </a:stretch>
+        </p:blipFill>
+        <p:spPr>
+          <a:xfrm>
+            <a:off x="2423160" y="9980676"/>
+            <a:ext cx="475488" cy="411480"/>
+          </a:xfrm>
+          <a:prstGeom prst="rect">
+            <a:avLst/>
+          </a:prstGeom>
+        </p:spPr>
+      </p:pic>
+      <p:sp>
+        <p:nvSpPr>
+          <p:cNvPr id="12" name="Text 5"/>
+          <p:cNvSpPr txBox="1"/>
+          <p:nvPr/>
+        </p:nvSpPr>
+        <p:spPr>
+          <a:xfrm>
+            <a:off x="3337560" y="9852660"/>
+            <a:ext cx="17922240" cy="548640"/>
+          </a:xfrm>
+          <a:prstGeom prst="rect">
+            <a:avLst/>
+          </a:prstGeom>
+          <a:noFill/>
+          <a:ln/>
+        </p:spPr>
+        <p:txBody>
+          <a:bodyPr wrap="square" lIns="0" tIns="0" rIns="0" bIns="0" rtlCol="0" anchor="t"/>
+          <a:lstStyle/>
+          <a:p>
+            <a:pPr indent="0" marL="0">
+              <a:lnSpc>
+                <a:spcPct val="118000"/>
+              </a:lnSpc>
+              <a:buNone/>
+            </a:pPr>
+            <a:r>
+              <a:rPr lang="en-US" sz="2800" b="1" dirty="0">
+                <a:solidFill>
+                  <a:srgbClr val="F4F5F6"/>
+                </a:solidFill>
+                <a:latin typeface="Roboto" pitchFamily="34" charset="0"/>
+                <a:ea typeface="Roboto" pitchFamily="34" charset="-122"/>
+                <a:cs typeface="Roboto" pitchFamily="34" charset="-120"/>
+              </a:rPr>
+              <a:t>Se o canal confirma a entrega e o sistema não registra nada, onde essa mensagem foi parar?</a:t>
+            </a:r>
+            <a:endParaRPr lang="en-US" sz="2800" dirty="0"/>
+          </a:p>
+        </p:txBody>
+      </p:sp>
+      <p:sp>
+        <p:nvSpPr>
+          <p:cNvPr id="13" name="Text 6"/>
+          <p:cNvSpPr txBox="1"/>
+          <p:nvPr/>
+        </p:nvSpPr>
+        <p:spPr>
+          <a:xfrm>
+            <a:off x="2423160" y="12755880"/>
+            <a:ext cx="19540728" cy="457200"/>
+          </a:xfrm>
+          <a:prstGeom prst="rect">
+            <a:avLst/>
+          </a:prstGeom>
+          <a:noFill/>
+          <a:ln/>
+        </p:spPr>
+        <p:txBody>
+          <a:bodyPr wrap="square" lIns="0" tIns="0" rIns="0" bIns="0" rtlCol="0" anchor="ctr"/>
+          <a:lstStyle/>
+          <a:p>
+            <a:pPr indent="0" marL="0">
+              <a:buNone/>
+            </a:pPr>
+            <a:r>
+              <a:rPr lang="en-US" sz="1500" dirty="0">
+                <a:solidFill>
+                  <a:srgbClr val="A7A9B4">
+                    <a:alpha val="65000"/>
+                  </a:srgbClr>
+                </a:solidFill>
+                <a:latin typeface="Roboto" pitchFamily="34" charset="0"/>
+                <a:ea typeface="Roboto" pitchFamily="34" charset="-122"/>
+                <a:cs typeface="Roboto" pitchFamily="34" charset="-120"/>
+              </a:rPr>
+              <a:t>Aula 4 — Detectar, diagnosticar e corrigir — Evals, observabilidade e conformidade</a:t>
+            </a:r>
+            <a:endParaRPr lang="en-US" sz="1500" dirty="0"/>
+          </a:p>
+        </p:txBody>
+      </p:sp>
+    </p:spTree>
+  </p:cSld>
+  <p:clrMapOvr>
+    <a:masterClrMapping/>
+  </p:clrMapOvr>
+</p:sld>
+</file>
+
+<file path=ppt/slides/slide7.xml><?xml version="1.0" encoding="utf-8"?>
+<p:sld xmlns:a="http://schemas.openxmlformats.org/drawingml/2006/main" xmlns:r="http://schemas.openxmlformats.org/officeDocument/2006/relationships" xmlns:p="http://schemas.openxmlformats.org/presentationml/2006/main">
+  <p:cSld name="Slide 7">
     <p:bg>
       <p:bgPr>
         <a:solidFill>
@@ -9001,7 +10336,7 @@
       </p:grpSpPr>
       <p:pic>
         <p:nvPicPr>
-          <p:cNvPr id="2" name="Image 0" descr="C:\Users\PCSTUD~1\AppData\Local\Temp\claude\C--Users-PC-Studio-2-Desktop-6498-Evals\7ce78c02-4c99-40d4-bc57-5394098065c6\scratchpad\art\logo.png">    </p:cNvPr>
+          <p:cNvPr id="2" name="Image 0" descr="art\logo.png">    </p:cNvPr>
           <p:cNvPicPr>
             <a:picLocks noChangeAspect="1"/>
           </p:cNvPicPr>
@@ -9062,532 +10397,6 @@
               <a:t>4.2 Diagnosticando a causa</a:t>
             </a:r>
             <a:endParaRPr lang="en-US" sz="9600" dirty="0"/>
-          </a:p>
-        </p:txBody>
-      </p:sp>
-    </p:spTree>
-  </p:cSld>
-  <p:clrMapOvr>
-    <a:masterClrMapping/>
-  </p:clrMapOvr>
-</p:sld>
-</file>
-
-<file path=ppt/slides/slide7.xml><?xml version="1.0" encoding="utf-8"?>
-<p:sld xmlns:a="http://schemas.openxmlformats.org/drawingml/2006/main" xmlns:r="http://schemas.openxmlformats.org/officeDocument/2006/relationships" xmlns:p="http://schemas.openxmlformats.org/presentationml/2006/main">
-  <p:cSld name="Slide 7">
-    <p:bg>
-      <p:bgPr>
-        <a:solidFill>
-          <a:srgbClr val="0C0C0E"/>
-        </a:solidFill>
-      </p:bgPr>
-    </p:bg>
-    <p:spTree>
-      <p:nvGrpSpPr>
-        <p:cNvPr id="1" name=""/>
-        <p:cNvGrpSpPr/>
-        <p:nvPr/>
-      </p:nvGrpSpPr>
-      <p:grpSpPr>
-        <a:xfrm>
-          <a:off x="0" y="0"/>
-          <a:ext cx="0" cy="0"/>
-          <a:chOff x="0" y="0"/>
-          <a:chExt cx="0" cy="0"/>
-        </a:xfrm>
-      </p:grpSpPr>
-      <p:pic>
-        <p:nvPicPr>
-          <p:cNvPr id="2" name="Image 0" descr="C:\Users\PCSTUD~1\AppData\Local\Temp\claude\C--Users-PC-Studio-2-Desktop-6498-Evals\7ce78c02-4c99-40d4-bc57-5394098065c6\scratchpad\art\malha.png">    </p:cNvPr>
-          <p:cNvPicPr>
-            <a:picLocks noChangeAspect="1"/>
-          </p:cNvPicPr>
-          <p:nvPr/>
-        </p:nvPicPr>
-        <p:blipFill>
-          <a:blip r:embed="rId1"/>
-          <a:stretch>
-            <a:fillRect/>
-          </a:stretch>
-        </p:blipFill>
-        <p:spPr>
-          <a:xfrm>
-            <a:off x="0" y="0"/>
-            <a:ext cx="24387048" cy="13716000"/>
-          </a:xfrm>
-          <a:prstGeom prst="rect">
-            <a:avLst/>
-          </a:prstGeom>
-        </p:spPr>
-      </p:pic>
-      <p:pic>
-        <p:nvPicPr>
-          <p:cNvPr id="3" name="Image 1" descr="C:\Users\PCSTUD~1\AppData\Local\Temp\claude\C--Users-PC-Studio-2-Desktop-6498-Evals\7ce78c02-4c99-40d4-bc57-5394098065c6\scratchpad\art\logo.png">    </p:cNvPr>
-          <p:cNvPicPr>
-            <a:picLocks noChangeAspect="1"/>
-          </p:cNvPicPr>
-          <p:nvPr/>
-        </p:nvPicPr>
-        <p:blipFill>
-          <a:blip r:embed="rId2"/>
-          <a:stretch>
-            <a:fillRect/>
-          </a:stretch>
-        </p:blipFill>
-        <p:spPr>
-          <a:xfrm>
-            <a:off x="23436072" y="402336"/>
-            <a:ext cx="475488" cy="594360"/>
-          </a:xfrm>
-          <a:prstGeom prst="rect">
-            <a:avLst/>
-          </a:prstGeom>
-        </p:spPr>
-      </p:pic>
-      <p:sp>
-        <p:nvSpPr>
-          <p:cNvPr id="4" name="Text 0"/>
-          <p:cNvSpPr txBox="1"/>
-          <p:nvPr/>
-        </p:nvSpPr>
-        <p:spPr>
-          <a:xfrm>
-            <a:off x="2423160" y="2148840"/>
-            <a:ext cx="19540728" cy="594360"/>
-          </a:xfrm>
-          <a:prstGeom prst="rect">
-            <a:avLst/>
-          </a:prstGeom>
-          <a:noFill/>
-          <a:ln/>
-        </p:spPr>
-        <p:txBody>
-          <a:bodyPr wrap="square" lIns="0" tIns="0" rIns="0" bIns="0" rtlCol="0" anchor="ctr"/>
-          <a:lstStyle/>
-          <a:p>
-            <a:pPr indent="0" marL="0">
-              <a:buNone/>
-            </a:pPr>
-            <a:r>
-              <a:rPr lang="en-US" sz="2100" b="1" spc="250" kern="0" dirty="0">
-                <a:solidFill>
-                  <a:srgbClr val="1F53E5"/>
-                </a:solidFill>
-                <a:latin typeface="Encode Sans" pitchFamily="34" charset="0"/>
-                <a:ea typeface="Encode Sans" pitchFamily="34" charset="-122"/>
-                <a:cs typeface="Encode Sans" pitchFamily="34" charset="-120"/>
-              </a:rPr>
-              <a:t>VÍDEO 4.2 — EPISÓDIO A</a:t>
-            </a:r>
-            <a:endParaRPr lang="en-US" sz="2100" dirty="0"/>
-          </a:p>
-        </p:txBody>
-      </p:sp>
-      <p:sp>
-        <p:nvSpPr>
-          <p:cNvPr id="5" name="Text 1"/>
-          <p:cNvSpPr txBox="1"/>
-          <p:nvPr/>
-        </p:nvSpPr>
-        <p:spPr>
-          <a:xfrm>
-            <a:off x="2423160" y="2880360"/>
-            <a:ext cx="18745200" cy="2377440"/>
-          </a:xfrm>
-          <a:prstGeom prst="rect">
-            <a:avLst/>
-          </a:prstGeom>
-          <a:noFill/>
-          <a:ln/>
-        </p:spPr>
-        <p:txBody>
-          <a:bodyPr wrap="square" lIns="0" tIns="0" rIns="0" bIns="0" rtlCol="0" anchor="t"/>
-          <a:lstStyle/>
-          <a:p>
-            <a:pPr indent="0" marL="0">
-              <a:lnSpc>
-                <a:spcPct val="105000"/>
-              </a:lnSpc>
-              <a:buNone/>
-            </a:pPr>
-            <a:r>
-              <a:rPr lang="en-US" sz="6600" dirty="0">
-                <a:solidFill>
-                  <a:srgbClr val="BDBFC7"/>
-                </a:solidFill>
-                <a:latin typeface="Encode Sans" pitchFamily="34" charset="0"/>
-                <a:ea typeface="Encode Sans" pitchFamily="34" charset="-122"/>
-                <a:cs typeface="Encode Sans" pitchFamily="34" charset="-120"/>
-              </a:rPr>
-              <a:t>Dois erros. Ou um só?</a:t>
-            </a:r>
-            <a:endParaRPr lang="en-US" sz="6600" dirty="0"/>
-          </a:p>
-        </p:txBody>
-      </p:sp>
-      <p:sp>
-        <p:nvSpPr>
-          <p:cNvPr id="6" name="Text 2"/>
-          <p:cNvSpPr txBox="1"/>
-          <p:nvPr/>
-        </p:nvSpPr>
-        <p:spPr>
-          <a:xfrm>
-            <a:off x="2423160" y="5367528"/>
-            <a:ext cx="777240" cy="548640"/>
-          </a:xfrm>
-          <a:prstGeom prst="rect">
-            <a:avLst/>
-          </a:prstGeom>
-          <a:noFill/>
-          <a:ln/>
-        </p:spPr>
-        <p:txBody>
-          <a:bodyPr wrap="square" lIns="0" tIns="0" rIns="0" bIns="0" rtlCol="0" anchor="t"/>
-          <a:lstStyle/>
-          <a:p>
-            <a:pPr indent="0" marL="0">
-              <a:buNone/>
-            </a:pPr>
-            <a:r>
-              <a:rPr lang="en-US" sz="3000" b="1" dirty="0">
-                <a:solidFill>
-                  <a:srgbClr val="1F53E5"/>
-                </a:solidFill>
-                <a:latin typeface="Roboto" pitchFamily="34" charset="0"/>
-                <a:ea typeface="Roboto" pitchFamily="34" charset="-122"/>
-                <a:cs typeface="Roboto" pitchFamily="34" charset="-120"/>
-              </a:rPr>
-              <a:t>→</a:t>
-            </a:r>
-            <a:endParaRPr lang="en-US" sz="3000" dirty="0"/>
-          </a:p>
-        </p:txBody>
-      </p:sp>
-      <p:sp>
-        <p:nvSpPr>
-          <p:cNvPr id="7" name="Text 3"/>
-          <p:cNvSpPr txBox="1"/>
-          <p:nvPr/>
-        </p:nvSpPr>
-        <p:spPr>
-          <a:xfrm>
-            <a:off x="3337560" y="5349240"/>
-            <a:ext cx="17922240" cy="548640"/>
-          </a:xfrm>
-          <a:prstGeom prst="rect">
-            <a:avLst/>
-          </a:prstGeom>
-          <a:noFill/>
-          <a:ln/>
-        </p:spPr>
-        <p:txBody>
-          <a:bodyPr wrap="square" lIns="0" tIns="0" rIns="0" bIns="0" rtlCol="0" anchor="t"/>
-          <a:lstStyle/>
-          <a:p>
-            <a:pPr indent="0" marL="0">
-              <a:lnSpc>
-                <a:spcPct val="118000"/>
-              </a:lnSpc>
-              <a:buNone/>
-            </a:pPr>
-            <a:r>
-              <a:rPr lang="en-US" sz="2800" dirty="0">
-                <a:solidFill>
-                  <a:srgbClr val="A7A9B4"/>
-                </a:solidFill>
-                <a:latin typeface="Roboto" pitchFamily="34" charset="0"/>
-                <a:ea typeface="Roboto" pitchFamily="34" charset="-122"/>
-                <a:cs typeface="Roboto" pitchFamily="34" charset="-120"/>
-              </a:rPr>
-              <a:t>O sintoma: mandei uma nota pelo Telegram e não aconteceu nada.</a:t>
-            </a:r>
-            <a:endParaRPr lang="en-US" sz="2800" dirty="0"/>
-          </a:p>
-        </p:txBody>
-      </p:sp>
-      <p:sp>
-        <p:nvSpPr>
-          <p:cNvPr id="8" name="Text 4"/>
-          <p:cNvSpPr txBox="1"/>
-          <p:nvPr/>
-        </p:nvSpPr>
-        <p:spPr>
-          <a:xfrm>
-            <a:off x="2423160" y="6419088"/>
-            <a:ext cx="777240" cy="548640"/>
-          </a:xfrm>
-          <a:prstGeom prst="rect">
-            <a:avLst/>
-          </a:prstGeom>
-          <a:noFill/>
-          <a:ln/>
-        </p:spPr>
-        <p:txBody>
-          <a:bodyPr wrap="square" lIns="0" tIns="0" rIns="0" bIns="0" rtlCol="0" anchor="t"/>
-          <a:lstStyle/>
-          <a:p>
-            <a:pPr indent="0" marL="0">
-              <a:buNone/>
-            </a:pPr>
-            <a:r>
-              <a:rPr lang="en-US" sz="3000" b="1" dirty="0">
-                <a:solidFill>
-                  <a:srgbClr val="1F53E5"/>
-                </a:solidFill>
-                <a:latin typeface="Roboto" pitchFamily="34" charset="0"/>
-                <a:ea typeface="Roboto" pitchFamily="34" charset="-122"/>
-                <a:cs typeface="Roboto" pitchFamily="34" charset="-120"/>
-              </a:rPr>
-              <a:t>→</a:t>
-            </a:r>
-            <a:endParaRPr lang="en-US" sz="3000" dirty="0"/>
-          </a:p>
-        </p:txBody>
-      </p:sp>
-      <p:sp>
-        <p:nvSpPr>
-          <p:cNvPr id="9" name="Text 5"/>
-          <p:cNvSpPr txBox="1"/>
-          <p:nvPr/>
-        </p:nvSpPr>
-        <p:spPr>
-          <a:xfrm>
-            <a:off x="3337560" y="6400800"/>
-            <a:ext cx="17922240" cy="1097280"/>
-          </a:xfrm>
-          <a:prstGeom prst="rect">
-            <a:avLst/>
-          </a:prstGeom>
-          <a:noFill/>
-          <a:ln/>
-        </p:spPr>
-        <p:txBody>
-          <a:bodyPr wrap="square" lIns="0" tIns="0" rIns="0" bIns="0" rtlCol="0" anchor="t"/>
-          <a:lstStyle/>
-          <a:p>
-            <a:pPr indent="0" marL="0">
-              <a:lnSpc>
-                <a:spcPct val="118000"/>
-              </a:lnSpc>
-              <a:buNone/>
-            </a:pPr>
-            <a:r>
-              <a:rPr lang="en-US" sz="2800" dirty="0">
-                <a:solidFill>
-                  <a:srgbClr val="A7A9B4"/>
-                </a:solidFill>
-                <a:latin typeface="Roboto" pitchFamily="34" charset="0"/>
-                <a:ea typeface="Roboto" pitchFamily="34" charset="-122"/>
-                <a:cs typeface="Roboto" pitchFamily="34" charset="-120"/>
-              </a:rPr>
-              <a:t>O que eu junto: o registro tem duas linhas de erro, mesma mensagem, com 8 milionésimos de segundo entre elas.</a:t>
-            </a:r>
-            <a:endParaRPr lang="en-US" sz="2800" dirty="0"/>
-          </a:p>
-        </p:txBody>
-      </p:sp>
-      <p:sp>
-        <p:nvSpPr>
-          <p:cNvPr id="10" name="Text 6"/>
-          <p:cNvSpPr txBox="1"/>
-          <p:nvPr/>
-        </p:nvSpPr>
-        <p:spPr>
-          <a:xfrm>
-            <a:off x="2423160" y="8019288"/>
-            <a:ext cx="777240" cy="548640"/>
-          </a:xfrm>
-          <a:prstGeom prst="rect">
-            <a:avLst/>
-          </a:prstGeom>
-          <a:noFill/>
-          <a:ln/>
-        </p:spPr>
-        <p:txBody>
-          <a:bodyPr wrap="square" lIns="0" tIns="0" rIns="0" bIns="0" rtlCol="0" anchor="t"/>
-          <a:lstStyle/>
-          <a:p>
-            <a:pPr indent="0" marL="0">
-              <a:buNone/>
-            </a:pPr>
-            <a:r>
-              <a:rPr lang="en-US" sz="3000" b="1" dirty="0">
-                <a:solidFill>
-                  <a:srgbClr val="1F53E5"/>
-                </a:solidFill>
-                <a:latin typeface="Roboto" pitchFamily="34" charset="0"/>
-                <a:ea typeface="Roboto" pitchFamily="34" charset="-122"/>
-                <a:cs typeface="Roboto" pitchFamily="34" charset="-120"/>
-              </a:rPr>
-              <a:t>→</a:t>
-            </a:r>
-            <a:endParaRPr lang="en-US" sz="3000" dirty="0"/>
-          </a:p>
-        </p:txBody>
-      </p:sp>
-      <p:sp>
-        <p:nvSpPr>
-          <p:cNvPr id="11" name="Text 7"/>
-          <p:cNvSpPr txBox="1"/>
-          <p:nvPr/>
-        </p:nvSpPr>
-        <p:spPr>
-          <a:xfrm>
-            <a:off x="3337560" y="8001000"/>
-            <a:ext cx="17922240" cy="548640"/>
-          </a:xfrm>
-          <a:prstGeom prst="rect">
-            <a:avLst/>
-          </a:prstGeom>
-          <a:noFill/>
-          <a:ln/>
-        </p:spPr>
-        <p:txBody>
-          <a:bodyPr wrap="square" lIns="0" tIns="0" rIns="0" bIns="0" rtlCol="0" anchor="t"/>
-          <a:lstStyle/>
-          <a:p>
-            <a:pPr indent="0" marL="0">
-              <a:lnSpc>
-                <a:spcPct val="118000"/>
-              </a:lnSpc>
-              <a:buNone/>
-            </a:pPr>
-            <a:r>
-              <a:rPr lang="en-US" sz="2800" dirty="0">
-                <a:solidFill>
-                  <a:srgbClr val="A7A9B4"/>
-                </a:solidFill>
-                <a:latin typeface="Roboto" pitchFamily="34" charset="0"/>
-                <a:ea typeface="Roboto" pitchFamily="34" charset="-122"/>
-                <a:cs typeface="Roboto" pitchFamily="34" charset="-120"/>
-              </a:rPr>
-              <a:t>Não sei o que a mensagem de erro significa — e não preciso saber para investigar.</a:t>
-            </a:r>
-            <a:endParaRPr lang="en-US" sz="2800" dirty="0"/>
-          </a:p>
-        </p:txBody>
-      </p:sp>
-      <p:sp>
-        <p:nvSpPr>
-          <p:cNvPr id="12" name="Text 8"/>
-          <p:cNvSpPr txBox="1"/>
-          <p:nvPr/>
-        </p:nvSpPr>
-        <p:spPr>
-          <a:xfrm>
-            <a:off x="2423160" y="9070848"/>
-            <a:ext cx="777240" cy="548640"/>
-          </a:xfrm>
-          <a:prstGeom prst="rect">
-            <a:avLst/>
-          </a:prstGeom>
-          <a:noFill/>
-          <a:ln/>
-        </p:spPr>
-        <p:txBody>
-          <a:bodyPr wrap="square" lIns="0" tIns="0" rIns="0" bIns="0" rtlCol="0" anchor="t"/>
-          <a:lstStyle/>
-          <a:p>
-            <a:pPr indent="0" marL="0">
-              <a:buNone/>
-            </a:pPr>
-            <a:r>
-              <a:rPr lang="en-US" sz="3000" b="1" dirty="0">
-                <a:solidFill>
-                  <a:srgbClr val="1F53E5"/>
-                </a:solidFill>
-                <a:latin typeface="Roboto" pitchFamily="34" charset="0"/>
-                <a:ea typeface="Roboto" pitchFamily="34" charset="-122"/>
-                <a:cs typeface="Roboto" pitchFamily="34" charset="-120"/>
-              </a:rPr>
-              <a:t>→</a:t>
-            </a:r>
-            <a:endParaRPr lang="en-US" sz="3000" dirty="0"/>
-          </a:p>
-        </p:txBody>
-      </p:sp>
-      <p:sp>
-        <p:nvSpPr>
-          <p:cNvPr id="13" name="Text 9"/>
-          <p:cNvSpPr txBox="1"/>
-          <p:nvPr/>
-        </p:nvSpPr>
-        <p:spPr>
-          <a:xfrm>
-            <a:off x="3337560" y="9052560"/>
-            <a:ext cx="17922240" cy="548640"/>
-          </a:xfrm>
-          <a:prstGeom prst="rect">
-            <a:avLst/>
-          </a:prstGeom>
-          <a:noFill/>
-          <a:ln/>
-        </p:spPr>
-        <p:txBody>
-          <a:bodyPr wrap="square" lIns="0" tIns="0" rIns="0" bIns="0" rtlCol="0" anchor="t"/>
-          <a:lstStyle/>
-          <a:p>
-            <a:pPr indent="0" marL="0">
-              <a:lnSpc>
-                <a:spcPct val="118000"/>
-              </a:lnSpc>
-              <a:buNone/>
-            </a:pPr>
-            <a:r>
-              <a:rPr lang="en-US" sz="2800" b="1" dirty="0">
-                <a:solidFill>
-                  <a:srgbClr val="BDBFC7"/>
-                </a:solidFill>
-                <a:latin typeface="Roboto" pitchFamily="34" charset="0"/>
-                <a:ea typeface="Roboto" pitchFamily="34" charset="-122"/>
-                <a:cs typeface="Roboto" pitchFamily="34" charset="-120"/>
-              </a:rPr>
-              <a:t>O que eu levo ao Claude: “aconteceram dois erros aqui, ou um só? Repara no horário das duas linhas.”</a:t>
-            </a:r>
-            <a:endParaRPr lang="en-US" sz="2800" dirty="0"/>
-          </a:p>
-        </p:txBody>
-      </p:sp>
-      <p:sp>
-        <p:nvSpPr>
-          <p:cNvPr id="14" name="Text 10"/>
-          <p:cNvSpPr txBox="1"/>
-          <p:nvPr/>
-        </p:nvSpPr>
-        <p:spPr>
-          <a:xfrm>
-            <a:off x="2423160" y="12755880"/>
-            <a:ext cx="19540728" cy="457200"/>
-          </a:xfrm>
-          <a:prstGeom prst="rect">
-            <a:avLst/>
-          </a:prstGeom>
-          <a:noFill/>
-          <a:ln/>
-        </p:spPr>
-        <p:txBody>
-          <a:bodyPr wrap="square" lIns="0" tIns="0" rIns="0" bIns="0" rtlCol="0" anchor="ctr"/>
-          <a:lstStyle/>
-          <a:p>
-            <a:pPr indent="0" marL="0">
-              <a:buNone/>
-            </a:pPr>
-            <a:r>
-              <a:rPr lang="en-US" sz="1500" dirty="0">
-                <a:solidFill>
-                  <a:srgbClr val="A7A9B4">
-                    <a:alpha val="65000"/>
-                  </a:srgbClr>
-                </a:solidFill>
-                <a:latin typeface="Roboto" pitchFamily="34" charset="0"/>
-                <a:ea typeface="Roboto" pitchFamily="34" charset="-122"/>
-                <a:cs typeface="Roboto" pitchFamily="34" charset="-120"/>
-              </a:rPr>
-              <a:t>Aula 4 — Detectar, diagnosticar e corrigir — Evals, observabilidade e conformidade</a:t>
-            </a:r>
-            <a:endParaRPr lang="en-US" sz="1500" dirty="0"/>
           </a:p>
         </p:txBody>
       </p:sp>
@@ -9625,7 +10434,7 @@
       </p:grpSpPr>
       <p:pic>
         <p:nvPicPr>
-          <p:cNvPr id="2" name="Image 0" descr="C:\Users\PCSTUD~1\AppData\Local\Temp\claude\C--Users-PC-Studio-2-Desktop-6498-Evals\7ce78c02-4c99-40d4-bc57-5394098065c6\scratchpad\art\malha.png">    </p:cNvPr>
+          <p:cNvPr id="2" name="Image 0" descr="art\malha.png">    </p:cNvPr>
           <p:cNvPicPr>
             <a:picLocks noChangeAspect="1"/>
           </p:cNvPicPr>
@@ -9649,7 +10458,7 @@
       </p:pic>
       <p:pic>
         <p:nvPicPr>
-          <p:cNvPr id="3" name="Image 1" descr="C:\Users\PCSTUD~1\AppData\Local\Temp\claude\C--Users-PC-Studio-2-Desktop-6498-Evals\7ce78c02-4c99-40d4-bc57-5394098065c6\scratchpad\art\logo.png">    </p:cNvPr>
+          <p:cNvPr id="3" name="Image 1" descr="art\logo.png">    </p:cNvPr>
           <p:cNvPicPr>
             <a:picLocks noChangeAspect="1"/>
           </p:cNvPicPr>
@@ -9679,7 +10488,7 @@
         </p:nvSpPr>
         <p:spPr>
           <a:xfrm>
-            <a:off x="2423160" y="2148840"/>
+            <a:off x="2423160" y="1051560"/>
             <a:ext cx="19540728" cy="594360"/>
           </a:xfrm>
           <a:prstGeom prst="rect">
@@ -9704,7 +10513,7 @@
                 <a:ea typeface="Encode Sans" pitchFamily="34" charset="-122"/>
                 <a:cs typeface="Encode Sans" pitchFamily="34" charset="-120"/>
               </a:rPr>
-              <a:t>VÍDEO 4.2 — EPISÓDIO B</a:t>
+              <a:t>VÍDEO 4.2 — EPISÓDIO A</a:t>
             </a:r>
             <a:endParaRPr lang="en-US" sz="2100" dirty="0"/>
           </a:p>
@@ -9718,8 +10527,8 @@
         </p:nvSpPr>
         <p:spPr>
           <a:xfrm>
-            <a:off x="2423160" y="2880360"/>
-            <a:ext cx="18745200" cy="2377440"/>
+            <a:off x="2423160" y="1783080"/>
+            <a:ext cx="19568160" cy="2377440"/>
           </a:xfrm>
           <a:prstGeom prst="rect">
             <a:avLst/>
@@ -9746,7 +10555,7 @@
                 <a:ea typeface="Encode Sans" pitchFamily="34" charset="-122"/>
                 <a:cs typeface="Encode Sans" pitchFamily="34" charset="-120"/>
               </a:rPr>
-              <a:t>A falha perfeitamente silenciosa</a:t>
+              <a:t>Dois erros. Ou um só?</a:t>
             </a:r>
             <a:endParaRPr lang="en-US" sz="6600" dirty="0"/>
           </a:p>
@@ -9754,52 +10563,57 @@
       </p:sp>
       <p:sp>
         <p:nvSpPr>
-          <p:cNvPr id="6" name="Text 2"/>
+          <p:cNvPr id="6" name="Shape 2"/>
+          <p:cNvSpPr/>
+          <p:nvPr/>
+        </p:nvSpPr>
+        <p:spPr>
+          <a:xfrm>
+            <a:off x="2423160" y="4526280"/>
+            <a:ext cx="2011680" cy="68580"/>
+          </a:xfrm>
+          <a:prstGeom prst="rect">
+            <a:avLst/>
+          </a:prstGeom>
+          <a:solidFill>
+            <a:srgbClr val="1F53E5"/>
+          </a:solidFill>
+          <a:ln/>
+        </p:spPr>
+      </p:sp>
+      <p:pic>
+        <p:nvPicPr>
+          <p:cNvPr id="7" name="Image 2" descr="art\seta.png">    </p:cNvPr>
+          <p:cNvPicPr>
+            <a:picLocks noChangeAspect="1"/>
+          </p:cNvPicPr>
+          <p:nvPr/>
+        </p:nvPicPr>
+        <p:blipFill>
+          <a:blip r:embed="rId3"/>
+          <a:stretch>
+            <a:fillRect/>
+          </a:stretch>
+        </p:blipFill>
+        <p:spPr>
+          <a:xfrm>
+            <a:off x="2423160" y="6094476"/>
+            <a:ext cx="475488" cy="411480"/>
+          </a:xfrm>
+          <a:prstGeom prst="rect">
+            <a:avLst/>
+          </a:prstGeom>
+        </p:spPr>
+      </p:pic>
+      <p:sp>
+        <p:nvSpPr>
+          <p:cNvPr id="8" name="Text 3"/>
           <p:cNvSpPr txBox="1"/>
           <p:nvPr/>
         </p:nvSpPr>
         <p:spPr>
           <a:xfrm>
-            <a:off x="2423160" y="5367528"/>
-            <a:ext cx="777240" cy="548640"/>
-          </a:xfrm>
-          <a:prstGeom prst="rect">
-            <a:avLst/>
-          </a:prstGeom>
-          <a:noFill/>
-          <a:ln/>
-        </p:spPr>
-        <p:txBody>
-          <a:bodyPr wrap="square" lIns="0" tIns="0" rIns="0" bIns="0" rtlCol="0" anchor="t"/>
-          <a:lstStyle/>
-          <a:p>
-            <a:pPr indent="0" marL="0">
-              <a:buNone/>
-            </a:pPr>
-            <a:r>
-              <a:rPr lang="en-US" sz="3000" b="1" dirty="0">
-                <a:solidFill>
-                  <a:srgbClr val="1F53E5"/>
-                </a:solidFill>
-                <a:latin typeface="Roboto" pitchFamily="34" charset="0"/>
-                <a:ea typeface="Roboto" pitchFamily="34" charset="-122"/>
-                <a:cs typeface="Roboto" pitchFamily="34" charset="-120"/>
-              </a:rPr>
-              <a:t>→</a:t>
-            </a:r>
-            <a:endParaRPr lang="en-US" sz="3000" dirty="0"/>
-          </a:p>
-        </p:txBody>
-      </p:sp>
-      <p:sp>
-        <p:nvSpPr>
-          <p:cNvPr id="7" name="Text 3"/>
-          <p:cNvSpPr txBox="1"/>
-          <p:nvPr/>
-        </p:nvSpPr>
-        <p:spPr>
-          <a:xfrm>
-            <a:off x="3337560" y="5349240"/>
+            <a:off x="3337560" y="5966460"/>
             <a:ext cx="17922240" cy="548640"/>
           </a:xfrm>
           <a:prstGeom prst="rect">
@@ -9827,60 +10641,45 @@
                 <a:ea typeface="Roboto" pitchFamily="34" charset="-122"/>
                 <a:cs typeface="Roboto" pitchFamily="34" charset="-120"/>
               </a:rPr>
-              <a:t>O sintoma: mandei a foto do cupom. Sem resposta, sem item no estoque, sem nada.</a:t>
+              <a:t>O sintoma: mandei uma nota pelo Telegram e não aconteceu nada.</a:t>
             </a:r>
             <a:endParaRPr lang="en-US" sz="2800" dirty="0"/>
           </a:p>
         </p:txBody>
       </p:sp>
-      <p:sp>
-        <p:nvSpPr>
-          <p:cNvPr id="8" name="Text 4"/>
+      <p:pic>
+        <p:nvPicPr>
+          <p:cNvPr id="9" name="Image 3" descr="art\seta.png">    </p:cNvPr>
+          <p:cNvPicPr>
+            <a:picLocks noChangeAspect="1"/>
+          </p:cNvPicPr>
+          <p:nvPr/>
+        </p:nvPicPr>
+        <p:blipFill>
+          <a:blip r:embed="rId4"/>
+          <a:stretch>
+            <a:fillRect/>
+          </a:stretch>
+        </p:blipFill>
+        <p:spPr>
+          <a:xfrm>
+            <a:off x="2423160" y="7648956"/>
+            <a:ext cx="475488" cy="411480"/>
+          </a:xfrm>
+          <a:prstGeom prst="rect">
+            <a:avLst/>
+          </a:prstGeom>
+        </p:spPr>
+      </p:pic>
+      <p:sp>
+        <p:nvSpPr>
+          <p:cNvPr id="10" name="Text 4"/>
           <p:cNvSpPr txBox="1"/>
           <p:nvPr/>
         </p:nvSpPr>
         <p:spPr>
           <a:xfrm>
-            <a:off x="2423160" y="6419088"/>
-            <a:ext cx="777240" cy="548640"/>
-          </a:xfrm>
-          <a:prstGeom prst="rect">
-            <a:avLst/>
-          </a:prstGeom>
-          <a:noFill/>
-          <a:ln/>
-        </p:spPr>
-        <p:txBody>
-          <a:bodyPr wrap="square" lIns="0" tIns="0" rIns="0" bIns="0" rtlCol="0" anchor="t"/>
-          <a:lstStyle/>
-          <a:p>
-            <a:pPr indent="0" marL="0">
-              <a:buNone/>
-            </a:pPr>
-            <a:r>
-              <a:rPr lang="en-US" sz="3000" b="1" dirty="0">
-                <a:solidFill>
-                  <a:srgbClr val="1F53E5"/>
-                </a:solidFill>
-                <a:latin typeface="Roboto" pitchFamily="34" charset="0"/>
-                <a:ea typeface="Roboto" pitchFamily="34" charset="-122"/>
-                <a:cs typeface="Roboto" pitchFamily="34" charset="-120"/>
-              </a:rPr>
-              <a:t>→</a:t>
-            </a:r>
-            <a:endParaRPr lang="en-US" sz="3000" dirty="0"/>
-          </a:p>
-        </p:txBody>
-      </p:sp>
-      <p:sp>
-        <p:nvSpPr>
-          <p:cNvPr id="9" name="Text 5"/>
-          <p:cNvSpPr txBox="1"/>
-          <p:nvPr/>
-        </p:nvSpPr>
-        <p:spPr>
-          <a:xfrm>
-            <a:off x="3337560" y="6400800"/>
+            <a:off x="3337560" y="7520940"/>
             <a:ext cx="17922240" cy="548640"/>
           </a:xfrm>
           <a:prstGeom prst="rect">
@@ -9908,60 +10707,45 @@
                 <a:ea typeface="Roboto" pitchFamily="34" charset="-122"/>
                 <a:cs typeface="Roboto" pitchFamily="34" charset="-120"/>
               </a:rPr>
-              <a:t>O que eu junto: o Telegram confirma que entregou. Nenhuma linha nova no feed. Nenhum trace no Langfuse.</a:t>
+              <a:t>O que eu junto: o registro tem duas linhas de erro, mesma mensagem, com 8 milionésimos de segundo entre elas.</a:t>
             </a:r>
             <a:endParaRPr lang="en-US" sz="2800" dirty="0"/>
           </a:p>
         </p:txBody>
       </p:sp>
-      <p:sp>
-        <p:nvSpPr>
-          <p:cNvPr id="10" name="Text 6"/>
+      <p:pic>
+        <p:nvPicPr>
+          <p:cNvPr id="11" name="Image 4" descr="art\seta.png">    </p:cNvPr>
+          <p:cNvPicPr>
+            <a:picLocks noChangeAspect="1"/>
+          </p:cNvPicPr>
+          <p:nvPr/>
+        </p:nvPicPr>
+        <p:blipFill>
+          <a:blip r:embed="rId5"/>
+          <a:stretch>
+            <a:fillRect/>
+          </a:stretch>
+        </p:blipFill>
+        <p:spPr>
+          <a:xfrm>
+            <a:off x="2423160" y="9203436"/>
+            <a:ext cx="475488" cy="411480"/>
+          </a:xfrm>
+          <a:prstGeom prst="rect">
+            <a:avLst/>
+          </a:prstGeom>
+        </p:spPr>
+      </p:pic>
+      <p:sp>
+        <p:nvSpPr>
+          <p:cNvPr id="12" name="Text 5"/>
           <p:cNvSpPr txBox="1"/>
           <p:nvPr/>
         </p:nvSpPr>
         <p:spPr>
           <a:xfrm>
-            <a:off x="2423160" y="7470648"/>
-            <a:ext cx="777240" cy="548640"/>
-          </a:xfrm>
-          <a:prstGeom prst="rect">
-            <a:avLst/>
-          </a:prstGeom>
-          <a:noFill/>
-          <a:ln/>
-        </p:spPr>
-        <p:txBody>
-          <a:bodyPr wrap="square" lIns="0" tIns="0" rIns="0" bIns="0" rtlCol="0" anchor="t"/>
-          <a:lstStyle/>
-          <a:p>
-            <a:pPr indent="0" marL="0">
-              <a:buNone/>
-            </a:pPr>
-            <a:r>
-              <a:rPr lang="en-US" sz="3000" b="1" dirty="0">
-                <a:solidFill>
-                  <a:srgbClr val="1F53E5"/>
-                </a:solidFill>
-                <a:latin typeface="Roboto" pitchFamily="34" charset="0"/>
-                <a:ea typeface="Roboto" pitchFamily="34" charset="-122"/>
-                <a:cs typeface="Roboto" pitchFamily="34" charset="-120"/>
-              </a:rPr>
-              <a:t>→</a:t>
-            </a:r>
-            <a:endParaRPr lang="en-US" sz="3000" dirty="0"/>
-          </a:p>
-        </p:txBody>
-      </p:sp>
-      <p:sp>
-        <p:nvSpPr>
-          <p:cNvPr id="11" name="Text 7"/>
-          <p:cNvSpPr txBox="1"/>
-          <p:nvPr/>
-        </p:nvSpPr>
-        <p:spPr>
-          <a:xfrm>
-            <a:off x="3337560" y="7452360"/>
+            <a:off x="3337560" y="9075420"/>
             <a:ext cx="17922240" cy="548640"/>
           </a:xfrm>
           <a:prstGeom prst="rect">
@@ -9989,60 +10773,45 @@
                 <a:ea typeface="Roboto" pitchFamily="34" charset="-122"/>
                 <a:cs typeface="Roboto" pitchFamily="34" charset="-120"/>
               </a:rPr>
-              <a:t>O “recebido” que o app manda de volta não conta — ele responde isso antes de processar qualquer coisa.</a:t>
+              <a:t>Não sei o que a mensagem de erro significa — e não preciso saber para investigar.</a:t>
             </a:r>
             <a:endParaRPr lang="en-US" sz="2800" dirty="0"/>
           </a:p>
         </p:txBody>
       </p:sp>
-      <p:sp>
-        <p:nvSpPr>
-          <p:cNvPr id="12" name="Text 8"/>
+      <p:pic>
+        <p:nvPicPr>
+          <p:cNvPr id="13" name="Image 5" descr="art\seta.png">    </p:cNvPr>
+          <p:cNvPicPr>
+            <a:picLocks noChangeAspect="1"/>
+          </p:cNvPicPr>
+          <p:nvPr/>
+        </p:nvPicPr>
+        <p:blipFill>
+          <a:blip r:embed="rId6"/>
+          <a:stretch>
+            <a:fillRect/>
+          </a:stretch>
+        </p:blipFill>
+        <p:spPr>
+          <a:xfrm>
+            <a:off x="2423160" y="10757916"/>
+            <a:ext cx="475488" cy="411480"/>
+          </a:xfrm>
+          <a:prstGeom prst="rect">
+            <a:avLst/>
+          </a:prstGeom>
+        </p:spPr>
+      </p:pic>
+      <p:sp>
+        <p:nvSpPr>
+          <p:cNvPr id="14" name="Text 6"/>
           <p:cNvSpPr txBox="1"/>
           <p:nvPr/>
         </p:nvSpPr>
         <p:spPr>
           <a:xfrm>
-            <a:off x="2423160" y="8522208"/>
-            <a:ext cx="777240" cy="548640"/>
-          </a:xfrm>
-          <a:prstGeom prst="rect">
-            <a:avLst/>
-          </a:prstGeom>
-          <a:noFill/>
-          <a:ln/>
-        </p:spPr>
-        <p:txBody>
-          <a:bodyPr wrap="square" lIns="0" tIns="0" rIns="0" bIns="0" rtlCol="0" anchor="t"/>
-          <a:lstStyle/>
-          <a:p>
-            <a:pPr indent="0" marL="0">
-              <a:buNone/>
-            </a:pPr>
-            <a:r>
-              <a:rPr lang="en-US" sz="3000" b="1" dirty="0">
-                <a:solidFill>
-                  <a:srgbClr val="1F53E5"/>
-                </a:solidFill>
-                <a:latin typeface="Roboto" pitchFamily="34" charset="0"/>
-                <a:ea typeface="Roboto" pitchFamily="34" charset="-122"/>
-                <a:cs typeface="Roboto" pitchFamily="34" charset="-120"/>
-              </a:rPr>
-              <a:t>→</a:t>
-            </a:r>
-            <a:endParaRPr lang="en-US" sz="3000" dirty="0"/>
-          </a:p>
-        </p:txBody>
-      </p:sp>
-      <p:sp>
-        <p:nvSpPr>
-          <p:cNvPr id="13" name="Text 9"/>
-          <p:cNvSpPr txBox="1"/>
-          <p:nvPr/>
-        </p:nvSpPr>
-        <p:spPr>
-          <a:xfrm>
-            <a:off x="3337560" y="8503920"/>
+            <a:off x="3337560" y="10629900"/>
             <a:ext cx="17922240" cy="548640"/>
           </a:xfrm>
           <a:prstGeom prst="rect">
@@ -10064,13 +10833,13 @@
             <a:r>
               <a:rPr lang="en-US" sz="2800" b="1" dirty="0">
                 <a:solidFill>
-                  <a:srgbClr val="BDBFC7"/>
+                  <a:srgbClr val="F4F5F6"/>
                 </a:solidFill>
                 <a:latin typeface="Roboto" pitchFamily="34" charset="0"/>
                 <a:ea typeface="Roboto" pitchFamily="34" charset="-122"/>
                 <a:cs typeface="Roboto" pitchFamily="34" charset="-120"/>
               </a:rPr>
-              <a:t>O que eu levo ao Claude: “a mensagem chegou e sumiu sem deixar rastro nenhum. Onde ela se perdeu?”</a:t>
+              <a:t>O que eu levo ao Claude: “aconteceram dois erros aqui, ou um só? Repara no horário das duas linhas.”</a:t>
             </a:r>
             <a:endParaRPr lang="en-US" sz="2800" dirty="0"/>
           </a:p>
@@ -10078,7 +10847,7 @@
       </p:sp>
       <p:sp>
         <p:nvSpPr>
-          <p:cNvPr id="14" name="Text 10"/>
+          <p:cNvPr id="15" name="Text 7"/>
           <p:cNvSpPr txBox="1"/>
           <p:nvPr/>
         </p:nvSpPr>
@@ -10151,7 +10920,7 @@
       </p:grpSpPr>
       <p:pic>
         <p:nvPicPr>
-          <p:cNvPr id="2" name="Image 0" descr="C:\Users\PCSTUD~1\AppData\Local\Temp\claude\C--Users-PC-Studio-2-Desktop-6498-Evals\7ce78c02-4c99-40d4-bc57-5394098065c6\scratchpad\art\malha.png">    </p:cNvPr>
+          <p:cNvPr id="2" name="Image 0" descr="art\malha.png">    </p:cNvPr>
           <p:cNvPicPr>
             <a:picLocks noChangeAspect="1"/>
           </p:cNvPicPr>
@@ -10175,7 +10944,7 @@
       </p:pic>
       <p:pic>
         <p:nvPicPr>
-          <p:cNvPr id="3" name="Image 1" descr="C:\Users\PCSTUD~1\AppData\Local\Temp\claude\C--Users-PC-Studio-2-Desktop-6498-Evals\7ce78c02-4c99-40d4-bc57-5394098065c6\scratchpad\art\logo.png">    </p:cNvPr>
+          <p:cNvPr id="3" name="Image 1" descr="art\logo.png">    </p:cNvPr>
           <p:cNvPicPr>
             <a:picLocks noChangeAspect="1"/>
           </p:cNvPicPr>
@@ -10205,7 +10974,7 @@
         </p:nvSpPr>
         <p:spPr>
           <a:xfrm>
-            <a:off x="2423160" y="2148840"/>
+            <a:off x="2423160" y="1051560"/>
             <a:ext cx="19540728" cy="594360"/>
           </a:xfrm>
           <a:prstGeom prst="rect">
@@ -10230,7 +10999,7 @@
                 <a:ea typeface="Encode Sans" pitchFamily="34" charset="-122"/>
                 <a:cs typeface="Encode Sans" pitchFamily="34" charset="-120"/>
               </a:rPr>
-              <a:t>VÍDEO 4.2 — EPISÓDIO C</a:t>
+              <a:t>VÍDEO 4.2 — EPISÓDIO B</a:t>
             </a:r>
             <a:endParaRPr lang="en-US" sz="2100" dirty="0"/>
           </a:p>
@@ -10244,8 +11013,8 @@
         </p:nvSpPr>
         <p:spPr>
           <a:xfrm>
-            <a:off x="2423160" y="2880360"/>
-            <a:ext cx="18745200" cy="2377440"/>
+            <a:off x="2423160" y="1783080"/>
+            <a:ext cx="19568160" cy="2377440"/>
           </a:xfrm>
           <a:prstGeom prst="rect">
             <a:avLst/>
@@ -10272,7 +11041,7 @@
                 <a:ea typeface="Encode Sans" pitchFamily="34" charset="-122"/>
                 <a:cs typeface="Encode Sans" pitchFamily="34" charset="-120"/>
               </a:rPr>
-              <a:t>A conta bateu. O estoque não.</a:t>
+              <a:t>A falha perfeitamente silenciosa</a:t>
             </a:r>
             <a:endParaRPr lang="en-US" sz="6600" dirty="0"/>
           </a:p>
@@ -10280,52 +11049,57 @@
       </p:sp>
       <p:sp>
         <p:nvSpPr>
-          <p:cNvPr id="6" name="Text 2"/>
+          <p:cNvPr id="6" name="Shape 2"/>
+          <p:cNvSpPr/>
+          <p:nvPr/>
+        </p:nvSpPr>
+        <p:spPr>
+          <a:xfrm>
+            <a:off x="2423160" y="4526280"/>
+            <a:ext cx="2011680" cy="68580"/>
+          </a:xfrm>
+          <a:prstGeom prst="rect">
+            <a:avLst/>
+          </a:prstGeom>
+          <a:solidFill>
+            <a:srgbClr val="1F53E5"/>
+          </a:solidFill>
+          <a:ln/>
+        </p:spPr>
+      </p:sp>
+      <p:pic>
+        <p:nvPicPr>
+          <p:cNvPr id="7" name="Image 2" descr="art\seta.png">    </p:cNvPr>
+          <p:cNvPicPr>
+            <a:picLocks noChangeAspect="1"/>
+          </p:cNvPicPr>
+          <p:nvPr/>
+        </p:nvPicPr>
+        <p:blipFill>
+          <a:blip r:embed="rId3"/>
+          <a:stretch>
+            <a:fillRect/>
+          </a:stretch>
+        </p:blipFill>
+        <p:spPr>
+          <a:xfrm>
+            <a:off x="2423160" y="6094476"/>
+            <a:ext cx="475488" cy="411480"/>
+          </a:xfrm>
+          <a:prstGeom prst="rect">
+            <a:avLst/>
+          </a:prstGeom>
+        </p:spPr>
+      </p:pic>
+      <p:sp>
+        <p:nvSpPr>
+          <p:cNvPr id="8" name="Text 3"/>
           <p:cNvSpPr txBox="1"/>
           <p:nvPr/>
         </p:nvSpPr>
         <p:spPr>
           <a:xfrm>
-            <a:off x="2423160" y="5367528"/>
-            <a:ext cx="777240" cy="548640"/>
-          </a:xfrm>
-          <a:prstGeom prst="rect">
-            <a:avLst/>
-          </a:prstGeom>
-          <a:noFill/>
-          <a:ln/>
-        </p:spPr>
-        <p:txBody>
-          <a:bodyPr wrap="square" lIns="0" tIns="0" rIns="0" bIns="0" rtlCol="0" anchor="t"/>
-          <a:lstStyle/>
-          <a:p>
-            <a:pPr indent="0" marL="0">
-              <a:buNone/>
-            </a:pPr>
-            <a:r>
-              <a:rPr lang="en-US" sz="3000" b="1" dirty="0">
-                <a:solidFill>
-                  <a:srgbClr val="1F53E5"/>
-                </a:solidFill>
-                <a:latin typeface="Roboto" pitchFamily="34" charset="0"/>
-                <a:ea typeface="Roboto" pitchFamily="34" charset="-122"/>
-                <a:cs typeface="Roboto" pitchFamily="34" charset="-120"/>
-              </a:rPr>
-              <a:t>→</a:t>
-            </a:r>
-            <a:endParaRPr lang="en-US" sz="3000" dirty="0"/>
-          </a:p>
-        </p:txBody>
-      </p:sp>
-      <p:sp>
-        <p:nvSpPr>
-          <p:cNvPr id="7" name="Text 3"/>
-          <p:cNvSpPr txBox="1"/>
-          <p:nvPr/>
-        </p:nvSpPr>
-        <p:spPr>
-          <a:xfrm>
-            <a:off x="3337560" y="5349240"/>
+            <a:off x="3337560" y="5966460"/>
             <a:ext cx="17922240" cy="548640"/>
           </a:xfrm>
           <a:prstGeom prst="rect">
@@ -10353,61 +11127,46 @@
                 <a:ea typeface="Roboto" pitchFamily="34" charset="-122"/>
                 <a:cs typeface="Roboto" pitchFamily="34" charset="-120"/>
               </a:rPr>
-              <a:t>O sintoma: avisei que comemos 3 porções de lasagna. O bot reagiu com joinha. O estoque continuou com 5.</a:t>
+              <a:t>O sintoma: mandei a foto do cupom. Sem resposta, sem item no estoque, sem nada.</a:t>
             </a:r>
             <a:endParaRPr lang="en-US" sz="2800" dirty="0"/>
           </a:p>
         </p:txBody>
       </p:sp>
-      <p:sp>
-        <p:nvSpPr>
-          <p:cNvPr id="8" name="Text 4"/>
+      <p:pic>
+        <p:nvPicPr>
+          <p:cNvPr id="9" name="Image 3" descr="art\seta.png">    </p:cNvPr>
+          <p:cNvPicPr>
+            <a:picLocks noChangeAspect="1"/>
+          </p:cNvPicPr>
+          <p:nvPr/>
+        </p:nvPicPr>
+        <p:blipFill>
+          <a:blip r:embed="rId4"/>
+          <a:stretch>
+            <a:fillRect/>
+          </a:stretch>
+        </p:blipFill>
+        <p:spPr>
+          <a:xfrm>
+            <a:off x="2423160" y="7648956"/>
+            <a:ext cx="475488" cy="411480"/>
+          </a:xfrm>
+          <a:prstGeom prst="rect">
+            <a:avLst/>
+          </a:prstGeom>
+        </p:spPr>
+      </p:pic>
+      <p:sp>
+        <p:nvSpPr>
+          <p:cNvPr id="10" name="Text 4"/>
           <p:cNvSpPr txBox="1"/>
           <p:nvPr/>
         </p:nvSpPr>
         <p:spPr>
           <a:xfrm>
-            <a:off x="2423160" y="6419088"/>
-            <a:ext cx="777240" cy="548640"/>
-          </a:xfrm>
-          <a:prstGeom prst="rect">
-            <a:avLst/>
-          </a:prstGeom>
-          <a:noFill/>
-          <a:ln/>
-        </p:spPr>
-        <p:txBody>
-          <a:bodyPr wrap="square" lIns="0" tIns="0" rIns="0" bIns="0" rtlCol="0" anchor="t"/>
-          <a:lstStyle/>
-          <a:p>
-            <a:pPr indent="0" marL="0">
-              <a:buNone/>
-            </a:pPr>
-            <a:r>
-              <a:rPr lang="en-US" sz="3000" b="1" dirty="0">
-                <a:solidFill>
-                  <a:srgbClr val="1F53E5"/>
-                </a:solidFill>
-                <a:latin typeface="Roboto" pitchFamily="34" charset="0"/>
-                <a:ea typeface="Roboto" pitchFamily="34" charset="-122"/>
-                <a:cs typeface="Roboto" pitchFamily="34" charset="-120"/>
-              </a:rPr>
-              <a:t>→</a:t>
-            </a:r>
-            <a:endParaRPr lang="en-US" sz="3000" dirty="0"/>
-          </a:p>
-        </p:txBody>
-      </p:sp>
-      <p:sp>
-        <p:nvSpPr>
-          <p:cNvPr id="9" name="Text 5"/>
-          <p:cNvSpPr txBox="1"/>
-          <p:nvPr/>
-        </p:nvSpPr>
-        <p:spPr>
-          <a:xfrm>
-            <a:off x="3337560" y="6400800"/>
-            <a:ext cx="17922240" cy="1097280"/>
+            <a:off x="3337560" y="7520940"/>
+            <a:ext cx="17922240" cy="548640"/>
           </a:xfrm>
           <a:prstGeom prst="rect">
             <a:avLst/>
@@ -10434,60 +11193,45 @@
                 <a:ea typeface="Roboto" pitchFamily="34" charset="-122"/>
                 <a:cs typeface="Roboto" pitchFamily="34" charset="-120"/>
               </a:rPr>
-              <a:t>O que eu junto: o registro mostra que ele entendeu tudo — o prato, as 3 porções, até a conta de 1 e meia para cada.</a:t>
+              <a:t>O que eu junto: o Telegram confirma que entregou. Nenhuma linha nova no feed. Nenhum trace no Langfuse.</a:t>
             </a:r>
             <a:endParaRPr lang="en-US" sz="2800" dirty="0"/>
           </a:p>
         </p:txBody>
       </p:sp>
-      <p:sp>
-        <p:nvSpPr>
-          <p:cNvPr id="10" name="Text 6"/>
+      <p:pic>
+        <p:nvPicPr>
+          <p:cNvPr id="11" name="Image 4" descr="art\seta.png">    </p:cNvPr>
+          <p:cNvPicPr>
+            <a:picLocks noChangeAspect="1"/>
+          </p:cNvPicPr>
+          <p:nvPr/>
+        </p:nvPicPr>
+        <p:blipFill>
+          <a:blip r:embed="rId5"/>
+          <a:stretch>
+            <a:fillRect/>
+          </a:stretch>
+        </p:blipFill>
+        <p:spPr>
+          <a:xfrm>
+            <a:off x="2423160" y="9203436"/>
+            <a:ext cx="475488" cy="411480"/>
+          </a:xfrm>
+          <a:prstGeom prst="rect">
+            <a:avLst/>
+          </a:prstGeom>
+        </p:spPr>
+      </p:pic>
+      <p:sp>
+        <p:nvSpPr>
+          <p:cNvPr id="12" name="Text 5"/>
           <p:cNvSpPr txBox="1"/>
           <p:nvPr/>
         </p:nvSpPr>
         <p:spPr>
           <a:xfrm>
-            <a:off x="2423160" y="8019288"/>
-            <a:ext cx="777240" cy="548640"/>
-          </a:xfrm>
-          <a:prstGeom prst="rect">
-            <a:avLst/>
-          </a:prstGeom>
-          <a:noFill/>
-          <a:ln/>
-        </p:spPr>
-        <p:txBody>
-          <a:bodyPr wrap="square" lIns="0" tIns="0" rIns="0" bIns="0" rtlCol="0" anchor="t"/>
-          <a:lstStyle/>
-          <a:p>
-            <a:pPr indent="0" marL="0">
-              <a:buNone/>
-            </a:pPr>
-            <a:r>
-              <a:rPr lang="en-US" sz="3000" b="1" dirty="0">
-                <a:solidFill>
-                  <a:srgbClr val="1F53E5"/>
-                </a:solidFill>
-                <a:latin typeface="Roboto" pitchFamily="34" charset="0"/>
-                <a:ea typeface="Roboto" pitchFamily="34" charset="-122"/>
-                <a:cs typeface="Roboto" pitchFamily="34" charset="-120"/>
-              </a:rPr>
-              <a:t>→</a:t>
-            </a:r>
-            <a:endParaRPr lang="en-US" sz="3000" dirty="0"/>
-          </a:p>
-        </p:txBody>
-      </p:sp>
-      <p:sp>
-        <p:nvSpPr>
-          <p:cNvPr id="11" name="Text 7"/>
-          <p:cNvSpPr txBox="1"/>
-          <p:nvPr/>
-        </p:nvSpPr>
-        <p:spPr>
-          <a:xfrm>
-            <a:off x="3337560" y="8001000"/>
+            <a:off x="3337560" y="9075420"/>
             <a:ext cx="17922240" cy="548640"/>
           </a:xfrm>
           <a:prstGeom prst="rect">
@@ -10515,60 +11259,45 @@
                 <a:ea typeface="Roboto" pitchFamily="34" charset="-122"/>
                 <a:cs typeface="Roboto" pitchFamily="34" charset="-120"/>
               </a:rPr>
-              <a:t>Ou seja: a inteligência acertou. Alguma outra coisa errou — e eu não sei qual.</a:t>
+              <a:t>O “recebido” que o app manda de volta não conta — ele responde isso antes de processar qualquer coisa.</a:t>
             </a:r>
             <a:endParaRPr lang="en-US" sz="2800" dirty="0"/>
           </a:p>
         </p:txBody>
       </p:sp>
-      <p:sp>
-        <p:nvSpPr>
-          <p:cNvPr id="12" name="Text 8"/>
+      <p:pic>
+        <p:nvPicPr>
+          <p:cNvPr id="13" name="Image 5" descr="art\seta.png">    </p:cNvPr>
+          <p:cNvPicPr>
+            <a:picLocks noChangeAspect="1"/>
+          </p:cNvPicPr>
+          <p:nvPr/>
+        </p:nvPicPr>
+        <p:blipFill>
+          <a:blip r:embed="rId6"/>
+          <a:stretch>
+            <a:fillRect/>
+          </a:stretch>
+        </p:blipFill>
+        <p:spPr>
+          <a:xfrm>
+            <a:off x="2423160" y="10757916"/>
+            <a:ext cx="475488" cy="411480"/>
+          </a:xfrm>
+          <a:prstGeom prst="rect">
+            <a:avLst/>
+          </a:prstGeom>
+        </p:spPr>
+      </p:pic>
+      <p:sp>
+        <p:nvSpPr>
+          <p:cNvPr id="14" name="Text 6"/>
           <p:cNvSpPr txBox="1"/>
           <p:nvPr/>
         </p:nvSpPr>
         <p:spPr>
           <a:xfrm>
-            <a:off x="2423160" y="9070848"/>
-            <a:ext cx="777240" cy="548640"/>
-          </a:xfrm>
-          <a:prstGeom prst="rect">
-            <a:avLst/>
-          </a:prstGeom>
-          <a:noFill/>
-          <a:ln/>
-        </p:spPr>
-        <p:txBody>
-          <a:bodyPr wrap="square" lIns="0" tIns="0" rIns="0" bIns="0" rtlCol="0" anchor="t"/>
-          <a:lstStyle/>
-          <a:p>
-            <a:pPr indent="0" marL="0">
-              <a:buNone/>
-            </a:pPr>
-            <a:r>
-              <a:rPr lang="en-US" sz="3000" b="1" dirty="0">
-                <a:solidFill>
-                  <a:srgbClr val="1F53E5"/>
-                </a:solidFill>
-                <a:latin typeface="Roboto" pitchFamily="34" charset="0"/>
-                <a:ea typeface="Roboto" pitchFamily="34" charset="-122"/>
-                <a:cs typeface="Roboto" pitchFamily="34" charset="-120"/>
-              </a:rPr>
-              <a:t>→</a:t>
-            </a:r>
-            <a:endParaRPr lang="en-US" sz="3000" dirty="0"/>
-          </a:p>
-        </p:txBody>
-      </p:sp>
-      <p:sp>
-        <p:nvSpPr>
-          <p:cNvPr id="13" name="Text 9"/>
-          <p:cNvSpPr txBox="1"/>
-          <p:nvPr/>
-        </p:nvSpPr>
-        <p:spPr>
-          <a:xfrm>
-            <a:off x="3337560" y="9052560"/>
+            <a:off x="3337560" y="10629900"/>
             <a:ext cx="17922240" cy="548640"/>
           </a:xfrm>
           <a:prstGeom prst="rect">
@@ -10590,13 +11319,13 @@
             <a:r>
               <a:rPr lang="en-US" sz="2800" b="1" dirty="0">
                 <a:solidFill>
-                  <a:srgbClr val="BDBFC7"/>
+                  <a:srgbClr val="F4F5F6"/>
                 </a:solidFill>
                 <a:latin typeface="Roboto" pitchFamily="34" charset="0"/>
                 <a:ea typeface="Roboto" pitchFamily="34" charset="-122"/>
                 <a:cs typeface="Roboto" pitchFamily="34" charset="-120"/>
               </a:rPr>
-              <a:t>O que eu levo ao Claude: “ele entendeu certo e mesmo assim o estoque não baixou. Por quê?”</a:t>
+              <a:t>O que eu levo ao Claude: “a mensagem chegou e sumiu sem deixar rastro nenhum. Onde ela se perdeu?”</a:t>
             </a:r>
             <a:endParaRPr lang="en-US" sz="2800" dirty="0"/>
           </a:p>
@@ -10604,7 +11333,7 @@
       </p:sp>
       <p:sp>
         <p:nvSpPr>
-          <p:cNvPr id="14" name="Text 10"/>
+          <p:cNvPr id="15" name="Text 7"/>
           <p:cNvSpPr txBox="1"/>
           <p:nvPr/>
         </p:nvSpPr>
